--- a/presentation/SPAR_Branch_User_Training_Deck.pptx
+++ b/presentation/SPAR_Branch_User_Training_Deck.pptx
@@ -123,19 +123,19 @@
   <p:extLst>
     <p:ext uri="{521415D9-36F7-43E2-AB2F-B90AF26B5E84}">
       <p14:sectionLst xmlns:p14="http://schemas.microsoft.com/office/powerpoint/2010/main">
-        <p14:section name="Welcome" id="{de7892ea-274f-3657-19f4-017b52a0d41a}">
+        <p14:section name="Welcome" id="{ec85c069-b42f-58b1-2d6f-2b0c77638498}">
           <p14:sldIdLst>
             <p14:sldId id="256"/>
             <p14:sldId id="257"/>
             <p14:sldId id="258"/>
           </p14:sldIdLst>
         </p14:section>
-        <p14:section name="Your Role" id="{8378abc9-eb2c-1935-3a8f-56eaf6fc9cc4}">
+        <p14:section name="Your Role" id="{11028bee-5390-2f6d-b201-9209e558201e}">
           <p14:sldIdLst>
             <p14:sldId id="259"/>
           </p14:sldIdLst>
         </p14:section>
-        <p14:section name="Key Features" id="{c38e1720-cba9-be9a-6fd9-9893c1e1f6d0}">
+        <p14:section name="Key Features" id="{3dda3b4e-991a-0cae-7f84-9ee15d2f0f83}">
           <p14:sldIdLst>
             <p14:sldId id="260"/>
             <p14:sldId id="261"/>
@@ -148,7 +148,7 @@
             <p14:sldId id="268"/>
           </p14:sldIdLst>
         </p14:section>
-        <p14:section name="Wrap-up" id="{6383c9ba-e7c2-93d6-45bc-fed628be4db3}">
+        <p14:section name="Wrap-up" id="{8f4ac1de-82ac-7e0e-67ff-25e55de046ea}">
           <p14:sldIdLst>
             <p14:sldId id="269"/>
             <p14:sldId id="270"/>
@@ -11043,38 +11043,9 @@
           </a:p>
         </p:txBody>
       </p:sp>
-      <p:sp>
-        <p:nvSpPr>
-          <p:cNvPr id="18" name="Screenshot placeholder"/>
-          <p:cNvSpPr/>
-          <p:nvPr/>
-        </p:nvSpPr>
-        <p:spPr>
-          <a:xfrm>
-            <a:off x="7040880" y="1508760"/>
-            <a:ext cx="4599432" cy="3886200"/>
-          </a:xfrm>
-          <a:prstGeom prst="roundRect">
-            <a:avLst>
-              <a:gd name="adj" fmla="val 2824"/>
-            </a:avLst>
-          </a:prstGeom>
-          <a:solidFill>
-            <a:schemeClr val="tx2">
-              <a:alpha val="65000"/>
-            </a:schemeClr>
-          </a:solidFill>
-          <a:ln w="15875">
-            <a:solidFill>
-              <a:schemeClr val="accent1"/>
-            </a:solidFill>
-            <a:prstDash val="dash"/>
-          </a:ln>
-        </p:spPr>
-      </p:sp>
       <p:pic>
         <p:nvPicPr>
-          <p:cNvPr id="19" name="Screenshot icon" descr="preencoded.png">    </p:cNvPr>
+          <p:cNvPr id="18" name="Screenshot: SPAR Fresh Procurement sign-in screen" descr="SPAR Fresh Procurement sign-in screen">    </p:cNvPr>
           <p:cNvPicPr>
             <a:picLocks noChangeAspect="1"/>
           </p:cNvPicPr>
@@ -11088,8 +11059,8 @@
         </p:blipFill>
         <p:spPr>
           <a:xfrm>
-            <a:off x="9066276" y="2811780"/>
-            <a:ext cx="548640" cy="548640"/>
+            <a:off x="7040880" y="1508760"/>
+            <a:ext cx="4599432" cy="3886200"/>
           </a:xfrm>
           <a:prstGeom prst="rect">
             <a:avLst/>
@@ -11098,59 +11069,25 @@
       </p:pic>
       <p:sp>
         <p:nvSpPr>
-          <p:cNvPr id="20" name="Screenshot label"/>
-          <p:cNvSpPr txBox="1"/>
-          <p:nvPr/>
-        </p:nvSpPr>
-        <p:spPr>
-          <a:xfrm>
-            <a:off x="7315200" y="3497580"/>
-            <a:ext cx="4050792" cy="822960"/>
-          </a:xfrm>
-          <a:prstGeom prst="rect">
-            <a:avLst/>
-          </a:prstGeom>
-          <a:noFill/>
-          <a:ln/>
-        </p:spPr>
-        <p:txBody>
-          <a:bodyPr wrap="square" lIns="0" tIns="0" rIns="0" bIns="0" rtlCol="0" anchor="t"/>
-          <a:lstStyle/>
-          <a:p>
-            <a:pPr algn="ctr" indent="0" marL="0">
-              <a:spcAft>
-                <a:spcPts val="400"/>
-              </a:spcAft>
-              <a:buNone/>
-            </a:pPr>
-            <a:r>
-              <a:rPr lang="en-US" sz="1300" b="1" dirty="0">
-                <a:solidFill>
-                  <a:schemeClr val="bg2"/>
-                </a:solidFill>
-              </a:rPr>
-              <a:t>Insert screenshot</a:t>
-            </a:r>
-            <a:endParaRPr lang="en-US" sz="1300" dirty="0"/>
-          </a:p>
-          <a:p>
-            <a:pPr algn="ctr" indent="0" marL="0">
-              <a:spcAft>
-                <a:spcPts val="400"/>
-              </a:spcAft>
-              <a:buNone/>
-            </a:pPr>
-            <a:r>
-              <a:rPr lang="en-US" sz="1300" dirty="0">
-                <a:solidFill>
-                  <a:schemeClr val="bg2"/>
-                </a:solidFill>
-              </a:rPr>
-              <a:t>Branch Dashboard home screen</a:t>
-            </a:r>
-            <a:endParaRPr lang="en-US" sz="1300" dirty="0"/>
-          </a:p>
-        </p:txBody>
+          <p:cNvPr id="19" name="Screenshot frame"/>
+          <p:cNvSpPr/>
+          <p:nvPr/>
+        </p:nvSpPr>
+        <p:spPr>
+          <a:xfrm>
+            <a:off x="7040880" y="1508760"/>
+            <a:ext cx="4599432" cy="3886200"/>
+          </a:xfrm>
+          <a:prstGeom prst="rect">
+            <a:avLst/>
+          </a:prstGeom>
+          <a:ln w="19050">
+            <a:solidFill>
+              <a:schemeClr val="accent1"/>
+            </a:solidFill>
+            <a:prstDash val="solid"/>
+          </a:ln>
+        </p:spPr>
       </p:sp>
       <p:sp>
         <p:nvSpPr>
@@ -13891,38 +13828,9 @@
           </a:p>
         </p:txBody>
       </p:sp>
-      <p:sp>
-        <p:nvSpPr>
-          <p:cNvPr id="31" name="Screenshot placeholder"/>
-          <p:cNvSpPr/>
-          <p:nvPr/>
-        </p:nvSpPr>
-        <p:spPr>
-          <a:xfrm>
-            <a:off x="7406640" y="1783080"/>
-            <a:ext cx="4233672" cy="3538728"/>
-          </a:xfrm>
-          <a:prstGeom prst="roundRect">
-            <a:avLst>
-              <a:gd name="adj" fmla="val 3101"/>
-            </a:avLst>
-          </a:prstGeom>
-          <a:solidFill>
-            <a:schemeClr val="tx2">
-              <a:alpha val="65000"/>
-            </a:schemeClr>
-          </a:solidFill>
-          <a:ln w="15875">
-            <a:solidFill>
-              <a:schemeClr val="accent1"/>
-            </a:solidFill>
-            <a:prstDash val="dash"/>
-          </a:ln>
-        </p:spPr>
-      </p:sp>
       <p:pic>
         <p:nvPicPr>
-          <p:cNvPr id="32" name="Screenshot icon" descr="preencoded.png">    </p:cNvPr>
+          <p:cNvPr id="31" name="Screenshot: Branch Dashboard with the six tabs" descr="Branch Dashboard with the six tabs">    </p:cNvPr>
           <p:cNvPicPr>
             <a:picLocks noChangeAspect="1"/>
           </p:cNvPicPr>
@@ -13936,8 +13844,8 @@
         </p:blipFill>
         <p:spPr>
           <a:xfrm>
-            <a:off x="9249156" y="2912364"/>
-            <a:ext cx="548640" cy="548640"/>
+            <a:off x="7406640" y="1783080"/>
+            <a:ext cx="4233672" cy="3538728"/>
           </a:xfrm>
           <a:prstGeom prst="rect">
             <a:avLst/>
@@ -13946,63 +13854,29 @@
       </p:pic>
       <p:sp>
         <p:nvSpPr>
-          <p:cNvPr id="33" name="Screenshot label"/>
-          <p:cNvSpPr txBox="1"/>
-          <p:nvPr/>
-        </p:nvSpPr>
-        <p:spPr>
-          <a:xfrm>
-            <a:off x="7680960" y="3598164"/>
-            <a:ext cx="3685032" cy="822960"/>
-          </a:xfrm>
-          <a:prstGeom prst="rect">
-            <a:avLst/>
-          </a:prstGeom>
-          <a:noFill/>
-          <a:ln/>
-        </p:spPr>
-        <p:txBody>
-          <a:bodyPr wrap="square" lIns="0" tIns="0" rIns="0" bIns="0" rtlCol="0" anchor="t"/>
-          <a:lstStyle/>
-          <a:p>
-            <a:pPr algn="ctr" indent="0" marL="0">
-              <a:spcAft>
-                <a:spcPts val="400"/>
-              </a:spcAft>
-              <a:buNone/>
-            </a:pPr>
-            <a:r>
-              <a:rPr lang="en-US" sz="1300" b="1" dirty="0">
-                <a:solidFill>
-                  <a:schemeClr val="bg2"/>
-                </a:solidFill>
-              </a:rPr>
-              <a:t>Insert screenshot</a:t>
-            </a:r>
-            <a:endParaRPr lang="en-US" sz="1300" dirty="0"/>
-          </a:p>
-          <a:p>
-            <a:pPr algn="ctr" indent="0" marL="0">
-              <a:spcAft>
-                <a:spcPts val="400"/>
-              </a:spcAft>
-              <a:buNone/>
-            </a:pPr>
-            <a:r>
-              <a:rPr lang="en-US" sz="1300" dirty="0">
-                <a:solidFill>
-                  <a:schemeClr val="bg2"/>
-                </a:solidFill>
-              </a:rPr>
-              <a:t>Branch Dashboard with the six tabs labelled</a:t>
-            </a:r>
-            <a:endParaRPr lang="en-US" sz="1300" dirty="0"/>
-          </a:p>
-        </p:txBody>
-      </p:sp>
-      <p:sp>
-        <p:nvSpPr>
-          <p:cNvPr id="34" name="Benefit pill"/>
+          <p:cNvPr id="32" name="Screenshot frame"/>
+          <p:cNvSpPr/>
+          <p:nvPr/>
+        </p:nvSpPr>
+        <p:spPr>
+          <a:xfrm>
+            <a:off x="7406640" y="1783080"/>
+            <a:ext cx="4233672" cy="3538728"/>
+          </a:xfrm>
+          <a:prstGeom prst="rect">
+            <a:avLst/>
+          </a:prstGeom>
+          <a:ln w="19050">
+            <a:solidFill>
+              <a:schemeClr val="accent1"/>
+            </a:solidFill>
+            <a:prstDash val="solid"/>
+          </a:ln>
+        </p:spPr>
+      </p:sp>
+      <p:sp>
+        <p:nvSpPr>
+          <p:cNvPr id="33" name="Benefit pill"/>
           <p:cNvSpPr/>
           <p:nvPr/>
         </p:nvSpPr>
@@ -14031,7 +13905,7 @@
       </p:sp>
       <p:pic>
         <p:nvPicPr>
-          <p:cNvPr id="35" name="Benefit icon" descr="preencoded.png">    </p:cNvPr>
+          <p:cNvPr id="34" name="Benefit icon" descr="preencoded.png">    </p:cNvPr>
           <p:cNvPicPr>
             <a:picLocks noChangeAspect="1"/>
           </p:cNvPicPr>
@@ -14055,7 +13929,7 @@
       </p:pic>
       <p:sp>
         <p:nvSpPr>
-          <p:cNvPr id="36" name="Text 25"/>
+          <p:cNvPr id="35" name="Text 24"/>
           <p:cNvSpPr txBox="1"/>
           <p:nvPr/>
         </p:nvSpPr>
@@ -14428,7 +14302,7 @@
         <p:spPr>
           <a:xfrm>
             <a:off x="1463040" y="1481328"/>
-            <a:ext cx="5394960" cy="868680"/>
+            <a:ext cx="4434840" cy="914400"/>
           </a:xfrm>
           <a:prstGeom prst="rect">
             <a:avLst/>
@@ -14535,7 +14409,7 @@
         <p:spPr>
           <a:xfrm>
             <a:off x="1463040" y="2468880"/>
-            <a:ext cx="5394960" cy="868680"/>
+            <a:ext cx="4434840" cy="914400"/>
           </a:xfrm>
           <a:prstGeom prst="rect">
             <a:avLst/>
@@ -14642,7 +14516,7 @@
         <p:spPr>
           <a:xfrm>
             <a:off x="1463040" y="3456432"/>
-            <a:ext cx="5394960" cy="868680"/>
+            <a:ext cx="4434840" cy="914400"/>
           </a:xfrm>
           <a:prstGeom prst="rect">
             <a:avLst/>
@@ -14749,7 +14623,7 @@
         <p:spPr>
           <a:xfrm>
             <a:off x="1463040" y="4443984"/>
-            <a:ext cx="5394960" cy="868680"/>
+            <a:ext cx="4434840" cy="914400"/>
           </a:xfrm>
           <a:prstGeom prst="rect">
             <a:avLst/>
@@ -14796,38 +14670,9 @@
           </a:p>
         </p:txBody>
       </p:sp>
-      <p:sp>
-        <p:nvSpPr>
-          <p:cNvPr id="18" name="Screenshot placeholder"/>
-          <p:cNvSpPr/>
-          <p:nvPr/>
-        </p:nvSpPr>
-        <p:spPr>
-          <a:xfrm>
-            <a:off x="7040880" y="1463040"/>
-            <a:ext cx="4599432" cy="3840480"/>
-          </a:xfrm>
-          <a:prstGeom prst="roundRect">
-            <a:avLst>
-              <a:gd name="adj" fmla="val 2857"/>
-            </a:avLst>
-          </a:prstGeom>
-          <a:solidFill>
-            <a:schemeClr val="tx2">
-              <a:alpha val="65000"/>
-            </a:schemeClr>
-          </a:solidFill>
-          <a:ln w="15875">
-            <a:solidFill>
-              <a:schemeClr val="accent1"/>
-            </a:solidFill>
-            <a:prstDash val="dash"/>
-          </a:ln>
-        </p:spPr>
-      </p:sp>
       <p:pic>
         <p:nvPicPr>
-          <p:cNvPr id="19" name="Screenshot icon" descr="preencoded.png">    </p:cNvPr>
+          <p:cNvPr id="18" name="Screenshot: Product list with promotion badges and Stock in Hand" descr="Product list with promotion badges and Stock in Hand">    </p:cNvPr>
           <p:cNvPicPr>
             <a:picLocks noChangeAspect="1"/>
           </p:cNvPicPr>
@@ -14841,8 +14686,8 @@
         </p:blipFill>
         <p:spPr>
           <a:xfrm>
-            <a:off x="9066276" y="2743200"/>
-            <a:ext cx="548640" cy="548640"/>
+            <a:off x="6153912" y="1463040"/>
+            <a:ext cx="5486400" cy="3840480"/>
           </a:xfrm>
           <a:prstGeom prst="rect">
             <a:avLst/>
@@ -14851,63 +14696,29 @@
       </p:pic>
       <p:sp>
         <p:nvSpPr>
-          <p:cNvPr id="20" name="Screenshot label"/>
-          <p:cNvSpPr txBox="1"/>
-          <p:nvPr/>
-        </p:nvSpPr>
-        <p:spPr>
-          <a:xfrm>
-            <a:off x="7315200" y="3429000"/>
-            <a:ext cx="4050792" cy="822960"/>
-          </a:xfrm>
-          <a:prstGeom prst="rect">
-            <a:avLst/>
-          </a:prstGeom>
-          <a:noFill/>
-          <a:ln/>
-        </p:spPr>
-        <p:txBody>
-          <a:bodyPr wrap="square" lIns="0" tIns="0" rIns="0" bIns="0" rtlCol="0" anchor="t"/>
-          <a:lstStyle/>
-          <a:p>
-            <a:pPr algn="ctr" indent="0" marL="0">
-              <a:spcAft>
-                <a:spcPts val="400"/>
-              </a:spcAft>
-              <a:buNone/>
-            </a:pPr>
-            <a:r>
-              <a:rPr lang="en-US" sz="1300" b="1" dirty="0">
-                <a:solidFill>
-                  <a:schemeClr val="bg2"/>
-                </a:solidFill>
-              </a:rPr>
-              <a:t>Insert screenshot</a:t>
-            </a:r>
-            <a:endParaRPr lang="en-US" sz="1300" dirty="0"/>
-          </a:p>
-          <a:p>
-            <a:pPr algn="ctr" indent="0" marL="0">
-              <a:spcAft>
-                <a:spcPts val="400"/>
-              </a:spcAft>
-              <a:buNone/>
-            </a:pPr>
-            <a:r>
-              <a:rPr lang="en-US" sz="1300" dirty="0">
-                <a:solidFill>
-                  <a:schemeClr val="bg2"/>
-                </a:solidFill>
-              </a:rPr>
-              <a:t>Product list: search, category filter, Stock in Hand, promotion badge</a:t>
-            </a:r>
-            <a:endParaRPr lang="en-US" sz="1300" dirty="0"/>
-          </a:p>
-        </p:txBody>
-      </p:sp>
-      <p:sp>
-        <p:nvSpPr>
-          <p:cNvPr id="21" name="Benefit pill"/>
+          <p:cNvPr id="19" name="Screenshot frame"/>
+          <p:cNvSpPr/>
+          <p:nvPr/>
+        </p:nvSpPr>
+        <p:spPr>
+          <a:xfrm>
+            <a:off x="6153912" y="1463040"/>
+            <a:ext cx="5486400" cy="3840480"/>
+          </a:xfrm>
+          <a:prstGeom prst="rect">
+            <a:avLst/>
+          </a:prstGeom>
+          <a:ln w="19050">
+            <a:solidFill>
+              <a:schemeClr val="accent1"/>
+            </a:solidFill>
+            <a:prstDash val="solid"/>
+          </a:ln>
+        </p:spPr>
+      </p:sp>
+      <p:sp>
+        <p:nvSpPr>
+          <p:cNvPr id="20" name="Benefit pill"/>
           <p:cNvSpPr/>
           <p:nvPr/>
         </p:nvSpPr>
@@ -14936,7 +14747,7 @@
       </p:sp>
       <p:pic>
         <p:nvPicPr>
-          <p:cNvPr id="22" name="Benefit icon" descr="preencoded.png">    </p:cNvPr>
+          <p:cNvPr id="21" name="Benefit icon" descr="preencoded.png">    </p:cNvPr>
           <p:cNvPicPr>
             <a:picLocks noChangeAspect="1"/>
           </p:cNvPicPr>
@@ -14960,7 +14771,7 @@
       </p:pic>
       <p:sp>
         <p:nvSpPr>
-          <p:cNvPr id="23" name="Text 14"/>
+          <p:cNvPr id="22" name="Text 13"/>
           <p:cNvSpPr txBox="1"/>
           <p:nvPr/>
         </p:nvSpPr>
@@ -15905,38 +15716,9 @@
           </a:p>
         </p:txBody>
       </p:sp>
-      <p:sp>
-        <p:nvSpPr>
-          <p:cNvPr id="22" name="Screenshot placeholder"/>
-          <p:cNvSpPr/>
-          <p:nvPr/>
-        </p:nvSpPr>
-        <p:spPr>
-          <a:xfrm>
-            <a:off x="6812280" y="3840480"/>
-            <a:ext cx="4828032" cy="1554480"/>
-          </a:xfrm>
-          <a:prstGeom prst="roundRect">
-            <a:avLst>
-              <a:gd name="adj" fmla="val 7059"/>
-            </a:avLst>
-          </a:prstGeom>
-          <a:solidFill>
-            <a:schemeClr val="tx2">
-              <a:alpha val="65000"/>
-            </a:schemeClr>
-          </a:solidFill>
-          <a:ln w="15875">
-            <a:solidFill>
-              <a:schemeClr val="accent1"/>
-            </a:solidFill>
-            <a:prstDash val="dash"/>
-          </a:ln>
-        </p:spPr>
-      </p:sp>
       <p:pic>
         <p:nvPicPr>
-          <p:cNvPr id="23" name="Screenshot icon" descr="preencoded.png">    </p:cNvPr>
+          <p:cNvPr id="22" name="Screenshot: Order form with quantities, Save Order and Submit Order" descr="Order form with quantities, Save Order and Submit Order">    </p:cNvPr>
           <p:cNvPicPr>
             <a:picLocks noChangeAspect="1"/>
           </p:cNvPicPr>
@@ -15950,8 +15732,8 @@
         </p:blipFill>
         <p:spPr>
           <a:xfrm>
-            <a:off x="8951976" y="3977640"/>
-            <a:ext cx="548640" cy="548640"/>
+            <a:off x="6812280" y="3840480"/>
+            <a:ext cx="4828032" cy="1554480"/>
           </a:xfrm>
           <a:prstGeom prst="rect">
             <a:avLst/>
@@ -15960,63 +15742,29 @@
       </p:pic>
       <p:sp>
         <p:nvSpPr>
-          <p:cNvPr id="24" name="Screenshot label"/>
-          <p:cNvSpPr txBox="1"/>
-          <p:nvPr/>
-        </p:nvSpPr>
-        <p:spPr>
-          <a:xfrm>
-            <a:off x="7086600" y="4663440"/>
-            <a:ext cx="4279392" cy="822960"/>
-          </a:xfrm>
-          <a:prstGeom prst="rect">
-            <a:avLst/>
-          </a:prstGeom>
-          <a:noFill/>
-          <a:ln/>
-        </p:spPr>
-        <p:txBody>
-          <a:bodyPr wrap="square" lIns="0" tIns="0" rIns="0" bIns="0" rtlCol="0" anchor="t"/>
-          <a:lstStyle/>
-          <a:p>
-            <a:pPr algn="ctr" indent="0" marL="0">
-              <a:spcAft>
-                <a:spcPts val="400"/>
-              </a:spcAft>
-              <a:buNone/>
-            </a:pPr>
-            <a:r>
-              <a:rPr lang="en-US" sz="1300" b="1" dirty="0">
-                <a:solidFill>
-                  <a:schemeClr val="bg2"/>
-                </a:solidFill>
-              </a:rPr>
-              <a:t>Insert screenshot</a:t>
-            </a:r>
-            <a:endParaRPr lang="en-US" sz="1300" dirty="0"/>
-          </a:p>
-          <a:p>
-            <a:pPr algn="ctr" indent="0" marL="0">
-              <a:spcAft>
-                <a:spcPts val="400"/>
-              </a:spcAft>
-              <a:buNone/>
-            </a:pPr>
-            <a:r>
-              <a:rPr lang="en-US" sz="1300" dirty="0">
-                <a:solidFill>
-                  <a:schemeClr val="bg2"/>
-                </a:solidFill>
-              </a:rPr>
-              <a:t>Order form with Save Order / Submit Order</a:t>
-            </a:r>
-            <a:endParaRPr lang="en-US" sz="1300" dirty="0"/>
-          </a:p>
-        </p:txBody>
-      </p:sp>
-      <p:sp>
-        <p:nvSpPr>
-          <p:cNvPr id="25" name="Benefit pill"/>
+          <p:cNvPr id="23" name="Screenshot frame"/>
+          <p:cNvSpPr/>
+          <p:nvPr/>
+        </p:nvSpPr>
+        <p:spPr>
+          <a:xfrm>
+            <a:off x="6812280" y="3840480"/>
+            <a:ext cx="4828032" cy="1554480"/>
+          </a:xfrm>
+          <a:prstGeom prst="rect">
+            <a:avLst/>
+          </a:prstGeom>
+          <a:ln w="19050">
+            <a:solidFill>
+              <a:schemeClr val="accent1"/>
+            </a:solidFill>
+            <a:prstDash val="solid"/>
+          </a:ln>
+        </p:spPr>
+      </p:sp>
+      <p:sp>
+        <p:nvSpPr>
+          <p:cNvPr id="24" name="Benefit pill"/>
           <p:cNvSpPr/>
           <p:nvPr/>
         </p:nvSpPr>
@@ -16045,7 +15793,7 @@
       </p:sp>
       <p:pic>
         <p:nvPicPr>
-          <p:cNvPr id="26" name="Benefit icon" descr="preencoded.png">    </p:cNvPr>
+          <p:cNvPr id="25" name="Benefit icon" descr="preencoded.png">    </p:cNvPr>
           <p:cNvPicPr>
             <a:picLocks noChangeAspect="1"/>
           </p:cNvPicPr>
@@ -16069,7 +15817,7 @@
       </p:pic>
       <p:sp>
         <p:nvSpPr>
-          <p:cNvPr id="27" name="Text 21"/>
+          <p:cNvPr id="26" name="Text 20"/>
           <p:cNvSpPr txBox="1"/>
           <p:nvPr/>
         </p:nvSpPr>
@@ -17025,38 +16773,9 @@
           </a:p>
         </p:txBody>
       </p:sp>
-      <p:sp>
-        <p:nvSpPr>
-          <p:cNvPr id="26" name="Screenshot placeholder"/>
-          <p:cNvSpPr/>
-          <p:nvPr/>
-        </p:nvSpPr>
-        <p:spPr>
-          <a:xfrm>
-            <a:off x="6812280" y="4206240"/>
-            <a:ext cx="4828032" cy="1188720"/>
-          </a:xfrm>
-          <a:prstGeom prst="roundRect">
-            <a:avLst>
-              <a:gd name="adj" fmla="val 9231"/>
-            </a:avLst>
-          </a:prstGeom>
-          <a:solidFill>
-            <a:schemeClr val="tx2">
-              <a:alpha val="65000"/>
-            </a:schemeClr>
-          </a:solidFill>
-          <a:ln w="15875">
-            <a:solidFill>
-              <a:schemeClr val="accent1"/>
-            </a:solidFill>
-            <a:prstDash val="dash"/>
-          </a:ln>
-        </p:spPr>
-      </p:sp>
       <p:pic>
         <p:nvPicPr>
-          <p:cNvPr id="27" name="Screenshot icon" descr="preencoded.png">    </p:cNvPr>
+          <p:cNvPr id="26" name="Screenshot: Auto-submitted orders as head office sees them" descr="Auto-submitted orders as head office sees them">    </p:cNvPr>
           <p:cNvPicPr>
             <a:picLocks noChangeAspect="1"/>
           </p:cNvPicPr>
@@ -17070,8 +16789,8 @@
         </p:blipFill>
         <p:spPr>
           <a:xfrm>
-            <a:off x="8951976" y="4160520"/>
-            <a:ext cx="548640" cy="548640"/>
+            <a:off x="6812280" y="4206240"/>
+            <a:ext cx="4828032" cy="1188720"/>
           </a:xfrm>
           <a:prstGeom prst="rect">
             <a:avLst/>
@@ -17080,63 +16799,29 @@
       </p:pic>
       <p:sp>
         <p:nvSpPr>
-          <p:cNvPr id="28" name="Screenshot label"/>
-          <p:cNvSpPr txBox="1"/>
-          <p:nvPr/>
-        </p:nvSpPr>
-        <p:spPr>
-          <a:xfrm>
-            <a:off x="7086600" y="4846320"/>
-            <a:ext cx="4279392" cy="822960"/>
-          </a:xfrm>
-          <a:prstGeom prst="rect">
-            <a:avLst/>
-          </a:prstGeom>
-          <a:noFill/>
-          <a:ln/>
-        </p:spPr>
-        <p:txBody>
-          <a:bodyPr wrap="square" lIns="0" tIns="0" rIns="0" bIns="0" rtlCol="0" anchor="t"/>
-          <a:lstStyle/>
-          <a:p>
-            <a:pPr algn="ctr" indent="0" marL="0">
-              <a:spcAft>
-                <a:spcPts val="400"/>
-              </a:spcAft>
-              <a:buNone/>
-            </a:pPr>
-            <a:r>
-              <a:rPr lang="en-US" sz="1300" b="1" dirty="0">
-                <a:solidFill>
-                  <a:schemeClr val="bg2"/>
-                </a:solidFill>
-              </a:rPr>
-              <a:t>Insert screenshot</a:t>
-            </a:r>
-            <a:endParaRPr lang="en-US" sz="1300" dirty="0"/>
-          </a:p>
-          <a:p>
-            <a:pPr algn="ctr" indent="0" marL="0">
-              <a:spcAft>
-                <a:spcPts val="400"/>
-              </a:spcAft>
-              <a:buNone/>
-            </a:pPr>
-            <a:r>
-              <a:rPr lang="en-US" sz="1300" dirty="0">
-                <a:solidFill>
-                  <a:schemeClr val="bg2"/>
-                </a:solidFill>
-              </a:rPr>
-              <a:t>"Your order was submitted automatically" message</a:t>
-            </a:r>
-            <a:endParaRPr lang="en-US" sz="1300" dirty="0"/>
-          </a:p>
-        </p:txBody>
-      </p:sp>
-      <p:sp>
-        <p:nvSpPr>
-          <p:cNvPr id="29" name="Benefit pill"/>
+          <p:cNvPr id="27" name="Screenshot frame"/>
+          <p:cNvSpPr/>
+          <p:nvPr/>
+        </p:nvSpPr>
+        <p:spPr>
+          <a:xfrm>
+            <a:off x="6812280" y="4206240"/>
+            <a:ext cx="4828032" cy="1188720"/>
+          </a:xfrm>
+          <a:prstGeom prst="rect">
+            <a:avLst/>
+          </a:prstGeom>
+          <a:ln w="19050">
+            <a:solidFill>
+              <a:schemeClr val="accent1"/>
+            </a:solidFill>
+            <a:prstDash val="solid"/>
+          </a:ln>
+        </p:spPr>
+      </p:sp>
+      <p:sp>
+        <p:nvSpPr>
+          <p:cNvPr id="28" name="Benefit pill"/>
           <p:cNvSpPr/>
           <p:nvPr/>
         </p:nvSpPr>
@@ -17165,7 +16850,7 @@
       </p:sp>
       <p:pic>
         <p:nvPicPr>
-          <p:cNvPr id="30" name="Benefit icon" descr="preencoded.png">    </p:cNvPr>
+          <p:cNvPr id="29" name="Benefit icon" descr="preencoded.png">    </p:cNvPr>
           <p:cNvPicPr>
             <a:picLocks noChangeAspect="1"/>
           </p:cNvPicPr>
@@ -17189,7 +16874,7 @@
       </p:pic>
       <p:sp>
         <p:nvSpPr>
-          <p:cNvPr id="31" name="Text 23"/>
+          <p:cNvPr id="30" name="Text 22"/>
           <p:cNvSpPr txBox="1"/>
           <p:nvPr/>
         </p:nvSpPr>

--- a/presentation/SPAR_Branch_User_Training_Deck.pptx
+++ b/presentation/SPAR_Branch_User_Training_Deck.pptx
@@ -20,11 +20,9 @@
     <p:sldId id="268" r:id="rId14"/>
     <p:sldId id="269" r:id="rId15"/>
     <p:sldId id="270" r:id="rId16"/>
-    <p:sldId id="271" r:id="rId17"/>
-    <p:sldId id="272" r:id="rId18"/>
   </p:sldIdLst>
   <p:notesMasterIdLst>
-    <p:notesMasterId r:id="rId19"/>
+    <p:notesMasterId r:id="rId17"/>
   </p:notesMasterIdLst>
   <p:sldSz cx="12192000" cy="6858000"/>
   <p:notesSz cx="6858000" cy="12192000"/>
@@ -123,19 +121,19 @@
   <p:extLst>
     <p:ext uri="{521415D9-36F7-43E2-AB2F-B90AF26B5E84}">
       <p14:sectionLst xmlns:p14="http://schemas.microsoft.com/office/powerpoint/2010/main">
-        <p14:section name="Welcome" id="{ec85c069-b42f-58b1-2d6f-2b0c77638498}">
+        <p14:section name="Welcome" id="{b37df115-065c-e574-90b3-fb1415fe32ec}">
           <p14:sldIdLst>
             <p14:sldId id="256"/>
             <p14:sldId id="257"/>
             <p14:sldId id="258"/>
           </p14:sldIdLst>
         </p14:section>
-        <p14:section name="Your Role" id="{11028bee-5390-2f6d-b201-9209e558201e}">
+        <p14:section name="Your Role" id="{04d4c294-8fff-2157-f46d-f624d9f3859e}">
           <p14:sldIdLst>
             <p14:sldId id="259"/>
           </p14:sldIdLst>
         </p14:section>
-        <p14:section name="Key Features" id="{3dda3b4e-991a-0cae-7f84-9ee15d2f0f83}">
+        <p14:section name="Key Features" id="{9f3ae9e4-dce8-4a0d-daeb-5c0699ee88f9}">
           <p14:sldIdLst>
             <p14:sldId id="260"/>
             <p14:sldId id="261"/>
@@ -144,16 +142,14 @@
             <p14:sldId id="264"/>
             <p14:sldId id="265"/>
             <p14:sldId id="266"/>
+          </p14:sldIdLst>
+        </p14:section>
+        <p14:section name="Wrap-up" id="{33e2127a-c605-8761-cbdd-025f080dd029}">
+          <p14:sldIdLst>
             <p14:sldId id="267"/>
             <p14:sldId id="268"/>
-          </p14:sldIdLst>
-        </p14:section>
-        <p14:section name="Wrap-up" id="{8f4ac1de-82ac-7e0e-67ff-25e55de046ea}">
-          <p14:sldIdLst>
             <p14:sldId id="269"/>
             <p14:sldId id="270"/>
-            <p14:sldId id="271"/>
-            <p14:sldId id="272"/>
           </p14:sldIdLst>
         </p14:section>
       </p14:sectionLst>
@@ -648,7 +644,7 @@
           <a:p>
             <a:r>
               <a:rPr lang="en-US" dirty="0"/>
-              <a:t>Demo with a short delivery: ordered 10 kg, received 8 kg, note "2 kg damaged". Show the red highlight afterwards.</a:t>
+              <a:t>Unlike an order, safety stock is not per day. It stays saved until the branch edits or clears it.</a:t>
             </a:r>
             <a:endParaRPr lang="en-US" dirty="0"/>
           </a:p>
@@ -736,7 +732,7 @@
           <a:p>
             <a:r>
               <a:rPr lang="en-US" dirty="0"/>
-              <a:t>Suggest printing the day's PO and keeping it at the receiving door.</a:t>
+              <a:t>Walk through one real order from yesterday, from draft to confirmed.</a:t>
             </a:r>
             <a:endParaRPr lang="en-US" dirty="0"/>
           </a:p>
@@ -824,7 +820,7 @@
           <a:p>
             <a:r>
               <a:rPr lang="en-US" dirty="0"/>
-              <a:t>Unlike an order, safety stock is not per day. It stays saved until the branch edits or clears it.</a:t>
+              <a:t>Recap: the system saves time, reduces waste, protects against missed orders and puts every delivery on record.</a:t>
             </a:r>
             <a:endParaRPr lang="en-US" dirty="0"/>
           </a:p>
@@ -912,7 +908,7 @@
           <a:p>
             <a:r>
               <a:rPr lang="en-US" dirty="0"/>
-              <a:t>Walk through one real order from yesterday, from draft to confirmed.</a:t>
+              <a:t>Hand out the starting passwords on paper at the session, then have each branch change it on the spot.</a:t>
             </a:r>
             <a:endParaRPr lang="en-US" dirty="0"/>
           </a:p>
@@ -1000,7 +996,7 @@
           <a:p>
             <a:r>
               <a:rPr lang="en-US" dirty="0"/>
-              <a:t>Recap: the system saves time, reduces waste, protects against missed orders and puts every delivery on record.</a:t>
+              <a:t>Encourage branches to use the Messages tab first so questions are in writing; call for anything urgent.</a:t>
             </a:r>
             <a:endParaRPr lang="en-US" dirty="0"/>
           </a:p>
@@ -1088,7 +1084,10 @@
           <a:p>
             <a:r>
               <a:rPr lang="en-US" dirty="0"/>
-              <a:t>Hand out the starting passwords on paper at the session, then have each branch change it on the spot.</a:t>
+              <a:t>Questions to prepare for:
+• "I submitted the wrong quantity. Can I fix it?" No, a submitted order is locked. Message or call head office straight away.
+• "What if the delivery is short?" Enter the real quantity in Confirm Delivery and add a note.
+• "Can I order for the day after tomorrow?" No. Orders are always for next-day delivery.</a:t>
             </a:r>
             <a:endParaRPr lang="en-US" dirty="0"/>
           </a:p>
@@ -1112,185 +1111,6 @@
             <a:fld id="{F7021451-1387-4CA6-816F-3879F97B5CBC}" type="slidenum">
               <a:rPr lang="en-US"/>
               <a:t>15</a:t>
-            </a:fld>
-            <a:endParaRPr lang="en-US"/>
-          </a:p>
-        </p:txBody>
-      </p:sp>
-    </p:spTree>
-    <p:extLst>
-      <p:ext uri="{BB962C8B-B14F-4D97-AF65-F5344CB8AC3E}">
-        <p14:creationId xmlns:p14="http://schemas.microsoft.com/office/powerpoint/2010/main" val="1024086991"/>
-      </p:ext>
-    </p:extLst>
-  </p:cSld>
-  <p:clrMapOvr>
-    <a:masterClrMapping/>
-  </p:clrMapOvr>
-</p:notes>
-</file>
-
-<file path=ppt/notesSlides/notesSlide16.xml><?xml version="1.0" encoding="utf-8"?>
-<p:notes xmlns:a="http://schemas.openxmlformats.org/drawingml/2006/main" xmlns:r="http://schemas.openxmlformats.org/officeDocument/2006/relationships" xmlns:p="http://schemas.openxmlformats.org/presentationml/2006/main">
-  <p:cSld>
-    <p:spTree>
-      <p:nvGrpSpPr>
-        <p:cNvPr id="1" name=""/>
-        <p:cNvGrpSpPr/>
-        <p:nvPr/>
-      </p:nvGrpSpPr>
-      <p:grpSpPr>
-        <a:xfrm>
-          <a:off x="0" y="0"/>
-          <a:ext cx="0" cy="0"/>
-          <a:chOff x="0" y="0"/>
-          <a:chExt cx="0" cy="0"/>
-        </a:xfrm>
-      </p:grpSpPr>
-      <p:sp>
-        <p:nvSpPr>
-          <p:cNvPr id="2" name="Slide Image Placeholder 1"/>
-          <p:cNvSpPr>
-            <a:spLocks noGrp="1" noRot="1" noChangeAspect="1"/>
-          </p:cNvSpPr>
-          <p:nvPr>
-            <p:ph type="sldImg"/>
-          </p:nvPr>
-        </p:nvSpPr>
-        <p:spPr/>
-      </p:sp>
-      <p:sp>
-        <p:nvSpPr>
-          <p:cNvPr id="3" name="Notes Placeholder 2"/>
-          <p:cNvSpPr>
-            <a:spLocks noGrp="1"/>
-          </p:cNvSpPr>
-          <p:nvPr>
-            <p:ph type="body" idx="1"/>
-          </p:nvPr>
-        </p:nvSpPr>
-        <p:spPr/>
-        <p:txBody>
-          <a:bodyPr/>
-          <a:lstStyle/>
-          <a:p>
-            <a:r>
-              <a:rPr lang="en-US" dirty="0"/>
-              <a:t>Encourage branches to use the Messages tab first so questions are in writing; call for anything urgent.</a:t>
-            </a:r>
-            <a:endParaRPr lang="en-US" dirty="0"/>
-          </a:p>
-        </p:txBody>
-      </p:sp>
-      <p:sp>
-        <p:nvSpPr>
-          <p:cNvPr id="4" name="Slide Number Placeholder 3"/>
-          <p:cNvSpPr>
-            <a:spLocks noGrp="1"/>
-          </p:cNvSpPr>
-          <p:nvPr>
-            <p:ph type="sldNum" sz="quarter" idx="10"/>
-          </p:nvPr>
-        </p:nvSpPr>
-        <p:spPr/>
-        <p:txBody>
-          <a:bodyPr/>
-          <a:lstStyle/>
-          <a:p>
-            <a:fld id="{F7021451-1387-4CA6-816F-3879F97B5CBC}" type="slidenum">
-              <a:rPr lang="en-US"/>
-              <a:t>16</a:t>
-            </a:fld>
-            <a:endParaRPr lang="en-US"/>
-          </a:p>
-        </p:txBody>
-      </p:sp>
-    </p:spTree>
-    <p:extLst>
-      <p:ext uri="{BB962C8B-B14F-4D97-AF65-F5344CB8AC3E}">
-        <p14:creationId xmlns:p14="http://schemas.microsoft.com/office/powerpoint/2010/main" val="1024086991"/>
-      </p:ext>
-    </p:extLst>
-  </p:cSld>
-  <p:clrMapOvr>
-    <a:masterClrMapping/>
-  </p:clrMapOvr>
-</p:notes>
-</file>
-
-<file path=ppt/notesSlides/notesSlide17.xml><?xml version="1.0" encoding="utf-8"?>
-<p:notes xmlns:a="http://schemas.openxmlformats.org/drawingml/2006/main" xmlns:r="http://schemas.openxmlformats.org/officeDocument/2006/relationships" xmlns:p="http://schemas.openxmlformats.org/presentationml/2006/main">
-  <p:cSld>
-    <p:spTree>
-      <p:nvGrpSpPr>
-        <p:cNvPr id="1" name=""/>
-        <p:cNvGrpSpPr/>
-        <p:nvPr/>
-      </p:nvGrpSpPr>
-      <p:grpSpPr>
-        <a:xfrm>
-          <a:off x="0" y="0"/>
-          <a:ext cx="0" cy="0"/>
-          <a:chOff x="0" y="0"/>
-          <a:chExt cx="0" cy="0"/>
-        </a:xfrm>
-      </p:grpSpPr>
-      <p:sp>
-        <p:nvSpPr>
-          <p:cNvPr id="2" name="Slide Image Placeholder 1"/>
-          <p:cNvSpPr>
-            <a:spLocks noGrp="1" noRot="1" noChangeAspect="1"/>
-          </p:cNvSpPr>
-          <p:nvPr>
-            <p:ph type="sldImg"/>
-          </p:nvPr>
-        </p:nvSpPr>
-        <p:spPr/>
-      </p:sp>
-      <p:sp>
-        <p:nvSpPr>
-          <p:cNvPr id="3" name="Notes Placeholder 2"/>
-          <p:cNvSpPr>
-            <a:spLocks noGrp="1"/>
-          </p:cNvSpPr>
-          <p:nvPr>
-            <p:ph type="body" idx="1"/>
-          </p:nvPr>
-        </p:nvSpPr>
-        <p:spPr/>
-        <p:txBody>
-          <a:bodyPr/>
-          <a:lstStyle/>
-          <a:p>
-            <a:r>
-              <a:rPr lang="en-US" dirty="0"/>
-              <a:t>Questions to prepare for:
-• "I submitted the wrong quantity. Can I fix it?" No, a submitted order is locked. Message or call head office straight away.
-• "What if the delivery is short?" Enter the real quantity in Confirm Delivery and add a note.
-• "Can I order for the day after tomorrow?" No. Orders are always for next-day delivery.</a:t>
-            </a:r>
-            <a:endParaRPr lang="en-US" dirty="0"/>
-          </a:p>
-        </p:txBody>
-      </p:sp>
-      <p:sp>
-        <p:nvSpPr>
-          <p:cNvPr id="4" name="Slide Number Placeholder 3"/>
-          <p:cNvSpPr>
-            <a:spLocks noGrp="1"/>
-          </p:cNvSpPr>
-          <p:nvPr>
-            <p:ph type="sldNum" sz="quarter" idx="10"/>
-          </p:nvPr>
-        </p:nvSpPr>
-        <p:spPr/>
-        <p:txBody>
-          <a:bodyPr/>
-          <a:lstStyle/>
-          <a:p>
-            <a:fld id="{F7021451-1387-4CA6-816F-3879F97B5CBC}" type="slidenum">
-              <a:rPr lang="en-US"/>
-              <a:t>17</a:t>
             </a:fld>
             <a:endParaRPr lang="en-US"/>
           </a:p>
@@ -1971,7 +1791,7 @@
           <a:p>
             <a:r>
               <a:rPr lang="en-US" dirty="0"/>
-              <a:t>Walk through the three statuses in order. Only an ASSIGNED order can be confirmed.</a:t>
+              <a:t>Suggest printing the day's PO and keeping it at the receiving door.</a:t>
             </a:r>
             <a:endParaRPr lang="en-US" dirty="0"/>
           </a:p>
@@ -3032,7 +2852,7 @@
                   <a:schemeClr val="bg1"/>
                 </a:solidFill>
               </a:rPr>
-              <a:t>Receiving and confirming deliveries</a:t>
+              <a:t>Safety Stock</a:t>
             </a:r>
             <a:endParaRPr lang="en-US" sz="3400" dirty="0"/>
           </a:p>
@@ -3040,30 +2860,42 @@
       </p:sp>
       <p:sp>
         <p:nvSpPr>
-          <p:cNvPr id="6" name="Step number 1"/>
-          <p:cNvSpPr/>
-          <p:nvPr/>
-        </p:nvSpPr>
-        <p:spPr>
-          <a:xfrm>
-            <a:off x="548640" y="1463040"/>
-            <a:ext cx="566928" cy="566928"/>
-          </a:xfrm>
-          <a:prstGeom prst="ellipse">
-            <a:avLst/>
-          </a:prstGeom>
-          <a:solidFill>
-            <a:schemeClr val="accent1">
-              <a:alpha val="20000"/>
-            </a:schemeClr>
-          </a:solidFill>
-          <a:ln w="19050">
-            <a:solidFill>
-              <a:schemeClr val="accent1"/>
-            </a:solidFill>
-            <a:prstDash val="solid"/>
-          </a:ln>
-        </p:spPr>
+          <p:cNvPr id="6" name="Text 3"/>
+          <p:cNvSpPr txBox="1"/>
+          <p:nvPr/>
+        </p:nvSpPr>
+        <p:spPr>
+          <a:xfrm>
+            <a:off x="548640" y="1417320"/>
+            <a:ext cx="5394960" cy="640080"/>
+          </a:xfrm>
+          <a:prstGeom prst="rect">
+            <a:avLst/>
+          </a:prstGeom>
+          <a:noFill/>
+          <a:ln/>
+        </p:spPr>
+        <p:txBody>
+          <a:bodyPr wrap="square" lIns="0" tIns="0" rIns="0" bIns="0" rtlCol="0" anchor="ctr"/>
+          <a:lstStyle/>
+          <a:p>
+            <a:pPr indent="0" marL="0">
+              <a:spcAft>
+                <a:spcPts val="400"/>
+              </a:spcAft>
+              <a:buNone/>
+            </a:pPr>
+            <a:r>
+              <a:rPr lang="en-US" sz="2800" b="1" dirty="0">
+                <a:solidFill>
+                  <a:schemeClr val="accent1"/>
+                </a:solidFill>
+              </a:rPr>
+              <a:t>Set once. Stays until you change it.</a:t>
+            </a:r>
+            <a:endParaRPr lang="en-US" sz="2800" dirty="0"/>
+          </a:p>
+        </p:txBody>
       </p:sp>
       <p:sp>
         <p:nvSpPr>
@@ -3073,8 +2905,8 @@
         </p:nvSpPr>
         <p:spPr>
           <a:xfrm>
-            <a:off x="548640" y="1463040"/>
-            <a:ext cx="566928" cy="566928"/>
+            <a:off x="548640" y="2148840"/>
+            <a:ext cx="5394960" cy="685800"/>
           </a:xfrm>
           <a:prstGeom prst="rect">
             <a:avLst/>
@@ -3083,549 +2915,59 @@
           <a:ln/>
         </p:spPr>
         <p:txBody>
-          <a:bodyPr wrap="square" lIns="0" tIns="0" rIns="0" bIns="0" rtlCol="0" anchor="ctr"/>
-          <a:lstStyle/>
-          <a:p>
-            <a:pPr algn="ctr" indent="0" marL="0">
+          <a:bodyPr wrap="square" lIns="0" tIns="0" rIns="0" bIns="0" rtlCol="0" anchor="t"/>
+          <a:lstStyle/>
+          <a:p>
+            <a:pPr indent="0" marL="0">
               <a:spcAft>
                 <a:spcPts val="400"/>
               </a:spcAft>
               <a:buNone/>
             </a:pPr>
             <a:r>
-              <a:rPr lang="en-US" sz="2000" b="1" dirty="0">
-                <a:solidFill>
-                  <a:schemeClr val="accent1"/>
-                </a:solidFill>
-              </a:rPr>
-              <a:t>1</a:t>
-            </a:r>
-            <a:endParaRPr lang="en-US" sz="2000" dirty="0"/>
-          </a:p>
-        </p:txBody>
-      </p:sp>
-      <p:sp>
-        <p:nvSpPr>
-          <p:cNvPr id="8" name="Text 5"/>
-          <p:cNvSpPr txBox="1"/>
-          <p:nvPr/>
-        </p:nvSpPr>
-        <p:spPr>
-          <a:xfrm>
-            <a:off x="1325880" y="1417320"/>
-            <a:ext cx="5486400" cy="822960"/>
-          </a:xfrm>
-          <a:prstGeom prst="rect">
-            <a:avLst/>
-          </a:prstGeom>
-          <a:noFill/>
-          <a:ln/>
-        </p:spPr>
-        <p:txBody>
-          <a:bodyPr wrap="square" lIns="0" tIns="0" rIns="0" bIns="0" rtlCol="0" anchor="t"/>
-          <a:lstStyle/>
-          <a:p>
-            <a:pPr indent="0" marL="0">
-              <a:spcAft>
-                <a:spcPts val="400"/>
-              </a:spcAft>
-              <a:buNone/>
-            </a:pPr>
-            <a:r>
-              <a:rPr lang="en-US" sz="1700" b="1" dirty="0">
-                <a:solidFill>
-                  <a:schemeClr val="bg1"/>
-                </a:solidFill>
-              </a:rPr>
-              <a:t>Open the order in My Orders</a:t>
-            </a:r>
-            <a:endParaRPr lang="en-US" sz="1500" dirty="0"/>
-          </a:p>
-          <a:p>
-            <a:pPr indent="0" marL="0">
-              <a:spcAft>
-                <a:spcPts val="400"/>
-              </a:spcAft>
-              <a:buNone/>
-            </a:pPr>
-            <a:r>
-              <a:rPr lang="en-US" sz="1500" dirty="0">
+              <a:rPr lang="en-US" sz="1700" dirty="0">
                 <a:solidFill>
                   <a:schemeClr val="bg2"/>
                 </a:solidFill>
               </a:rPr>
-              <a:t>It must show ASSIGNED.</a:t>
-            </a:r>
-            <a:endParaRPr lang="en-US" sz="1500" dirty="0"/>
-          </a:p>
-        </p:txBody>
-      </p:sp>
-      <p:sp>
-        <p:nvSpPr>
-          <p:cNvPr id="9" name="Step number 2"/>
+              <a:t>Enter the minimum quantity of each item your branch should always have.</a:t>
+            </a:r>
+            <a:endParaRPr lang="en-US" sz="1700" dirty="0"/>
+          </a:p>
+        </p:txBody>
+      </p:sp>
+      <p:sp>
+        <p:nvSpPr>
+          <p:cNvPr id="8" name="Safety action Enter"/>
           <p:cNvSpPr/>
           <p:nvPr/>
         </p:nvSpPr>
         <p:spPr>
           <a:xfrm>
-            <a:off x="548640" y="2359152"/>
-            <a:ext cx="566928" cy="566928"/>
-          </a:xfrm>
-          <a:prstGeom prst="ellipse">
-            <a:avLst/>
-          </a:prstGeom>
-          <a:solidFill>
-            <a:schemeClr val="accent1">
-              <a:alpha val="20000"/>
-            </a:schemeClr>
-          </a:solidFill>
-          <a:ln w="19050">
-            <a:solidFill>
-              <a:schemeClr val="accent1"/>
-            </a:solidFill>
-            <a:prstDash val="solid"/>
-          </a:ln>
-        </p:spPr>
-      </p:sp>
-      <p:sp>
-        <p:nvSpPr>
-          <p:cNvPr id="10" name="Text 7"/>
-          <p:cNvSpPr txBox="1"/>
-          <p:nvPr/>
-        </p:nvSpPr>
-        <p:spPr>
-          <a:xfrm>
-            <a:off x="548640" y="2359152"/>
-            <a:ext cx="566928" cy="566928"/>
-          </a:xfrm>
-          <a:prstGeom prst="rect">
-            <a:avLst/>
-          </a:prstGeom>
-          <a:noFill/>
-          <a:ln/>
-        </p:spPr>
-        <p:txBody>
-          <a:bodyPr wrap="square" lIns="0" tIns="0" rIns="0" bIns="0" rtlCol="0" anchor="ctr"/>
-          <a:lstStyle/>
-          <a:p>
-            <a:pPr algn="ctr" indent="0" marL="0">
-              <a:spcAft>
-                <a:spcPts val="400"/>
-              </a:spcAft>
-              <a:buNone/>
-            </a:pPr>
-            <a:r>
-              <a:rPr lang="en-US" sz="2000" b="1" dirty="0">
-                <a:solidFill>
-                  <a:schemeClr val="accent1"/>
-                </a:solidFill>
-              </a:rPr>
-              <a:t>2</a:t>
-            </a:r>
-            <a:endParaRPr lang="en-US" sz="2000" dirty="0"/>
-          </a:p>
-        </p:txBody>
-      </p:sp>
-      <p:sp>
-        <p:nvSpPr>
-          <p:cNvPr id="11" name="Text 8"/>
-          <p:cNvSpPr txBox="1"/>
-          <p:nvPr/>
-        </p:nvSpPr>
-        <p:spPr>
-          <a:xfrm>
-            <a:off x="1325880" y="2313432"/>
-            <a:ext cx="5486400" cy="822960"/>
-          </a:xfrm>
-          <a:prstGeom prst="rect">
-            <a:avLst/>
-          </a:prstGeom>
-          <a:noFill/>
-          <a:ln/>
-        </p:spPr>
-        <p:txBody>
-          <a:bodyPr wrap="square" lIns="0" tIns="0" rIns="0" bIns="0" rtlCol="0" anchor="t"/>
-          <a:lstStyle/>
-          <a:p>
-            <a:pPr indent="0" marL="0">
-              <a:spcAft>
-                <a:spcPts val="400"/>
-              </a:spcAft>
-              <a:buNone/>
-            </a:pPr>
-            <a:r>
-              <a:rPr lang="en-US" sz="1700" b="1" dirty="0">
-                <a:solidFill>
-                  <a:schemeClr val="bg1"/>
-                </a:solidFill>
-              </a:rPr>
-              <a:t>Click Confirm Delivery</a:t>
-            </a:r>
-            <a:endParaRPr lang="en-US" sz="1500" dirty="0"/>
-          </a:p>
-          <a:p>
-            <a:pPr indent="0" marL="0">
-              <a:spcAft>
-                <a:spcPts val="400"/>
-              </a:spcAft>
-              <a:buNone/>
-            </a:pPr>
-            <a:r>
-              <a:rPr lang="en-US" sz="1500" dirty="0">
-                <a:solidFill>
-                  <a:schemeClr val="bg2"/>
-                </a:solidFill>
-              </a:rPr>
-              <a:t>A form lists every item you ordered.</a:t>
-            </a:r>
-            <a:endParaRPr lang="en-US" sz="1500" dirty="0"/>
-          </a:p>
-        </p:txBody>
-      </p:sp>
-      <p:sp>
-        <p:nvSpPr>
-          <p:cNvPr id="12" name="Step number 3"/>
-          <p:cNvSpPr/>
-          <p:nvPr/>
-        </p:nvSpPr>
-        <p:spPr>
-          <a:xfrm>
-            <a:off x="548640" y="3255264"/>
-            <a:ext cx="566928" cy="566928"/>
-          </a:xfrm>
-          <a:prstGeom prst="ellipse">
-            <a:avLst/>
-          </a:prstGeom>
-          <a:solidFill>
-            <a:schemeClr val="accent1">
-              <a:alpha val="20000"/>
-            </a:schemeClr>
-          </a:solidFill>
-          <a:ln w="19050">
-            <a:solidFill>
-              <a:schemeClr val="accent1"/>
-            </a:solidFill>
-            <a:prstDash val="solid"/>
-          </a:ln>
-        </p:spPr>
-      </p:sp>
-      <p:sp>
-        <p:nvSpPr>
-          <p:cNvPr id="13" name="Text 10"/>
-          <p:cNvSpPr txBox="1"/>
-          <p:nvPr/>
-        </p:nvSpPr>
-        <p:spPr>
-          <a:xfrm>
-            <a:off x="548640" y="3255264"/>
-            <a:ext cx="566928" cy="566928"/>
-          </a:xfrm>
-          <a:prstGeom prst="rect">
-            <a:avLst/>
-          </a:prstGeom>
-          <a:noFill/>
-          <a:ln/>
-        </p:spPr>
-        <p:txBody>
-          <a:bodyPr wrap="square" lIns="0" tIns="0" rIns="0" bIns="0" rtlCol="0" anchor="ctr"/>
-          <a:lstStyle/>
-          <a:p>
-            <a:pPr algn="ctr" indent="0" marL="0">
-              <a:spcAft>
-                <a:spcPts val="400"/>
-              </a:spcAft>
-              <a:buNone/>
-            </a:pPr>
-            <a:r>
-              <a:rPr lang="en-US" sz="2000" b="1" dirty="0">
-                <a:solidFill>
-                  <a:schemeClr val="accent1"/>
-                </a:solidFill>
-              </a:rPr>
-              <a:t>3</a:t>
-            </a:r>
-            <a:endParaRPr lang="en-US" sz="2000" dirty="0"/>
-          </a:p>
-        </p:txBody>
-      </p:sp>
-      <p:sp>
-        <p:nvSpPr>
-          <p:cNvPr id="14" name="Text 11"/>
-          <p:cNvSpPr txBox="1"/>
-          <p:nvPr/>
-        </p:nvSpPr>
-        <p:spPr>
-          <a:xfrm>
-            <a:off x="1325880" y="3209544"/>
-            <a:ext cx="5486400" cy="822960"/>
-          </a:xfrm>
-          <a:prstGeom prst="rect">
-            <a:avLst/>
-          </a:prstGeom>
-          <a:noFill/>
-          <a:ln/>
-        </p:spPr>
-        <p:txBody>
-          <a:bodyPr wrap="square" lIns="0" tIns="0" rIns="0" bIns="0" rtlCol="0" anchor="t"/>
-          <a:lstStyle/>
-          <a:p>
-            <a:pPr indent="0" marL="0">
-              <a:spcAft>
-                <a:spcPts val="400"/>
-              </a:spcAft>
-              <a:buNone/>
-            </a:pPr>
-            <a:r>
-              <a:rPr lang="en-US" sz="1700" b="1" dirty="0">
-                <a:solidFill>
-                  <a:schemeClr val="bg1"/>
-                </a:solidFill>
-              </a:rPr>
-              <a:t>Enter what actually arrived</a:t>
-            </a:r>
-            <a:endParaRPr lang="en-US" sz="1500" dirty="0"/>
-          </a:p>
-          <a:p>
-            <a:pPr indent="0" marL="0">
-              <a:spcAft>
-                <a:spcPts val="400"/>
-              </a:spcAft>
-              <a:buNone/>
-            </a:pPr>
-            <a:r>
-              <a:rPr lang="en-US" sz="1500" dirty="0">
-                <a:solidFill>
-                  <a:schemeClr val="bg2"/>
-                </a:solidFill>
-              </a:rPr>
-              <a:t>Add a note if needed, e.g. "damaged" or "wrong variety".</a:t>
-            </a:r>
-            <a:endParaRPr lang="en-US" sz="1500" dirty="0"/>
-          </a:p>
-        </p:txBody>
-      </p:sp>
-      <p:sp>
-        <p:nvSpPr>
-          <p:cNvPr id="15" name="Step number 4"/>
-          <p:cNvSpPr/>
-          <p:nvPr/>
-        </p:nvSpPr>
-        <p:spPr>
-          <a:xfrm>
-            <a:off x="548640" y="4151376"/>
-            <a:ext cx="566928" cy="566928"/>
-          </a:xfrm>
-          <a:prstGeom prst="ellipse">
-            <a:avLst/>
-          </a:prstGeom>
-          <a:solidFill>
-            <a:schemeClr val="accent1">
-              <a:alpha val="20000"/>
-            </a:schemeClr>
-          </a:solidFill>
-          <a:ln w="19050">
-            <a:solidFill>
-              <a:schemeClr val="accent1"/>
-            </a:solidFill>
-            <a:prstDash val="solid"/>
-          </a:ln>
-        </p:spPr>
-      </p:sp>
-      <p:sp>
-        <p:nvSpPr>
-          <p:cNvPr id="16" name="Text 13"/>
-          <p:cNvSpPr txBox="1"/>
-          <p:nvPr/>
-        </p:nvSpPr>
-        <p:spPr>
-          <a:xfrm>
-            <a:off x="548640" y="4151376"/>
-            <a:ext cx="566928" cy="566928"/>
-          </a:xfrm>
-          <a:prstGeom prst="rect">
-            <a:avLst/>
-          </a:prstGeom>
-          <a:noFill/>
-          <a:ln/>
-        </p:spPr>
-        <p:txBody>
-          <a:bodyPr wrap="square" lIns="0" tIns="0" rIns="0" bIns="0" rtlCol="0" anchor="ctr"/>
-          <a:lstStyle/>
-          <a:p>
-            <a:pPr algn="ctr" indent="0" marL="0">
-              <a:spcAft>
-                <a:spcPts val="400"/>
-              </a:spcAft>
-              <a:buNone/>
-            </a:pPr>
-            <a:r>
-              <a:rPr lang="en-US" sz="2000" b="1" dirty="0">
-                <a:solidFill>
-                  <a:schemeClr val="accent1"/>
-                </a:solidFill>
-              </a:rPr>
-              <a:t>4</a:t>
-            </a:r>
-            <a:endParaRPr lang="en-US" sz="2000" dirty="0"/>
-          </a:p>
-        </p:txBody>
-      </p:sp>
-      <p:sp>
-        <p:nvSpPr>
-          <p:cNvPr id="17" name="Text 14"/>
-          <p:cNvSpPr txBox="1"/>
-          <p:nvPr/>
-        </p:nvSpPr>
-        <p:spPr>
-          <a:xfrm>
-            <a:off x="1325880" y="4105656"/>
-            <a:ext cx="5486400" cy="822960"/>
-          </a:xfrm>
-          <a:prstGeom prst="rect">
-            <a:avLst/>
-          </a:prstGeom>
-          <a:noFill/>
-          <a:ln/>
-        </p:spPr>
-        <p:txBody>
-          <a:bodyPr wrap="square" lIns="0" tIns="0" rIns="0" bIns="0" rtlCol="0" anchor="t"/>
-          <a:lstStyle/>
-          <a:p>
-            <a:pPr indent="0" marL="0">
-              <a:spcAft>
-                <a:spcPts val="400"/>
-              </a:spcAft>
-              <a:buNone/>
-            </a:pPr>
-            <a:r>
-              <a:rPr lang="en-US" sz="1700" b="1" dirty="0">
-                <a:solidFill>
-                  <a:schemeClr val="bg1"/>
-                </a:solidFill>
-              </a:rPr>
-              <a:t>Click Confirm Delivery again</a:t>
-            </a:r>
-            <a:endParaRPr lang="en-US" sz="1500" dirty="0"/>
-          </a:p>
-          <a:p>
-            <a:pPr indent="0" marL="0">
-              <a:spcAft>
-                <a:spcPts val="400"/>
-              </a:spcAft>
-              <a:buNone/>
-            </a:pPr>
-            <a:r>
-              <a:rPr lang="en-US" sz="1500" dirty="0">
-                <a:solidFill>
-                  <a:schemeClr val="bg2"/>
-                </a:solidFill>
-              </a:rPr>
-              <a:t>The order becomes CONFIRMED.</a:t>
-            </a:r>
-            <a:endParaRPr lang="en-US" sz="1500" dirty="0"/>
-          </a:p>
-        </p:txBody>
-      </p:sp>
-      <p:sp>
-        <p:nvSpPr>
-          <p:cNvPr id="18" name="Mismatch note"/>
-          <p:cNvSpPr/>
-          <p:nvPr/>
-        </p:nvSpPr>
-        <p:spPr>
-          <a:xfrm>
-            <a:off x="548640" y="5029200"/>
-            <a:ext cx="6035040" cy="411480"/>
+            <a:off x="548640" y="3017520"/>
+            <a:ext cx="5394960" cy="658368"/>
           </a:xfrm>
           <a:prstGeom prst="roundRect">
             <a:avLst>
-              <a:gd name="adj" fmla="val 26667"/>
+              <a:gd name="adj" fmla="val 16667"/>
             </a:avLst>
           </a:prstGeom>
           <a:solidFill>
-            <a:schemeClr val="accent3">
-              <a:alpha val="20000"/>
+            <a:schemeClr val="accent6">
+              <a:alpha val="88000"/>
             </a:schemeClr>
           </a:solidFill>
           <a:ln w="12700">
             <a:solidFill>
-              <a:schemeClr val="accent3"/>
+              <a:schemeClr val="accent5"/>
             </a:solidFill>
             <a:prstDash val="solid"/>
           </a:ln>
         </p:spPr>
       </p:sp>
-      <p:sp>
-        <p:nvSpPr>
-          <p:cNvPr id="19" name="Text 16"/>
-          <p:cNvSpPr txBox="1"/>
-          <p:nvPr/>
-        </p:nvSpPr>
-        <p:spPr>
-          <a:xfrm>
-            <a:off x="777240" y="5029200"/>
-            <a:ext cx="5669280" cy="411480"/>
-          </a:xfrm>
-          <a:prstGeom prst="rect">
-            <a:avLst/>
-          </a:prstGeom>
-          <a:noFill/>
-          <a:ln/>
-        </p:spPr>
-        <p:txBody>
-          <a:bodyPr wrap="square" lIns="0" tIns="0" rIns="0" bIns="0" rtlCol="0" anchor="ctr"/>
-          <a:lstStyle/>
-          <a:p>
-            <a:pPr indent="0" marL="0">
-              <a:spcAft>
-                <a:spcPts val="400"/>
-              </a:spcAft>
-              <a:buNone/>
-            </a:pPr>
-            <a:r>
-              <a:rPr lang="en-US" sz="1500" b="1" dirty="0">
-                <a:solidFill>
-                  <a:schemeClr val="bg1"/>
-                </a:solidFill>
-              </a:rPr>
-              <a:t>Any quantity that differs from your order is shown in red.</a:t>
-            </a:r>
-            <a:endParaRPr lang="en-US" sz="1500" dirty="0"/>
-          </a:p>
-        </p:txBody>
-      </p:sp>
-      <p:sp>
-        <p:nvSpPr>
-          <p:cNvPr id="20" name="Screenshot placeholder"/>
-          <p:cNvSpPr/>
-          <p:nvPr/>
-        </p:nvSpPr>
-        <p:spPr>
-          <a:xfrm>
-            <a:off x="7040880" y="1417320"/>
-            <a:ext cx="4599432" cy="4023360"/>
-          </a:xfrm>
-          <a:prstGeom prst="roundRect">
-            <a:avLst>
-              <a:gd name="adj" fmla="val 2727"/>
-            </a:avLst>
-          </a:prstGeom>
-          <a:solidFill>
-            <a:schemeClr val="tx2">
-              <a:alpha val="65000"/>
-            </a:schemeClr>
-          </a:solidFill>
-          <a:ln w="15875">
-            <a:solidFill>
-              <a:schemeClr val="accent1"/>
-            </a:solidFill>
-            <a:prstDash val="dash"/>
-          </a:ln>
-        </p:spPr>
-      </p:sp>
       <p:pic>
         <p:nvPicPr>
-          <p:cNvPr id="21" name="Screenshot icon" descr="preencoded.png">    </p:cNvPr>
+          <p:cNvPr id="9" name="Safety icon Enter" descr="preencoded.png">    </p:cNvPr>
           <p:cNvPicPr>
             <a:picLocks noChangeAspect="1"/>
           </p:cNvPicPr>
@@ -3639,8 +2981,8 @@
         </p:blipFill>
         <p:spPr>
           <a:xfrm>
-            <a:off x="9066276" y="2788920"/>
-            <a:ext cx="548640" cy="548640"/>
+            <a:off x="777240" y="3172968"/>
+            <a:ext cx="347472" cy="347472"/>
           </a:xfrm>
           <a:prstGeom prst="rect">
             <a:avLst/>
@@ -3649,14 +2991,14 @@
       </p:pic>
       <p:sp>
         <p:nvSpPr>
-          <p:cNvPr id="22" name="Screenshot label"/>
+          <p:cNvPr id="10" name="Text 6"/>
           <p:cNvSpPr txBox="1"/>
           <p:nvPr/>
         </p:nvSpPr>
         <p:spPr>
           <a:xfrm>
-            <a:off x="7315200" y="3474720"/>
-            <a:ext cx="4050792" cy="822960"/>
+            <a:off x="1325880" y="3017520"/>
+            <a:ext cx="4434840" cy="658368"/>
           </a:xfrm>
           <a:prstGeom prst="rect">
             <a:avLst/>
@@ -3665,47 +3007,302 @@
           <a:ln/>
         </p:spPr>
         <p:txBody>
-          <a:bodyPr wrap="square" lIns="0" tIns="0" rIns="0" bIns="0" rtlCol="0" anchor="t"/>
-          <a:lstStyle/>
-          <a:p>
-            <a:pPr algn="ctr" indent="0" marL="0">
+          <a:bodyPr wrap="square" lIns="0" tIns="0" rIns="0" bIns="0" rtlCol="0" anchor="ctr"/>
+          <a:lstStyle/>
+          <a:p>
+            <a:pPr indent="0" marL="0">
               <a:spcAft>
                 <a:spcPts val="400"/>
               </a:spcAft>
               <a:buNone/>
             </a:pPr>
             <a:r>
-              <a:rPr lang="en-US" sz="1300" b="1" dirty="0">
+              <a:rPr lang="en-US" sz="1600" b="1" dirty="0">
+                <a:solidFill>
+                  <a:schemeClr val="bg1"/>
+                </a:solidFill>
+              </a:rPr>
+              <a:t>Enter  </a:t>
+            </a:r>
+            <a:pPr indent="0" marL="0">
+              <a:spcAft>
+                <a:spcPts val="400"/>
+              </a:spcAft>
+              <a:buNone/>
+            </a:pPr>
+            <a:r>
+              <a:rPr lang="en-US" sz="1600" dirty="0">
                 <a:solidFill>
                   <a:schemeClr val="bg2"/>
                 </a:solidFill>
               </a:rPr>
-              <a:t>Insert screenshot</a:t>
-            </a:r>
-            <a:endParaRPr lang="en-US" sz="1300" dirty="0"/>
-          </a:p>
-          <a:p>
-            <a:pPr algn="ctr" indent="0" marL="0">
+              <a:t>a minimum per item</a:t>
+            </a:r>
+            <a:endParaRPr lang="en-US" sz="1600" dirty="0"/>
+          </a:p>
+        </p:txBody>
+      </p:sp>
+      <p:sp>
+        <p:nvSpPr>
+          <p:cNvPr id="11" name="Safety action Save"/>
+          <p:cNvSpPr/>
+          <p:nvPr/>
+        </p:nvSpPr>
+        <p:spPr>
+          <a:xfrm>
+            <a:off x="548640" y="3822192"/>
+            <a:ext cx="5394960" cy="658368"/>
+          </a:xfrm>
+          <a:prstGeom prst="roundRect">
+            <a:avLst>
+              <a:gd name="adj" fmla="val 16667"/>
+            </a:avLst>
+          </a:prstGeom>
+          <a:solidFill>
+            <a:schemeClr val="accent6">
+              <a:alpha val="88000"/>
+            </a:schemeClr>
+          </a:solidFill>
+          <a:ln w="12700">
+            <a:solidFill>
+              <a:schemeClr val="accent5"/>
+            </a:solidFill>
+            <a:prstDash val="solid"/>
+          </a:ln>
+        </p:spPr>
+      </p:sp>
+      <p:pic>
+        <p:nvPicPr>
+          <p:cNvPr id="12" name="Safety icon Save" descr="preencoded.png">    </p:cNvPr>
+          <p:cNvPicPr>
+            <a:picLocks noChangeAspect="1"/>
+          </p:cNvPicPr>
+          <p:nvPr/>
+        </p:nvPicPr>
+        <p:blipFill>
+          <a:blip r:embed="rId5"/>
+          <a:stretch>
+            <a:fillRect/>
+          </a:stretch>
+        </p:blipFill>
+        <p:spPr>
+          <a:xfrm>
+            <a:off x="777240" y="3977640"/>
+            <a:ext cx="347472" cy="347472"/>
+          </a:xfrm>
+          <a:prstGeom prst="rect">
+            <a:avLst/>
+          </a:prstGeom>
+        </p:spPr>
+      </p:pic>
+      <p:sp>
+        <p:nvSpPr>
+          <p:cNvPr id="13" name="Text 8"/>
+          <p:cNvSpPr txBox="1"/>
+          <p:nvPr/>
+        </p:nvSpPr>
+        <p:spPr>
+          <a:xfrm>
+            <a:off x="1325880" y="3822192"/>
+            <a:ext cx="4434840" cy="658368"/>
+          </a:xfrm>
+          <a:prstGeom prst="rect">
+            <a:avLst/>
+          </a:prstGeom>
+          <a:noFill/>
+          <a:ln/>
+        </p:spPr>
+        <p:txBody>
+          <a:bodyPr wrap="square" lIns="0" tIns="0" rIns="0" bIns="0" rtlCol="0" anchor="ctr"/>
+          <a:lstStyle/>
+          <a:p>
+            <a:pPr indent="0" marL="0">
               <a:spcAft>
                 <a:spcPts val="400"/>
               </a:spcAft>
               <a:buNone/>
             </a:pPr>
             <a:r>
-              <a:rPr lang="en-US" sz="1300" dirty="0">
+              <a:rPr lang="en-US" sz="1600" b="1" dirty="0">
+                <a:solidFill>
+                  <a:schemeClr val="bg1"/>
+                </a:solidFill>
+              </a:rPr>
+              <a:t>Save  </a:t>
+            </a:r>
+            <a:pPr indent="0" marL="0">
+              <a:spcAft>
+                <a:spcPts val="400"/>
+              </a:spcAft>
+              <a:buNone/>
+            </a:pPr>
+            <a:r>
+              <a:rPr lang="en-US" sz="1600" dirty="0">
                 <a:solidFill>
                   <a:schemeClr val="bg2"/>
                 </a:solidFill>
               </a:rPr>
-              <a:t>Confirm Delivery form with one short delivery and a note</a:t>
-            </a:r>
-            <a:endParaRPr lang="en-US" sz="1300" dirty="0"/>
-          </a:p>
-        </p:txBody>
-      </p:sp>
-      <p:sp>
-        <p:nvSpPr>
-          <p:cNvPr id="23" name="Benefit pill"/>
+              <a:t>levels stay day after day</a:t>
+            </a:r>
+            <a:endParaRPr lang="en-US" sz="1600" dirty="0"/>
+          </a:p>
+        </p:txBody>
+      </p:sp>
+      <p:sp>
+        <p:nvSpPr>
+          <p:cNvPr id="14" name="Safety action Clear all"/>
+          <p:cNvSpPr/>
+          <p:nvPr/>
+        </p:nvSpPr>
+        <p:spPr>
+          <a:xfrm>
+            <a:off x="548640" y="4626864"/>
+            <a:ext cx="5394960" cy="658368"/>
+          </a:xfrm>
+          <a:prstGeom prst="roundRect">
+            <a:avLst>
+              <a:gd name="adj" fmla="val 16667"/>
+            </a:avLst>
+          </a:prstGeom>
+          <a:solidFill>
+            <a:schemeClr val="accent6">
+              <a:alpha val="88000"/>
+            </a:schemeClr>
+          </a:solidFill>
+          <a:ln w="12700">
+            <a:solidFill>
+              <a:schemeClr val="accent5"/>
+            </a:solidFill>
+            <a:prstDash val="solid"/>
+          </a:ln>
+        </p:spPr>
+      </p:sp>
+      <p:pic>
+        <p:nvPicPr>
+          <p:cNvPr id="15" name="Safety icon Clear all" descr="preencoded.png">    </p:cNvPr>
+          <p:cNvPicPr>
+            <a:picLocks noChangeAspect="1"/>
+          </p:cNvPicPr>
+          <p:nvPr/>
+        </p:nvPicPr>
+        <p:blipFill>
+          <a:blip r:embed="rId6"/>
+          <a:stretch>
+            <a:fillRect/>
+          </a:stretch>
+        </p:blipFill>
+        <p:spPr>
+          <a:xfrm>
+            <a:off x="777240" y="4782312"/>
+            <a:ext cx="347472" cy="347472"/>
+          </a:xfrm>
+          <a:prstGeom prst="rect">
+            <a:avLst/>
+          </a:prstGeom>
+        </p:spPr>
+      </p:pic>
+      <p:sp>
+        <p:nvSpPr>
+          <p:cNvPr id="16" name="Text 10"/>
+          <p:cNvSpPr txBox="1"/>
+          <p:nvPr/>
+        </p:nvSpPr>
+        <p:spPr>
+          <a:xfrm>
+            <a:off x="1325880" y="4626864"/>
+            <a:ext cx="4434840" cy="658368"/>
+          </a:xfrm>
+          <a:prstGeom prst="rect">
+            <a:avLst/>
+          </a:prstGeom>
+          <a:noFill/>
+          <a:ln/>
+        </p:spPr>
+        <p:txBody>
+          <a:bodyPr wrap="square" lIns="0" tIns="0" rIns="0" bIns="0" rtlCol="0" anchor="ctr"/>
+          <a:lstStyle/>
+          <a:p>
+            <a:pPr indent="0" marL="0">
+              <a:spcAft>
+                <a:spcPts val="400"/>
+              </a:spcAft>
+              <a:buNone/>
+            </a:pPr>
+            <a:r>
+              <a:rPr lang="en-US" sz="1600" b="1" dirty="0">
+                <a:solidFill>
+                  <a:schemeClr val="bg1"/>
+                </a:solidFill>
+              </a:rPr>
+              <a:t>Clear all  </a:t>
+            </a:r>
+            <a:pPr indent="0" marL="0">
+              <a:spcAft>
+                <a:spcPts val="400"/>
+              </a:spcAft>
+              <a:buNone/>
+            </a:pPr>
+            <a:r>
+              <a:rPr lang="en-US" sz="1600" dirty="0">
+                <a:solidFill>
+                  <a:schemeClr val="bg2"/>
+                </a:solidFill>
+              </a:rPr>
+              <a:t>removes every level</a:t>
+            </a:r>
+            <a:endParaRPr lang="en-US" sz="1600" dirty="0"/>
+          </a:p>
+        </p:txBody>
+      </p:sp>
+      <p:pic>
+        <p:nvPicPr>
+          <p:cNvPr id="17" name="Screenshot: Safety Stock screen with a few quantities filled in" descr="Safety Stock screen with a few quantities filled in">    </p:cNvPr>
+          <p:cNvPicPr>
+            <a:picLocks noChangeAspect="1"/>
+          </p:cNvPicPr>
+          <p:nvPr/>
+        </p:nvPicPr>
+        <p:blipFill>
+          <a:blip r:embed="rId7"/>
+          <a:stretch>
+            <a:fillRect/>
+          </a:stretch>
+        </p:blipFill>
+        <p:spPr>
+          <a:xfrm>
+            <a:off x="6153912" y="1417320"/>
+            <a:ext cx="5486400" cy="3977640"/>
+          </a:xfrm>
+          <a:prstGeom prst="rect">
+            <a:avLst/>
+          </a:prstGeom>
+        </p:spPr>
+      </p:pic>
+      <p:sp>
+        <p:nvSpPr>
+          <p:cNvPr id="18" name="Screenshot frame"/>
+          <p:cNvSpPr/>
+          <p:nvPr/>
+        </p:nvSpPr>
+        <p:spPr>
+          <a:xfrm>
+            <a:off x="6153912" y="1417320"/>
+            <a:ext cx="5486400" cy="3977640"/>
+          </a:xfrm>
+          <a:prstGeom prst="rect">
+            <a:avLst/>
+          </a:prstGeom>
+          <a:ln w="19050">
+            <a:solidFill>
+              <a:schemeClr val="accent1"/>
+            </a:solidFill>
+            <a:prstDash val="solid"/>
+          </a:ln>
+        </p:spPr>
+      </p:sp>
+      <p:sp>
+        <p:nvSpPr>
+          <p:cNvPr id="19" name="Benefit pill"/>
           <p:cNvSpPr/>
           <p:nvPr/>
         </p:nvSpPr>
@@ -3734,14 +3331,14 @@
       </p:sp>
       <p:pic>
         <p:nvPicPr>
-          <p:cNvPr id="24" name="Benefit icon" descr="preencoded.png">    </p:cNvPr>
+          <p:cNvPr id="20" name="Benefit icon" descr="preencoded.png">    </p:cNvPr>
           <p:cNvPicPr>
             <a:picLocks noChangeAspect="1"/>
           </p:cNvPicPr>
           <p:nvPr/>
         </p:nvPicPr>
         <p:blipFill>
-          <a:blip r:embed="rId5"/>
+          <a:blip r:embed="rId8"/>
           <a:stretch>
             <a:fillRect/>
           </a:stretch>
@@ -3758,7 +3355,7 @@
       </p:pic>
       <p:sp>
         <p:nvSpPr>
-          <p:cNvPr id="25" name="Text 20"/>
+          <p:cNvPr id="21" name="Text 13"/>
           <p:cNvSpPr txBox="1"/>
           <p:nvPr/>
         </p:nvSpPr>
@@ -3803,7 +3400,7 @@
                   <a:schemeClr val="bg1"/>
                 </a:solidFill>
               </a:rPr>
-              <a:t>Shortages and wrong deliveries are on record, so head office can follow up with the supplier.</a:t>
+              <a:t>Head office can see your minimum needs and plan supply around them.</a:t>
             </a:r>
             <a:endParaRPr lang="en-US" sz="1600" dirty="0"/>
           </a:p>
@@ -4065,7 +3662,7 @@
                   <a:schemeClr val="bg1"/>
                 </a:solidFill>
               </a:rPr>
-              <a:t>Purchase Orders</a:t>
+              <a:t>A day in the life of a branch order</a:t>
             </a:r>
             <a:endParaRPr lang="en-US" sz="3400" dirty="0"/>
           </a:p>
@@ -4073,18 +3670,57 @@
       </p:sp>
       <p:sp>
         <p:nvSpPr>
-          <p:cNvPr id="6" name="PO explanation card"/>
+          <p:cNvPr id="6" name="Text 3"/>
+          <p:cNvSpPr txBox="1"/>
+          <p:nvPr/>
+        </p:nvSpPr>
+        <p:spPr>
+          <a:xfrm>
+            <a:off x="548640" y="1325880"/>
+            <a:ext cx="3657600" cy="274320"/>
+          </a:xfrm>
+          <a:prstGeom prst="rect">
+            <a:avLst/>
+          </a:prstGeom>
+          <a:noFill/>
+          <a:ln/>
+        </p:spPr>
+        <p:txBody>
+          <a:bodyPr wrap="square" lIns="0" tIns="0" rIns="0" bIns="0" rtlCol="0" anchor="t"/>
+          <a:lstStyle/>
+          <a:p>
+            <a:pPr indent="0" marL="0">
+              <a:spcAft>
+                <a:spcPts val="400"/>
+              </a:spcAft>
+              <a:buNone/>
+            </a:pPr>
+            <a:r>
+              <a:rPr lang="en-US" sz="1300" b="1" spc="100" kern="0" dirty="0">
+                <a:solidFill>
+                  <a:schemeClr val="bg2"/>
+                </a:solidFill>
+              </a:rPr>
+              <a:t>TODAY (ORDER DAY)</a:t>
+            </a:r>
+            <a:endParaRPr lang="en-US" sz="1300" dirty="0"/>
+          </a:p>
+        </p:txBody>
+      </p:sp>
+      <p:sp>
+        <p:nvSpPr>
+          <p:cNvPr id="7" name="Flow Check stock, save draft"/>
           <p:cNvSpPr/>
           <p:nvPr/>
         </p:nvSpPr>
         <p:spPr>
           <a:xfrm>
-            <a:off x="548640" y="1417320"/>
-            <a:ext cx="6035040" cy="2148840"/>
+            <a:off x="548640" y="1691640"/>
+            <a:ext cx="3246120" cy="914400"/>
           </a:xfrm>
           <a:prstGeom prst="roundRect">
             <a:avLst>
-              <a:gd name="adj" fmla="val 5106"/>
+              <a:gd name="adj" fmla="val 12000"/>
             </a:avLst>
           </a:prstGeom>
           <a:solidFill>
@@ -4102,24 +3738,82 @@
       </p:sp>
       <p:sp>
         <p:nvSpPr>
-          <p:cNvPr id="7" name="Purchase order circle"/>
+          <p:cNvPr id="8" name="Text 5"/>
+          <p:cNvSpPr txBox="1"/>
+          <p:nvPr/>
+        </p:nvSpPr>
+        <p:spPr>
+          <a:xfrm>
+            <a:off x="685800" y="1691640"/>
+            <a:ext cx="2971800" cy="914400"/>
+          </a:xfrm>
+          <a:prstGeom prst="rect">
+            <a:avLst/>
+          </a:prstGeom>
+          <a:noFill/>
+          <a:ln/>
+        </p:spPr>
+        <p:txBody>
+          <a:bodyPr wrap="square" lIns="0" tIns="0" rIns="0" bIns="0" rtlCol="0" anchor="ctr"/>
+          <a:lstStyle/>
+          <a:p>
+            <a:pPr algn="ctr" indent="0" marL="0">
+              <a:spcAft>
+                <a:spcPts val="200"/>
+              </a:spcAft>
+              <a:buNone/>
+            </a:pPr>
+            <a:r>
+              <a:rPr lang="en-US" sz="1700" b="1" dirty="0">
+                <a:solidFill>
+                  <a:schemeClr val="bg1"/>
+                </a:solidFill>
+              </a:rPr>
+              <a:t>Check stock, save draft</a:t>
+            </a:r>
+            <a:endParaRPr lang="en-US" sz="1500" dirty="0"/>
+          </a:p>
+          <a:p>
+            <a:pPr algn="ctr" indent="0" marL="0">
+              <a:spcAft>
+                <a:spcPts val="200"/>
+              </a:spcAft>
+              <a:buNone/>
+            </a:pPr>
+            <a:r>
+              <a:rPr lang="en-US" sz="1400" dirty="0">
+                <a:solidFill>
+                  <a:schemeClr val="bg2"/>
+                </a:solidFill>
+              </a:rPr>
+              <a:t>New Order tab</a:t>
+            </a:r>
+            <a:endParaRPr lang="en-US" sz="1500" dirty="0"/>
+          </a:p>
+        </p:txBody>
+      </p:sp>
+      <p:sp>
+        <p:nvSpPr>
+          <p:cNvPr id="9" name="Flow Submit by 2:00 PM"/>
           <p:cNvSpPr/>
           <p:nvPr/>
         </p:nvSpPr>
         <p:spPr>
           <a:xfrm>
-            <a:off x="822960" y="1691640"/>
-            <a:ext cx="822960" cy="822960"/>
-          </a:xfrm>
-          <a:prstGeom prst="ellipse">
-            <a:avLst/>
+            <a:off x="4480560" y="1691640"/>
+            <a:ext cx="3246120" cy="914400"/>
+          </a:xfrm>
+          <a:prstGeom prst="roundRect">
+            <a:avLst>
+              <a:gd name="adj" fmla="val 12000"/>
+            </a:avLst>
           </a:prstGeom>
           <a:solidFill>
-            <a:schemeClr val="tx2">
-              <a:alpha val="80000"/>
+            <a:schemeClr val="accent1">
+              <a:alpha val="22000"/>
             </a:schemeClr>
           </a:solidFill>
-          <a:ln w="19050">
+          <a:ln w="31750">
             <a:solidFill>
               <a:schemeClr val="accent1"/>
             </a:solidFill>
@@ -4127,40 +3821,16 @@
           </a:ln>
         </p:spPr>
       </p:sp>
-      <p:pic>
-        <p:nvPicPr>
-          <p:cNvPr id="8" name="Purchase order icon" descr="preencoded.png">    </p:cNvPr>
-          <p:cNvPicPr>
-            <a:picLocks noChangeAspect="1"/>
-          </p:cNvPicPr>
-          <p:nvPr/>
-        </p:nvPicPr>
-        <p:blipFill>
-          <a:blip r:embed="rId4"/>
-          <a:stretch>
-            <a:fillRect/>
-          </a:stretch>
-        </p:blipFill>
-        <p:spPr>
-          <a:xfrm>
-            <a:off x="1020470" y="1889150"/>
-            <a:ext cx="427939" cy="427939"/>
-          </a:xfrm>
-          <a:prstGeom prst="rect">
-            <a:avLst/>
-          </a:prstGeom>
-        </p:spPr>
-      </p:pic>
-      <p:sp>
-        <p:nvSpPr>
-          <p:cNvPr id="9" name="Text 5"/>
+      <p:sp>
+        <p:nvSpPr>
+          <p:cNvPr id="10" name="Text 7"/>
           <p:cNvSpPr txBox="1"/>
           <p:nvPr/>
         </p:nvSpPr>
         <p:spPr>
           <a:xfrm>
-            <a:off x="1874520" y="1645920"/>
-            <a:ext cx="4480560" cy="1737360"/>
+            <a:off x="4617720" y="1691640"/>
+            <a:ext cx="2971800" cy="914400"/>
           </a:xfrm>
           <a:prstGeom prst="rect">
             <a:avLst/>
@@ -4169,41 +3839,58 @@
           <a:ln/>
         </p:spPr>
         <p:txBody>
-          <a:bodyPr wrap="square" lIns="0" tIns="0" rIns="0" bIns="0" rtlCol="0" anchor="t"/>
-          <a:lstStyle/>
-          <a:p>
-            <a:pPr indent="0" marL="0">
-              <a:spcAft>
-                <a:spcPts val="400"/>
-              </a:spcAft>
-              <a:buNone/>
-            </a:pPr>
-            <a:r>
-              <a:rPr lang="en-US" sz="1600" dirty="0">
+          <a:bodyPr wrap="square" lIns="0" tIns="0" rIns="0" bIns="0" rtlCol="0" anchor="ctr"/>
+          <a:lstStyle/>
+          <a:p>
+            <a:pPr algn="ctr" indent="0" marL="0">
+              <a:spcAft>
+                <a:spcPts val="200"/>
+              </a:spcAft>
+              <a:buNone/>
+            </a:pPr>
+            <a:r>
+              <a:rPr lang="en-US" sz="1700" b="1" dirty="0">
                 <a:solidFill>
                   <a:schemeClr val="bg1"/>
                 </a:solidFill>
               </a:rPr>
-              <a:t>When head office issues a purchase order to a supplier for your branch, it appears here, with the supplier, the delivery date and the items.</a:t>
-            </a:r>
-            <a:endParaRPr lang="en-US" sz="1600" dirty="0"/>
-          </a:p>
-        </p:txBody>
-      </p:sp>
-      <p:sp>
-        <p:nvSpPr>
-          <p:cNvPr id="10" name="PO action Search"/>
+              <a:t>Submit by 2:00 PM</a:t>
+            </a:r>
+            <a:endParaRPr lang="en-US" sz="1500" dirty="0"/>
+          </a:p>
+          <a:p>
+            <a:pPr algn="ctr" indent="0" marL="0">
+              <a:spcAft>
+                <a:spcPts val="200"/>
+              </a:spcAft>
+              <a:buNone/>
+            </a:pPr>
+            <a:r>
+              <a:rPr lang="en-US" sz="1400" dirty="0">
+                <a:solidFill>
+                  <a:schemeClr val="bg2"/>
+                </a:solidFill>
+              </a:rPr>
+              <a:t>Order locks: SUBMITTED</a:t>
+            </a:r>
+            <a:endParaRPr lang="en-US" sz="1500" dirty="0"/>
+          </a:p>
+        </p:txBody>
+      </p:sp>
+      <p:sp>
+        <p:nvSpPr>
+          <p:cNvPr id="11" name="Flow Head office assigns"/>
           <p:cNvSpPr/>
           <p:nvPr/>
         </p:nvSpPr>
         <p:spPr>
           <a:xfrm>
-            <a:off x="548640" y="3794760"/>
-            <a:ext cx="1865376" cy="1600200"/>
+            <a:off x="8412480" y="1691640"/>
+            <a:ext cx="3246120" cy="914400"/>
           </a:xfrm>
           <a:prstGeom prst="roundRect">
             <a:avLst>
-              <a:gd name="adj" fmla="val 6857"/>
+              <a:gd name="adj" fmla="val 12000"/>
             </a:avLst>
           </a:prstGeom>
           <a:solidFill>
@@ -4219,40 +3906,16 @@
           </a:ln>
         </p:spPr>
       </p:sp>
-      <p:pic>
-        <p:nvPicPr>
-          <p:cNvPr id="11" name="PO action icon Search" descr="preencoded.png">    </p:cNvPr>
-          <p:cNvPicPr>
-            <a:picLocks noChangeAspect="1"/>
-          </p:cNvPicPr>
-          <p:nvPr/>
-        </p:nvPicPr>
-        <p:blipFill>
-          <a:blip r:embed="rId5"/>
-          <a:stretch>
-            <a:fillRect/>
-          </a:stretch>
-        </p:blipFill>
-        <p:spPr>
-          <a:xfrm>
-            <a:off x="1234440" y="4023360"/>
-            <a:ext cx="493776" cy="493776"/>
-          </a:xfrm>
-          <a:prstGeom prst="rect">
-            <a:avLst/>
-          </a:prstGeom>
-        </p:spPr>
-      </p:pic>
-      <p:sp>
-        <p:nvSpPr>
-          <p:cNvPr id="12" name="Text 7"/>
+      <p:sp>
+        <p:nvSpPr>
+          <p:cNvPr id="12" name="Text 9"/>
           <p:cNvSpPr txBox="1"/>
           <p:nvPr/>
         </p:nvSpPr>
         <p:spPr>
           <a:xfrm>
-            <a:off x="640080" y="4617720"/>
-            <a:ext cx="1682496" cy="685800"/>
+            <a:off x="8549640" y="1691640"/>
+            <a:ext cx="2971800" cy="914400"/>
           </a:xfrm>
           <a:prstGeom prst="rect">
             <a:avLst/>
@@ -4261,39 +3924,39 @@
           <a:ln/>
         </p:spPr>
         <p:txBody>
-          <a:bodyPr wrap="square" lIns="0" tIns="0" rIns="0" bIns="0" rtlCol="0" anchor="t"/>
+          <a:bodyPr wrap="square" lIns="0" tIns="0" rIns="0" bIns="0" rtlCol="0" anchor="ctr"/>
           <a:lstStyle/>
           <a:p>
             <a:pPr algn="ctr" indent="0" marL="0">
               <a:spcAft>
-                <a:spcPts val="400"/>
-              </a:spcAft>
-              <a:buNone/>
-            </a:pPr>
-            <a:r>
-              <a:rPr lang="en-US" sz="1500" b="1" dirty="0">
+                <a:spcPts val="200"/>
+              </a:spcAft>
+              <a:buNone/>
+            </a:pPr>
+            <a:r>
+              <a:rPr lang="en-US" sz="1700" b="1" dirty="0">
                 <a:solidFill>
                   <a:schemeClr val="bg1"/>
                 </a:solidFill>
               </a:rPr>
-              <a:t>Search</a:t>
+              <a:t>Head office assigns</a:t>
             </a:r>
             <a:endParaRPr lang="en-US" sz="1500" dirty="0"/>
           </a:p>
           <a:p>
             <a:pPr algn="ctr" indent="0" marL="0">
               <a:spcAft>
-                <a:spcPts val="400"/>
-              </a:spcAft>
-              <a:buNone/>
-            </a:pPr>
-            <a:r>
-              <a:rPr lang="en-US" sz="1500" dirty="0">
+                <a:spcPts val="200"/>
+              </a:spcAft>
+              <a:buNone/>
+            </a:pPr>
+            <a:r>
+              <a:rPr lang="en-US" sz="1400" dirty="0">
                 <a:solidFill>
                   <a:schemeClr val="bg2"/>
                 </a:solidFill>
               </a:rPr>
-              <a:t>the list</a:t>
+              <a:t>Status becomes ASSIGNED</a:t>
             </a:r>
             <a:endParaRPr lang="en-US" sz="1500" dirty="0"/>
           </a:p>
@@ -4301,18 +3964,18 @@
       </p:sp>
       <p:sp>
         <p:nvSpPr>
-          <p:cNvPr id="13" name="PO action Open"/>
+          <p:cNvPr id="13" name="Flow Delivery arrives"/>
           <p:cNvSpPr/>
           <p:nvPr/>
         </p:nvSpPr>
         <p:spPr>
           <a:xfrm>
-            <a:off x="2633472" y="3794760"/>
-            <a:ext cx="1865376" cy="1600200"/>
+            <a:off x="548640" y="4526280"/>
+            <a:ext cx="3246120" cy="914400"/>
           </a:xfrm>
           <a:prstGeom prst="roundRect">
             <a:avLst>
-              <a:gd name="adj" fmla="val 6857"/>
+              <a:gd name="adj" fmla="val 12000"/>
             </a:avLst>
           </a:prstGeom>
           <a:solidFill>
@@ -4328,40 +3991,16 @@
           </a:ln>
         </p:spPr>
       </p:sp>
-      <p:pic>
-        <p:nvPicPr>
-          <p:cNvPr id="14" name="PO action icon Open" descr="preencoded.png">    </p:cNvPr>
-          <p:cNvPicPr>
-            <a:picLocks noChangeAspect="1"/>
-          </p:cNvPicPr>
-          <p:nvPr/>
-        </p:nvPicPr>
-        <p:blipFill>
-          <a:blip r:embed="rId6"/>
-          <a:stretch>
-            <a:fillRect/>
-          </a:stretch>
-        </p:blipFill>
-        <p:spPr>
-          <a:xfrm>
-            <a:off x="3319272" y="4023360"/>
-            <a:ext cx="493776" cy="493776"/>
-          </a:xfrm>
-          <a:prstGeom prst="rect">
-            <a:avLst/>
-          </a:prstGeom>
-        </p:spPr>
-      </p:pic>
-      <p:sp>
-        <p:nvSpPr>
-          <p:cNvPr id="15" name="Text 9"/>
+      <p:sp>
+        <p:nvSpPr>
+          <p:cNvPr id="14" name="Text 11"/>
           <p:cNvSpPr txBox="1"/>
           <p:nvPr/>
         </p:nvSpPr>
         <p:spPr>
           <a:xfrm>
-            <a:off x="2724912" y="4617720"/>
-            <a:ext cx="1682496" cy="685800"/>
+            <a:off x="685800" y="4526280"/>
+            <a:ext cx="2971800" cy="914400"/>
           </a:xfrm>
           <a:prstGeom prst="rect">
             <a:avLst/>
@@ -4370,39 +4009,39 @@
           <a:ln/>
         </p:spPr>
         <p:txBody>
-          <a:bodyPr wrap="square" lIns="0" tIns="0" rIns="0" bIns="0" rtlCol="0" anchor="t"/>
+          <a:bodyPr wrap="square" lIns="0" tIns="0" rIns="0" bIns="0" rtlCol="0" anchor="ctr"/>
           <a:lstStyle/>
           <a:p>
             <a:pPr algn="ctr" indent="0" marL="0">
               <a:spcAft>
-                <a:spcPts val="400"/>
-              </a:spcAft>
-              <a:buNone/>
-            </a:pPr>
-            <a:r>
-              <a:rPr lang="en-US" sz="1500" b="1" dirty="0">
+                <a:spcPts val="200"/>
+              </a:spcAft>
+              <a:buNone/>
+            </a:pPr>
+            <a:r>
+              <a:rPr lang="en-US" sz="1700" b="1" dirty="0">
                 <a:solidFill>
                   <a:schemeClr val="bg1"/>
                 </a:solidFill>
               </a:rPr>
-              <a:t>Open</a:t>
+              <a:t>Delivery arrives</a:t>
             </a:r>
             <a:endParaRPr lang="en-US" sz="1500" dirty="0"/>
           </a:p>
           <a:p>
             <a:pPr algn="ctr" indent="0" marL="0">
               <a:spcAft>
-                <a:spcPts val="400"/>
-              </a:spcAft>
-              <a:buNone/>
-            </a:pPr>
-            <a:r>
-              <a:rPr lang="en-US" sz="1500" dirty="0">
+                <a:spcPts val="200"/>
+              </a:spcAft>
+              <a:buNone/>
+            </a:pPr>
+            <a:r>
+              <a:rPr lang="en-US" sz="1400" dirty="0">
                 <a:solidFill>
                   <a:schemeClr val="bg2"/>
                 </a:solidFill>
               </a:rPr>
-              <a:t>a PO</a:t>
+              <a:t>Check it against the PO</a:t>
             </a:r>
             <a:endParaRPr lang="en-US" sz="1500" dirty="0"/>
           </a:p>
@@ -4410,18 +4049,18 @@
       </p:sp>
       <p:sp>
         <p:nvSpPr>
-          <p:cNvPr id="16" name="PO action Print"/>
+          <p:cNvPr id="15" name="Flow Confirm Delivery"/>
           <p:cNvSpPr/>
           <p:nvPr/>
         </p:nvSpPr>
         <p:spPr>
           <a:xfrm>
-            <a:off x="4718304" y="3794760"/>
-            <a:ext cx="1865376" cy="1600200"/>
+            <a:off x="4480560" y="4526280"/>
+            <a:ext cx="3246120" cy="914400"/>
           </a:xfrm>
           <a:prstGeom prst="roundRect">
             <a:avLst>
-              <a:gd name="adj" fmla="val 6857"/>
+              <a:gd name="adj" fmla="val 12000"/>
             </a:avLst>
           </a:prstGeom>
           <a:solidFill>
@@ -4437,40 +4076,16 @@
           </a:ln>
         </p:spPr>
       </p:sp>
-      <p:pic>
-        <p:nvPicPr>
-          <p:cNvPr id="17" name="PO action icon Print" descr="preencoded.png">    </p:cNvPr>
-          <p:cNvPicPr>
-            <a:picLocks noChangeAspect="1"/>
-          </p:cNvPicPr>
-          <p:nvPr/>
-        </p:nvPicPr>
-        <p:blipFill>
-          <a:blip r:embed="rId7"/>
-          <a:stretch>
-            <a:fillRect/>
-          </a:stretch>
-        </p:blipFill>
-        <p:spPr>
-          <a:xfrm>
-            <a:off x="5404104" y="4023360"/>
-            <a:ext cx="493776" cy="493776"/>
-          </a:xfrm>
-          <a:prstGeom prst="rect">
-            <a:avLst/>
-          </a:prstGeom>
-        </p:spPr>
-      </p:pic>
-      <p:sp>
-        <p:nvSpPr>
-          <p:cNvPr id="18" name="Text 11"/>
+      <p:sp>
+        <p:nvSpPr>
+          <p:cNvPr id="16" name="Text 13"/>
           <p:cNvSpPr txBox="1"/>
           <p:nvPr/>
         </p:nvSpPr>
         <p:spPr>
           <a:xfrm>
-            <a:off x="4809744" y="4617720"/>
-            <a:ext cx="1682496" cy="685800"/>
+            <a:off x="4617720" y="4526280"/>
+            <a:ext cx="2971800" cy="914400"/>
           </a:xfrm>
           <a:prstGeom prst="rect">
             <a:avLst/>
@@ -4479,39 +4094,39 @@
           <a:ln/>
         </p:spPr>
         <p:txBody>
-          <a:bodyPr wrap="square" lIns="0" tIns="0" rIns="0" bIns="0" rtlCol="0" anchor="t"/>
+          <a:bodyPr wrap="square" lIns="0" tIns="0" rIns="0" bIns="0" rtlCol="0" anchor="ctr"/>
           <a:lstStyle/>
           <a:p>
             <a:pPr algn="ctr" indent="0" marL="0">
               <a:spcAft>
-                <a:spcPts val="400"/>
-              </a:spcAft>
-              <a:buNone/>
-            </a:pPr>
-            <a:r>
-              <a:rPr lang="en-US" sz="1500" b="1" dirty="0">
+                <a:spcPts val="200"/>
+              </a:spcAft>
+              <a:buNone/>
+            </a:pPr>
+            <a:r>
+              <a:rPr lang="en-US" sz="1700" b="1" dirty="0">
                 <a:solidFill>
                   <a:schemeClr val="bg1"/>
                 </a:solidFill>
               </a:rPr>
-              <a:t>Print</a:t>
+              <a:t>Confirm Delivery</a:t>
             </a:r>
             <a:endParaRPr lang="en-US" sz="1500" dirty="0"/>
           </a:p>
           <a:p>
             <a:pPr algn="ctr" indent="0" marL="0">
               <a:spcAft>
-                <a:spcPts val="400"/>
-              </a:spcAft>
-              <a:buNone/>
-            </a:pPr>
-            <a:r>
-              <a:rPr lang="en-US" sz="1500" dirty="0">
+                <a:spcPts val="200"/>
+              </a:spcAft>
+              <a:buNone/>
+            </a:pPr>
+            <a:r>
+              <a:rPr lang="en-US" sz="1400" dirty="0">
                 <a:solidFill>
                   <a:schemeClr val="bg2"/>
                 </a:solidFill>
               </a:rPr>
-              <a:t>or save as PDF</a:t>
+              <a:t>Status becomes CONFIRMED</a:t>
             </a:r>
             <a:endParaRPr lang="en-US" sz="1500" dirty="0"/>
           </a:p>
@@ -4519,176 +4134,241 @@
       </p:sp>
       <p:sp>
         <p:nvSpPr>
-          <p:cNvPr id="19" name="Screenshot placeholder"/>
+          <p:cNvPr id="17" name="Flow arrow 1"/>
           <p:cNvSpPr/>
           <p:nvPr/>
         </p:nvSpPr>
         <p:spPr>
           <a:xfrm>
-            <a:off x="6812280" y="1417320"/>
-            <a:ext cx="4828032" cy="3977640"/>
+            <a:off x="3840480" y="2148840"/>
+            <a:ext cx="594360" cy="0"/>
+          </a:xfrm>
+          <a:prstGeom prst="line">
+            <a:avLst/>
+          </a:prstGeom>
+          <a:noFill/>
+          <a:ln w="22225">
+            <a:solidFill>
+              <a:schemeClr val="bg2"/>
+            </a:solidFill>
+            <a:prstDash val="solid"/>
+            <a:tailEnd type="triangle"/>
+          </a:ln>
+        </p:spPr>
+      </p:sp>
+      <p:sp>
+        <p:nvSpPr>
+          <p:cNvPr id="18" name="Flow arrow 2"/>
+          <p:cNvSpPr/>
+          <p:nvPr/>
+        </p:nvSpPr>
+        <p:spPr>
+          <a:xfrm>
+            <a:off x="7772400" y="2148840"/>
+            <a:ext cx="594360" cy="0"/>
+          </a:xfrm>
+          <a:prstGeom prst="line">
+            <a:avLst/>
+          </a:prstGeom>
+          <a:noFill/>
+          <a:ln w="22225">
+            <a:solidFill>
+              <a:schemeClr val="bg2"/>
+            </a:solidFill>
+            <a:prstDash val="solid"/>
+            <a:tailEnd type="triangle"/>
+          </a:ln>
+        </p:spPr>
+      </p:sp>
+      <p:sp>
+        <p:nvSpPr>
+          <p:cNvPr id="19" name="Missed arrow"/>
+          <p:cNvSpPr/>
+          <p:nvPr/>
+        </p:nvSpPr>
+        <p:spPr>
+          <a:xfrm>
+            <a:off x="6103620" y="2651760"/>
+            <a:ext cx="0" cy="320040"/>
+          </a:xfrm>
+          <a:prstGeom prst="line">
+            <a:avLst/>
+          </a:prstGeom>
+          <a:noFill/>
+          <a:ln w="19050">
+            <a:solidFill>
+              <a:schemeClr val="accent4"/>
+            </a:solidFill>
+            <a:prstDash val="dash"/>
+            <a:tailEnd type="triangle"/>
+          </a:ln>
+        </p:spPr>
+      </p:sp>
+      <p:sp>
+        <p:nvSpPr>
+          <p:cNvPr id="20" name="Missed cutoff box"/>
+          <p:cNvSpPr/>
+          <p:nvPr/>
+        </p:nvSpPr>
+        <p:spPr>
+          <a:xfrm>
+            <a:off x="4663440" y="3017520"/>
+            <a:ext cx="2880360" cy="868680"/>
           </a:xfrm>
           <a:prstGeom prst="roundRect">
             <a:avLst>
-              <a:gd name="adj" fmla="val 2759"/>
+              <a:gd name="adj" fmla="val 12632"/>
             </a:avLst>
           </a:prstGeom>
           <a:solidFill>
-            <a:schemeClr val="tx2">
-              <a:alpha val="65000"/>
-            </a:schemeClr>
-          </a:solidFill>
-          <a:ln w="15875">
-            <a:solidFill>
-              <a:schemeClr val="accent1"/>
-            </a:solidFill>
-            <a:prstDash val="dash"/>
-          </a:ln>
-        </p:spPr>
-      </p:sp>
-      <p:pic>
-        <p:nvPicPr>
-          <p:cNvPr id="20" name="Screenshot icon" descr="preencoded.png">    </p:cNvPr>
-          <p:cNvPicPr>
-            <a:picLocks noChangeAspect="1"/>
-          </p:cNvPicPr>
-          <p:nvPr/>
-        </p:nvPicPr>
-        <p:blipFill>
-          <a:blip r:embed="rId8"/>
-          <a:stretch>
-            <a:fillRect/>
-          </a:stretch>
-        </p:blipFill>
-        <p:spPr>
-          <a:xfrm>
-            <a:off x="8951976" y="2766060"/>
-            <a:ext cx="548640" cy="548640"/>
-          </a:xfrm>
-          <a:prstGeom prst="rect">
-            <a:avLst/>
-          </a:prstGeom>
-        </p:spPr>
-      </p:pic>
-      <p:sp>
-        <p:nvSpPr>
-          <p:cNvPr id="21" name="Screenshot label"/>
-          <p:cNvSpPr txBox="1"/>
-          <p:nvPr/>
-        </p:nvSpPr>
-        <p:spPr>
-          <a:xfrm>
-            <a:off x="7086600" y="3451860"/>
-            <a:ext cx="4279392" cy="822960"/>
-          </a:xfrm>
-          <a:prstGeom prst="rect">
-            <a:avLst/>
-          </a:prstGeom>
-          <a:noFill/>
-          <a:ln/>
-        </p:spPr>
-        <p:txBody>
-          <a:bodyPr wrap="square" lIns="0" tIns="0" rIns="0" bIns="0" rtlCol="0" anchor="t"/>
-          <a:lstStyle/>
-          <a:p>
-            <a:pPr algn="ctr" indent="0" marL="0">
-              <a:spcAft>
-                <a:spcPts val="400"/>
-              </a:spcAft>
-              <a:buNone/>
-            </a:pPr>
-            <a:r>
-              <a:rPr lang="en-US" sz="1300" b="1" dirty="0">
-                <a:solidFill>
-                  <a:schemeClr val="bg2"/>
-                </a:solidFill>
-              </a:rPr>
-              <a:t>Insert screenshot</a:t>
-            </a:r>
-            <a:endParaRPr lang="en-US" sz="1300" dirty="0"/>
-          </a:p>
-          <a:p>
-            <a:pPr algn="ctr" indent="0" marL="0">
-              <a:spcAft>
-                <a:spcPts val="400"/>
-              </a:spcAft>
-              <a:buNone/>
-            </a:pPr>
-            <a:r>
-              <a:rPr lang="en-US" sz="1300" dirty="0">
-                <a:solidFill>
-                  <a:schemeClr val="bg2"/>
-                </a:solidFill>
-              </a:rPr>
-              <a:t>Purchase Orders list and one opened PO</a:t>
-            </a:r>
-            <a:endParaRPr lang="en-US" sz="1300" dirty="0"/>
-          </a:p>
-        </p:txBody>
-      </p:sp>
-      <p:sp>
-        <p:nvSpPr>
-          <p:cNvPr id="22" name="Benefit pill"/>
-          <p:cNvSpPr/>
-          <p:nvPr/>
-        </p:nvSpPr>
-        <p:spPr>
-          <a:xfrm>
-            <a:off x="548640" y="5596128"/>
-            <a:ext cx="11094415" cy="566928"/>
-          </a:xfrm>
-          <a:prstGeom prst="roundRect">
-            <a:avLst>
-              <a:gd name="adj" fmla="val 19355"/>
-            </a:avLst>
-          </a:prstGeom>
-          <a:solidFill>
-            <a:schemeClr val="accent2">
-              <a:alpha val="28000"/>
+            <a:schemeClr val="accent6">
+              <a:alpha val="80000"/>
             </a:schemeClr>
           </a:solidFill>
           <a:ln w="12700">
             <a:solidFill>
-              <a:schemeClr val="accent2"/>
+              <a:schemeClr val="accent4"/>
+            </a:solidFill>
+            <a:prstDash val="dash"/>
+          </a:ln>
+        </p:spPr>
+      </p:sp>
+      <p:sp>
+        <p:nvSpPr>
+          <p:cNvPr id="21" name="Text 18"/>
+          <p:cNvSpPr txBox="1"/>
+          <p:nvPr/>
+        </p:nvSpPr>
+        <p:spPr>
+          <a:xfrm>
+            <a:off x="4754880" y="3017520"/>
+            <a:ext cx="2697480" cy="868680"/>
+          </a:xfrm>
+          <a:prstGeom prst="rect">
+            <a:avLst/>
+          </a:prstGeom>
+          <a:noFill/>
+          <a:ln/>
+        </p:spPr>
+        <p:txBody>
+          <a:bodyPr wrap="square" lIns="0" tIns="0" rIns="0" bIns="0" rtlCol="0" anchor="ctr"/>
+          <a:lstStyle/>
+          <a:p>
+            <a:pPr algn="ctr" indent="0" marL="0">
+              <a:spcAft>
+                <a:spcPts val="200"/>
+              </a:spcAft>
+              <a:buNone/>
+            </a:pPr>
+            <a:r>
+              <a:rPr lang="en-US" sz="1600" b="1" dirty="0">
+                <a:solidFill>
+                  <a:schemeClr val="accent4"/>
+                </a:solidFill>
+              </a:rPr>
+              <a:t>Missed 2:00 PM?</a:t>
+            </a:r>
+            <a:endParaRPr lang="en-US" sz="1600" dirty="0"/>
+          </a:p>
+          <a:p>
+            <a:pPr algn="ctr" indent="0" marL="0">
+              <a:spcAft>
+                <a:spcPts val="200"/>
+              </a:spcAft>
+              <a:buNone/>
+            </a:pPr>
+            <a:r>
+              <a:rPr lang="en-US" sz="1400" dirty="0">
+                <a:solidFill>
+                  <a:schemeClr val="bg2"/>
+                </a:solidFill>
+              </a:rPr>
+              <a:t>Auto-order: draft or past week</a:t>
+            </a:r>
+            <a:endParaRPr lang="en-US" sz="1600" dirty="0"/>
+          </a:p>
+        </p:txBody>
+      </p:sp>
+      <p:sp>
+        <p:nvSpPr>
+          <p:cNvPr id="22" name="Elbow down"/>
+          <p:cNvSpPr/>
+          <p:nvPr/>
+        </p:nvSpPr>
+        <p:spPr>
+          <a:xfrm>
+            <a:off x="10035540" y="2651760"/>
+            <a:ext cx="0" cy="1463040"/>
+          </a:xfrm>
+          <a:prstGeom prst="line">
+            <a:avLst/>
+          </a:prstGeom>
+          <a:noFill/>
+          <a:ln w="22225">
+            <a:solidFill>
+              <a:schemeClr val="bg2"/>
             </a:solidFill>
             <a:prstDash val="solid"/>
           </a:ln>
         </p:spPr>
       </p:sp>
-      <p:pic>
-        <p:nvPicPr>
-          <p:cNvPr id="23" name="Benefit icon" descr="preencoded.png">    </p:cNvPr>
-          <p:cNvPicPr>
-            <a:picLocks noChangeAspect="1"/>
-          </p:cNvPicPr>
-          <p:nvPr/>
-        </p:nvPicPr>
-        <p:blipFill>
-          <a:blip r:embed="rId9"/>
-          <a:stretch>
-            <a:fillRect/>
-          </a:stretch>
-        </p:blipFill>
-        <p:spPr>
-          <a:xfrm>
-            <a:off x="749808" y="5733288"/>
-            <a:ext cx="292608" cy="292608"/>
-          </a:xfrm>
-          <a:prstGeom prst="rect">
-            <a:avLst/>
-          </a:prstGeom>
-        </p:spPr>
-      </p:pic>
-      <p:sp>
-        <p:nvSpPr>
-          <p:cNvPr id="24" name="Text 15"/>
+      <p:sp>
+        <p:nvSpPr>
+          <p:cNvPr id="23" name="Elbow across"/>
+          <p:cNvSpPr/>
+          <p:nvPr/>
+        </p:nvSpPr>
+        <p:spPr>
+          <a:xfrm>
+            <a:off x="2171700" y="4114800"/>
+            <a:ext cx="7863840" cy="0"/>
+          </a:xfrm>
+          <a:prstGeom prst="line">
+            <a:avLst/>
+          </a:prstGeom>
+          <a:noFill/>
+          <a:ln w="22225">
+            <a:solidFill>
+              <a:schemeClr val="bg2"/>
+            </a:solidFill>
+            <a:prstDash val="solid"/>
+          </a:ln>
+        </p:spPr>
+      </p:sp>
+      <p:sp>
+        <p:nvSpPr>
+          <p:cNvPr id="24" name="Elbow into delivery"/>
+          <p:cNvSpPr/>
+          <p:nvPr/>
+        </p:nvSpPr>
+        <p:spPr>
+          <a:xfrm>
+            <a:off x="2171700" y="4114800"/>
+            <a:ext cx="0" cy="365760"/>
+          </a:xfrm>
+          <a:prstGeom prst="line">
+            <a:avLst/>
+          </a:prstGeom>
+          <a:noFill/>
+          <a:ln w="22225">
+            <a:solidFill>
+              <a:schemeClr val="bg2"/>
+            </a:solidFill>
+            <a:prstDash val="solid"/>
+            <a:tailEnd type="triangle"/>
+          </a:ln>
+        </p:spPr>
+      </p:sp>
+      <p:sp>
+        <p:nvSpPr>
+          <p:cNvPr id="25" name="Text 22"/>
           <p:cNvSpPr txBox="1"/>
           <p:nvPr/>
         </p:nvSpPr>
         <p:spPr>
           <a:xfrm>
-            <a:off x="1188720" y="5596128"/>
-            <a:ext cx="10271455" cy="566928"/>
+            <a:off x="7109460" y="3767328"/>
+            <a:ext cx="2788920" cy="274320"/>
           </a:xfrm>
           <a:prstGeom prst="rect">
             <a:avLst/>
@@ -4697,6 +4377,108 @@
           <a:ln/>
         </p:spPr>
         <p:txBody>
+          <a:bodyPr wrap="square" lIns="0" tIns="0" rIns="0" bIns="0" rtlCol="0" anchor="t"/>
+          <a:lstStyle/>
+          <a:p>
+            <a:pPr algn="r" indent="0" marL="0">
+              <a:spcAft>
+                <a:spcPts val="400"/>
+              </a:spcAft>
+              <a:buNone/>
+            </a:pPr>
+            <a:r>
+              <a:rPr lang="en-US" sz="1300" dirty="0">
+                <a:solidFill>
+                  <a:schemeClr val="bg2"/>
+                </a:solidFill>
+              </a:rPr>
+              <a:t>supplier delivers next day</a:t>
+            </a:r>
+            <a:endParaRPr lang="en-US" sz="1300" dirty="0"/>
+          </a:p>
+        </p:txBody>
+      </p:sp>
+      <p:sp>
+        <p:nvSpPr>
+          <p:cNvPr id="26" name="Text 23"/>
+          <p:cNvSpPr txBox="1"/>
+          <p:nvPr/>
+        </p:nvSpPr>
+        <p:spPr>
+          <a:xfrm>
+            <a:off x="2354580" y="4187952"/>
+            <a:ext cx="3657600" cy="274320"/>
+          </a:xfrm>
+          <a:prstGeom prst="rect">
+            <a:avLst/>
+          </a:prstGeom>
+          <a:noFill/>
+          <a:ln/>
+        </p:spPr>
+        <p:txBody>
+          <a:bodyPr wrap="square" lIns="0" tIns="0" rIns="0" bIns="0" rtlCol="0" anchor="t"/>
+          <a:lstStyle/>
+          <a:p>
+            <a:pPr indent="0" marL="0">
+              <a:spcAft>
+                <a:spcPts val="400"/>
+              </a:spcAft>
+              <a:buNone/>
+            </a:pPr>
+            <a:r>
+              <a:rPr lang="en-US" sz="1300" b="1" spc="100" kern="0" dirty="0">
+                <a:solidFill>
+                  <a:schemeClr val="bg2"/>
+                </a:solidFill>
+              </a:rPr>
+              <a:t>TOMORROW (DELIVERY DAY)</a:t>
+            </a:r>
+            <a:endParaRPr lang="en-US" sz="1300" dirty="0"/>
+          </a:p>
+        </p:txBody>
+      </p:sp>
+      <p:sp>
+        <p:nvSpPr>
+          <p:cNvPr id="27" name="Flow arrow 3"/>
+          <p:cNvSpPr/>
+          <p:nvPr/>
+        </p:nvSpPr>
+        <p:spPr>
+          <a:xfrm>
+            <a:off x="3840480" y="4983480"/>
+            <a:ext cx="594360" cy="0"/>
+          </a:xfrm>
+          <a:prstGeom prst="line">
+            <a:avLst/>
+          </a:prstGeom>
+          <a:noFill/>
+          <a:ln w="22225">
+            <a:solidFill>
+              <a:schemeClr val="bg2"/>
+            </a:solidFill>
+            <a:prstDash val="solid"/>
+            <a:tailEnd type="triangle"/>
+          </a:ln>
+        </p:spPr>
+      </p:sp>
+      <p:sp>
+        <p:nvSpPr>
+          <p:cNvPr id="28" name="Text 25"/>
+          <p:cNvSpPr txBox="1"/>
+          <p:nvPr/>
+        </p:nvSpPr>
+        <p:spPr>
+          <a:xfrm>
+            <a:off x="8412480" y="4526280"/>
+            <a:ext cx="3246120" cy="914400"/>
+          </a:xfrm>
+          <a:prstGeom prst="rect">
+            <a:avLst/>
+          </a:prstGeom>
+          <a:noFill/>
+          <a:ln/>
+        </p:spPr>
+        <p:txBody>
           <a:bodyPr wrap="square" lIns="0" tIns="0" rIns="0" bIns="0" rtlCol="0" anchor="ctr"/>
           <a:lstStyle/>
           <a:p>
@@ -4707,28 +4489,14 @@
               <a:buNone/>
             </a:pPr>
             <a:r>
-              <a:rPr lang="en-US" sz="1600" b="1" dirty="0">
-                <a:solidFill>
-                  <a:schemeClr val="accent2"/>
-                </a:solidFill>
-              </a:rPr>
-              <a:t>Benefit:  </a:t>
-            </a:r>
-            <a:pPr indent="0" marL="0">
-              <a:spcAft>
-                <a:spcPts val="400"/>
-              </a:spcAft>
-              <a:buNone/>
-            </a:pPr>
-            <a:r>
-              <a:rPr lang="en-US" sz="1600" dirty="0">
-                <a:solidFill>
-                  <a:schemeClr val="bg1"/>
-                </a:solidFill>
-              </a:rPr>
-              <a:t>You know exactly which supplier is bringing what, so you can check the delivery at the door.</a:t>
-            </a:r>
-            <a:endParaRPr lang="en-US" sz="1600" dirty="0"/>
+              <a:rPr lang="en-US" sz="1500" i="1" dirty="0">
+                <a:solidFill>
+                  <a:schemeClr val="accent1"/>
+                </a:solidFill>
+              </a:rPr>
+              <a:t>The one time to remember is 2:00 PM. The dashed box is the safety net, not the plan.</a:t>
+            </a:r>
+            <a:endParaRPr lang="en-US" sz="1500" dirty="0"/>
           </a:p>
         </p:txBody>
       </p:sp>
@@ -4988,7 +4756,7 @@
                   <a:schemeClr val="bg1"/>
                 </a:solidFill>
               </a:rPr>
-              <a:t>Safety Stock</a:t>
+              <a:t>What's in it for your branch</a:t>
             </a:r>
             <a:endParaRPr lang="en-US" sz="3400" dirty="0"/>
           </a:p>
@@ -4996,96 +4764,18 @@
       </p:sp>
       <p:sp>
         <p:nvSpPr>
-          <p:cNvPr id="6" name="Text 3"/>
-          <p:cNvSpPr txBox="1"/>
+          <p:cNvPr id="6" name="Benefit card 1"/>
+          <p:cNvSpPr/>
           <p:nvPr/>
         </p:nvSpPr>
         <p:spPr>
           <a:xfrm>
             <a:off x="548640" y="1417320"/>
-            <a:ext cx="6035040" cy="640080"/>
-          </a:xfrm>
-          <a:prstGeom prst="rect">
-            <a:avLst/>
-          </a:prstGeom>
-          <a:noFill/>
-          <a:ln/>
-        </p:spPr>
-        <p:txBody>
-          <a:bodyPr wrap="square" lIns="0" tIns="0" rIns="0" bIns="0" rtlCol="0" anchor="ctr"/>
-          <a:lstStyle/>
-          <a:p>
-            <a:pPr indent="0" marL="0">
-              <a:spcAft>
-                <a:spcPts val="400"/>
-              </a:spcAft>
-              <a:buNone/>
-            </a:pPr>
-            <a:r>
-              <a:rPr lang="en-US" sz="2800" b="1" dirty="0">
-                <a:solidFill>
-                  <a:schemeClr val="accent1"/>
-                </a:solidFill>
-              </a:rPr>
-              <a:t>Set once. Stays until you change it.</a:t>
-            </a:r>
-            <a:endParaRPr lang="en-US" sz="2800" dirty="0"/>
-          </a:p>
-        </p:txBody>
-      </p:sp>
-      <p:sp>
-        <p:nvSpPr>
-          <p:cNvPr id="7" name="Text 4"/>
-          <p:cNvSpPr txBox="1"/>
-          <p:nvPr/>
-        </p:nvSpPr>
-        <p:spPr>
-          <a:xfrm>
-            <a:off x="548640" y="2148840"/>
-            <a:ext cx="6035040" cy="685800"/>
-          </a:xfrm>
-          <a:prstGeom prst="rect">
-            <a:avLst/>
-          </a:prstGeom>
-          <a:noFill/>
-          <a:ln/>
-        </p:spPr>
-        <p:txBody>
-          <a:bodyPr wrap="square" lIns="0" tIns="0" rIns="0" bIns="0" rtlCol="0" anchor="t"/>
-          <a:lstStyle/>
-          <a:p>
-            <a:pPr indent="0" marL="0">
-              <a:spcAft>
-                <a:spcPts val="400"/>
-              </a:spcAft>
-              <a:buNone/>
-            </a:pPr>
-            <a:r>
-              <a:rPr lang="en-US" sz="1700" dirty="0">
-                <a:solidFill>
-                  <a:schemeClr val="bg2"/>
-                </a:solidFill>
-              </a:rPr>
-              <a:t>Enter the minimum quantity of each item your branch should always have.</a:t>
-            </a:r>
-            <a:endParaRPr lang="en-US" sz="1700" dirty="0"/>
-          </a:p>
-        </p:txBody>
-      </p:sp>
-      <p:sp>
-        <p:nvSpPr>
-          <p:cNvPr id="8" name="Safety action Enter"/>
-          <p:cNvSpPr/>
-          <p:nvPr/>
-        </p:nvSpPr>
-        <p:spPr>
-          <a:xfrm>
-            <a:off x="548640" y="3017520"/>
-            <a:ext cx="6035040" cy="658368"/>
+            <a:ext cx="2587752" cy="2148840"/>
           </a:xfrm>
           <a:prstGeom prst="roundRect">
             <a:avLst>
-              <a:gd name="adj" fmla="val 16667"/>
+              <a:gd name="adj" fmla="val 5106"/>
             </a:avLst>
           </a:prstGeom>
           <a:solidFill>
@@ -5101,9 +4791,36 @@
           </a:ln>
         </p:spPr>
       </p:sp>
+      <p:sp>
+        <p:nvSpPr>
+          <p:cNvPr id="7" name="Benefit 1 circle"/>
+          <p:cNvSpPr/>
+          <p:nvPr/>
+        </p:nvSpPr>
+        <p:spPr>
+          <a:xfrm>
+            <a:off x="777240" y="1645920"/>
+            <a:ext cx="658368" cy="658368"/>
+          </a:xfrm>
+          <a:prstGeom prst="ellipse">
+            <a:avLst/>
+          </a:prstGeom>
+          <a:solidFill>
+            <a:schemeClr val="tx2">
+              <a:alpha val="80000"/>
+            </a:schemeClr>
+          </a:solidFill>
+          <a:ln w="19050">
+            <a:solidFill>
+              <a:schemeClr val="accent2"/>
+            </a:solidFill>
+            <a:prstDash val="solid"/>
+          </a:ln>
+        </p:spPr>
+      </p:sp>
       <p:pic>
         <p:nvPicPr>
-          <p:cNvPr id="9" name="Safety icon Enter" descr="preencoded.png">    </p:cNvPr>
+          <p:cNvPr id="8" name="Benefit 1 icon" descr="preencoded.png">    </p:cNvPr>
           <p:cNvPicPr>
             <a:picLocks noChangeAspect="1"/>
           </p:cNvPicPr>
@@ -5117,8 +4834,8 @@
         </p:blipFill>
         <p:spPr>
           <a:xfrm>
-            <a:off x="777240" y="3172968"/>
-            <a:ext cx="347472" cy="347472"/>
+            <a:off x="935248" y="1803928"/>
+            <a:ext cx="342351" cy="342351"/>
           </a:xfrm>
           <a:prstGeom prst="rect">
             <a:avLst/>
@@ -5127,14 +4844,14 @@
       </p:pic>
       <p:sp>
         <p:nvSpPr>
-          <p:cNvPr id="10" name="Text 6"/>
+          <p:cNvPr id="9" name="Text 5"/>
           <p:cNvSpPr txBox="1"/>
           <p:nvPr/>
         </p:nvSpPr>
         <p:spPr>
           <a:xfrm>
-            <a:off x="1325880" y="3017520"/>
-            <a:ext cx="5029200" cy="658368"/>
+            <a:off x="777240" y="2441448"/>
+            <a:ext cx="2176272" cy="1051560"/>
           </a:xfrm>
           <a:prstGeom prst="rect">
             <a:avLst/>
@@ -5143,7 +4860,7 @@
           <a:ln/>
         </p:spPr>
         <p:txBody>
-          <a:bodyPr wrap="square" lIns="0" tIns="0" rIns="0" bIns="0" rtlCol="0" anchor="ctr"/>
+          <a:bodyPr wrap="square" lIns="0" tIns="0" rIns="0" bIns="0" rtlCol="0" anchor="t"/>
           <a:lstStyle/>
           <a:p>
             <a:pPr indent="0" marL="0">
@@ -5158,8 +4875,11 @@
                   <a:schemeClr val="bg1"/>
                 </a:solidFill>
               </a:rPr>
-              <a:t>Enter  </a:t>
-            </a:r>
+              <a:t>Order online in minutes</a:t>
+            </a:r>
+            <a:endParaRPr lang="en-US" sz="1500" dirty="0"/>
+          </a:p>
+          <a:p>
             <a:pPr indent="0" marL="0">
               <a:spcAft>
                 <a:spcPts val="400"/>
@@ -5167,31 +4887,31 @@
               <a:buNone/>
             </a:pPr>
             <a:r>
-              <a:rPr lang="en-US" sz="1600" dirty="0">
+              <a:rPr lang="en-US" sz="1400" dirty="0">
                 <a:solidFill>
                   <a:schemeClr val="bg2"/>
                 </a:solidFill>
               </a:rPr>
-              <a:t>a minimum per item</a:t>
-            </a:r>
-            <a:endParaRPr lang="en-US" sz="1600" dirty="0"/>
-          </a:p>
-        </p:txBody>
-      </p:sp>
-      <p:sp>
-        <p:nvSpPr>
-          <p:cNvPr id="11" name="Safety action Save"/>
+              <a:t>No calls, messages or paper to chase</a:t>
+            </a:r>
+            <a:endParaRPr lang="en-US" sz="1500" dirty="0"/>
+          </a:p>
+        </p:txBody>
+      </p:sp>
+      <p:sp>
+        <p:nvSpPr>
+          <p:cNvPr id="10" name="Benefit card 2"/>
           <p:cNvSpPr/>
           <p:nvPr/>
         </p:nvSpPr>
         <p:spPr>
           <a:xfrm>
-            <a:off x="548640" y="3822192"/>
-            <a:ext cx="6035040" cy="658368"/>
+            <a:off x="3355848" y="1417320"/>
+            <a:ext cx="2587752" cy="2148840"/>
           </a:xfrm>
           <a:prstGeom prst="roundRect">
             <a:avLst>
-              <a:gd name="adj" fmla="val 16667"/>
+              <a:gd name="adj" fmla="val 5106"/>
             </a:avLst>
           </a:prstGeom>
           <a:solidFill>
@@ -5207,9 +4927,36 @@
           </a:ln>
         </p:spPr>
       </p:sp>
+      <p:sp>
+        <p:nvSpPr>
+          <p:cNvPr id="11" name="Benefit 2 circle"/>
+          <p:cNvSpPr/>
+          <p:nvPr/>
+        </p:nvSpPr>
+        <p:spPr>
+          <a:xfrm>
+            <a:off x="3584448" y="1645920"/>
+            <a:ext cx="658368" cy="658368"/>
+          </a:xfrm>
+          <a:prstGeom prst="ellipse">
+            <a:avLst/>
+          </a:prstGeom>
+          <a:solidFill>
+            <a:schemeClr val="tx2">
+              <a:alpha val="80000"/>
+            </a:schemeClr>
+          </a:solidFill>
+          <a:ln w="19050">
+            <a:solidFill>
+              <a:schemeClr val="accent2"/>
+            </a:solidFill>
+            <a:prstDash val="solid"/>
+          </a:ln>
+        </p:spPr>
+      </p:sp>
       <p:pic>
         <p:nvPicPr>
-          <p:cNvPr id="12" name="Safety icon Save" descr="preencoded.png">    </p:cNvPr>
+          <p:cNvPr id="12" name="Benefit 2 icon" descr="preencoded.png">    </p:cNvPr>
           <p:cNvPicPr>
             <a:picLocks noChangeAspect="1"/>
           </p:cNvPicPr>
@@ -5223,8 +4970,8 @@
         </p:blipFill>
         <p:spPr>
           <a:xfrm>
-            <a:off x="777240" y="3977640"/>
-            <a:ext cx="347472" cy="347472"/>
+            <a:off x="3742456" y="1803928"/>
+            <a:ext cx="342351" cy="342351"/>
           </a:xfrm>
           <a:prstGeom prst="rect">
             <a:avLst/>
@@ -5239,8 +4986,8 @@
         </p:nvSpPr>
         <p:spPr>
           <a:xfrm>
-            <a:off x="1325880" y="3822192"/>
-            <a:ext cx="5029200" cy="658368"/>
+            <a:off x="3584448" y="2441448"/>
+            <a:ext cx="2176272" cy="1051560"/>
           </a:xfrm>
           <a:prstGeom prst="rect">
             <a:avLst/>
@@ -5249,7 +4996,7 @@
           <a:ln/>
         </p:spPr>
         <p:txBody>
-          <a:bodyPr wrap="square" lIns="0" tIns="0" rIns="0" bIns="0" rtlCol="0" anchor="ctr"/>
+          <a:bodyPr wrap="square" lIns="0" tIns="0" rIns="0" bIns="0" rtlCol="0" anchor="t"/>
           <a:lstStyle/>
           <a:p>
             <a:pPr indent="0" marL="0">
@@ -5264,8 +5011,11 @@
                   <a:schemeClr val="bg1"/>
                 </a:solidFill>
               </a:rPr>
-              <a:t>Save  </a:t>
-            </a:r>
+              <a:t>Stock in hand while ordering</a:t>
+            </a:r>
+            <a:endParaRPr lang="en-US" sz="1500" dirty="0"/>
+          </a:p>
+          <a:p>
             <a:pPr indent="0" marL="0">
               <a:spcAft>
                 <a:spcPts val="400"/>
@@ -5273,31 +5023,31 @@
               <a:buNone/>
             </a:pPr>
             <a:r>
-              <a:rPr lang="en-US" sz="1600" dirty="0">
+              <a:rPr lang="en-US" sz="1400" dirty="0">
                 <a:solidFill>
                   <a:schemeClr val="bg2"/>
                 </a:solidFill>
               </a:rPr>
-              <a:t>levels stay day after day</a:t>
-            </a:r>
-            <a:endParaRPr lang="en-US" sz="1600" dirty="0"/>
-          </a:p>
-        </p:txBody>
-      </p:sp>
-      <p:sp>
-        <p:nvSpPr>
-          <p:cNvPr id="14" name="Safety action Clear all"/>
+              <a:t>Order what you need, waste less</a:t>
+            </a:r>
+            <a:endParaRPr lang="en-US" sz="1500" dirty="0"/>
+          </a:p>
+        </p:txBody>
+      </p:sp>
+      <p:sp>
+        <p:nvSpPr>
+          <p:cNvPr id="14" name="Benefit card 3"/>
           <p:cNvSpPr/>
           <p:nvPr/>
         </p:nvSpPr>
         <p:spPr>
           <a:xfrm>
-            <a:off x="548640" y="4626864"/>
-            <a:ext cx="6035040" cy="658368"/>
+            <a:off x="6163056" y="1417320"/>
+            <a:ext cx="2587752" cy="2148840"/>
           </a:xfrm>
           <a:prstGeom prst="roundRect">
             <a:avLst>
-              <a:gd name="adj" fmla="val 16667"/>
+              <a:gd name="adj" fmla="val 5106"/>
             </a:avLst>
           </a:prstGeom>
           <a:solidFill>
@@ -5313,9 +5063,36 @@
           </a:ln>
         </p:spPr>
       </p:sp>
+      <p:sp>
+        <p:nvSpPr>
+          <p:cNvPr id="15" name="Benefit 3 circle"/>
+          <p:cNvSpPr/>
+          <p:nvPr/>
+        </p:nvSpPr>
+        <p:spPr>
+          <a:xfrm>
+            <a:off x="6391656" y="1645920"/>
+            <a:ext cx="658368" cy="658368"/>
+          </a:xfrm>
+          <a:prstGeom prst="ellipse">
+            <a:avLst/>
+          </a:prstGeom>
+          <a:solidFill>
+            <a:schemeClr val="tx2">
+              <a:alpha val="80000"/>
+            </a:schemeClr>
+          </a:solidFill>
+          <a:ln w="19050">
+            <a:solidFill>
+              <a:schemeClr val="accent2"/>
+            </a:solidFill>
+            <a:prstDash val="solid"/>
+          </a:ln>
+        </p:spPr>
+      </p:sp>
       <p:pic>
         <p:nvPicPr>
-          <p:cNvPr id="15" name="Safety icon Clear all" descr="preencoded.png">    </p:cNvPr>
+          <p:cNvPr id="16" name="Benefit 3 icon" descr="preencoded.png">    </p:cNvPr>
           <p:cNvPicPr>
             <a:picLocks noChangeAspect="1"/>
           </p:cNvPicPr>
@@ -5329,8 +5106,8 @@
         </p:blipFill>
         <p:spPr>
           <a:xfrm>
-            <a:off x="777240" y="4782312"/>
-            <a:ext cx="347472" cy="347472"/>
+            <a:off x="6549664" y="1803928"/>
+            <a:ext cx="342351" cy="342351"/>
           </a:xfrm>
           <a:prstGeom prst="rect">
             <a:avLst/>
@@ -5339,14 +5116,14 @@
       </p:pic>
       <p:sp>
         <p:nvSpPr>
-          <p:cNvPr id="16" name="Text 10"/>
+          <p:cNvPr id="17" name="Text 11"/>
           <p:cNvSpPr txBox="1"/>
           <p:nvPr/>
         </p:nvSpPr>
         <p:spPr>
           <a:xfrm>
-            <a:off x="1325880" y="4626864"/>
-            <a:ext cx="5029200" cy="658368"/>
+            <a:off x="6391656" y="2441448"/>
+            <a:ext cx="2176272" cy="1051560"/>
           </a:xfrm>
           <a:prstGeom prst="rect">
             <a:avLst/>
@@ -5355,7 +5132,7 @@
           <a:ln/>
         </p:spPr>
         <p:txBody>
-          <a:bodyPr wrap="square" lIns="0" tIns="0" rIns="0" bIns="0" rtlCol="0" anchor="ctr"/>
+          <a:bodyPr wrap="square" lIns="0" tIns="0" rIns="0" bIns="0" rtlCol="0" anchor="t"/>
           <a:lstStyle/>
           <a:p>
             <a:pPr indent="0" marL="0">
@@ -5370,8 +5147,11 @@
                   <a:schemeClr val="bg1"/>
                 </a:solidFill>
               </a:rPr>
-              <a:t>Clear all  </a:t>
-            </a:r>
+              <a:t>Save a draft, submit later</a:t>
+            </a:r>
+            <a:endParaRPr lang="en-US" sz="1500" dirty="0"/>
+          </a:p>
+          <a:p>
             <a:pPr indent="0" marL="0">
               <a:spcAft>
                 <a:spcPts val="400"/>
@@ -5379,49 +5159,76 @@
               <a:buNone/>
             </a:pPr>
             <a:r>
-              <a:rPr lang="en-US" sz="1600" dirty="0">
+              <a:rPr lang="en-US" sz="1400" dirty="0">
                 <a:solidFill>
                   <a:schemeClr val="bg2"/>
                 </a:solidFill>
               </a:rPr>
-              <a:t>removes every level</a:t>
-            </a:r>
-            <a:endParaRPr lang="en-US" sz="1600" dirty="0"/>
-          </a:p>
-        </p:txBody>
-      </p:sp>
-      <p:sp>
-        <p:nvSpPr>
-          <p:cNvPr id="17" name="Screenshot placeholder"/>
+              <a:t>Order around your busy hours</a:t>
+            </a:r>
+            <a:endParaRPr lang="en-US" sz="1500" dirty="0"/>
+          </a:p>
+        </p:txBody>
+      </p:sp>
+      <p:sp>
+        <p:nvSpPr>
+          <p:cNvPr id="18" name="Benefit card 4"/>
           <p:cNvSpPr/>
           <p:nvPr/>
         </p:nvSpPr>
         <p:spPr>
           <a:xfrm>
-            <a:off x="7040880" y="1417320"/>
-            <a:ext cx="4599432" cy="3977640"/>
+            <a:off x="8970264" y="1417320"/>
+            <a:ext cx="2587752" cy="2148840"/>
           </a:xfrm>
           <a:prstGeom prst="roundRect">
             <a:avLst>
-              <a:gd name="adj" fmla="val 2759"/>
+              <a:gd name="adj" fmla="val 5106"/>
             </a:avLst>
+          </a:prstGeom>
+          <a:solidFill>
+            <a:schemeClr val="accent6">
+              <a:alpha val="88000"/>
+            </a:schemeClr>
+          </a:solidFill>
+          <a:ln w="12700">
+            <a:solidFill>
+              <a:schemeClr val="accent5"/>
+            </a:solidFill>
+            <a:prstDash val="solid"/>
+          </a:ln>
+        </p:spPr>
+      </p:sp>
+      <p:sp>
+        <p:nvSpPr>
+          <p:cNvPr id="19" name="Benefit 4 circle"/>
+          <p:cNvSpPr/>
+          <p:nvPr/>
+        </p:nvSpPr>
+        <p:spPr>
+          <a:xfrm>
+            <a:off x="9198864" y="1645920"/>
+            <a:ext cx="658368" cy="658368"/>
+          </a:xfrm>
+          <a:prstGeom prst="ellipse">
+            <a:avLst/>
           </a:prstGeom>
           <a:solidFill>
             <a:schemeClr val="tx2">
-              <a:alpha val="65000"/>
+              <a:alpha val="80000"/>
             </a:schemeClr>
           </a:solidFill>
-          <a:ln w="15875">
+          <a:ln w="19050">
             <a:solidFill>
-              <a:schemeClr val="accent1"/>
+              <a:schemeClr val="accent2"/>
             </a:solidFill>
-            <a:prstDash val="dash"/>
+            <a:prstDash val="solid"/>
           </a:ln>
         </p:spPr>
       </p:sp>
       <p:pic>
         <p:nvPicPr>
-          <p:cNvPr id="18" name="Screenshot icon" descr="preencoded.png">    </p:cNvPr>
+          <p:cNvPr id="20" name="Benefit 4 icon" descr="preencoded.png">    </p:cNvPr>
           <p:cNvPicPr>
             <a:picLocks noChangeAspect="1"/>
           </p:cNvPicPr>
@@ -5435,8 +5242,8 @@
         </p:blipFill>
         <p:spPr>
           <a:xfrm>
-            <a:off x="9066276" y="2766060"/>
-            <a:ext cx="548640" cy="548640"/>
+            <a:off x="9356872" y="1803928"/>
+            <a:ext cx="342351" cy="342351"/>
           </a:xfrm>
           <a:prstGeom prst="rect">
             <a:avLst/>
@@ -5445,14 +5252,14 @@
       </p:pic>
       <p:sp>
         <p:nvSpPr>
-          <p:cNvPr id="19" name="Screenshot label"/>
+          <p:cNvPr id="21" name="Text 14"/>
           <p:cNvSpPr txBox="1"/>
           <p:nvPr/>
         </p:nvSpPr>
         <p:spPr>
           <a:xfrm>
-            <a:off x="7315200" y="3451860"/>
-            <a:ext cx="4050792" cy="822960"/>
+            <a:off x="9198864" y="2441448"/>
+            <a:ext cx="2176272" cy="1051560"/>
           </a:xfrm>
           <a:prstGeom prst="rect">
             <a:avLst/>
@@ -5464,63 +5271,90 @@
           <a:bodyPr wrap="square" lIns="0" tIns="0" rIns="0" bIns="0" rtlCol="0" anchor="t"/>
           <a:lstStyle/>
           <a:p>
-            <a:pPr algn="ctr" indent="0" marL="0">
+            <a:pPr indent="0" marL="0">
               <a:spcAft>
                 <a:spcPts val="400"/>
               </a:spcAft>
               <a:buNone/>
             </a:pPr>
             <a:r>
-              <a:rPr lang="en-US" sz="1300" b="1" dirty="0">
+              <a:rPr lang="en-US" sz="1600" b="1" dirty="0">
+                <a:solidFill>
+                  <a:schemeClr val="bg1"/>
+                </a:solidFill>
+              </a:rPr>
+              <a:t>Automatic order if you miss it</a:t>
+            </a:r>
+            <a:endParaRPr lang="en-US" sz="1500" dirty="0"/>
+          </a:p>
+          <a:p>
+            <a:pPr indent="0" marL="0">
+              <a:spcAft>
+                <a:spcPts val="400"/>
+              </a:spcAft>
+              <a:buNone/>
+            </a:pPr>
+            <a:r>
+              <a:rPr lang="en-US" sz="1400" dirty="0">
                 <a:solidFill>
                   <a:schemeClr val="bg2"/>
                 </a:solidFill>
               </a:rPr>
-              <a:t>Insert screenshot</a:t>
-            </a:r>
-            <a:endParaRPr lang="en-US" sz="1300" dirty="0"/>
-          </a:p>
-          <a:p>
-            <a:pPr algn="ctr" indent="0" marL="0">
-              <a:spcAft>
-                <a:spcPts val="400"/>
-              </a:spcAft>
-              <a:buNone/>
-            </a:pPr>
-            <a:r>
-              <a:rPr lang="en-US" sz="1300" dirty="0">
-                <a:solidFill>
-                  <a:schemeClr val="bg2"/>
-                </a:solidFill>
-              </a:rPr>
-              <a:t>Safety Stock screen with a few quantities filled in</a:t>
-            </a:r>
-            <a:endParaRPr lang="en-US" sz="1300" dirty="0"/>
-          </a:p>
-        </p:txBody>
-      </p:sp>
-      <p:sp>
-        <p:nvSpPr>
-          <p:cNvPr id="20" name="Benefit pill"/>
+              <a:t>Shelves are never left empty</a:t>
+            </a:r>
+            <a:endParaRPr lang="en-US" sz="1500" dirty="0"/>
+          </a:p>
+        </p:txBody>
+      </p:sp>
+      <p:sp>
+        <p:nvSpPr>
+          <p:cNvPr id="22" name="Benefit card 5"/>
           <p:cNvSpPr/>
           <p:nvPr/>
         </p:nvSpPr>
         <p:spPr>
           <a:xfrm>
-            <a:off x="548640" y="5596128"/>
-            <a:ext cx="11094415" cy="566928"/>
+            <a:off x="548640" y="3794760"/>
+            <a:ext cx="2587752" cy="2148840"/>
           </a:xfrm>
           <a:prstGeom prst="roundRect">
             <a:avLst>
-              <a:gd name="adj" fmla="val 19355"/>
+              <a:gd name="adj" fmla="val 5106"/>
             </a:avLst>
           </a:prstGeom>
           <a:solidFill>
-            <a:schemeClr val="accent2">
-              <a:alpha val="28000"/>
+            <a:schemeClr val="accent6">
+              <a:alpha val="88000"/>
             </a:schemeClr>
           </a:solidFill>
           <a:ln w="12700">
+            <a:solidFill>
+              <a:schemeClr val="accent5"/>
+            </a:solidFill>
+            <a:prstDash val="solid"/>
+          </a:ln>
+        </p:spPr>
+      </p:sp>
+      <p:sp>
+        <p:nvSpPr>
+          <p:cNvPr id="23" name="Benefit 5 circle"/>
+          <p:cNvSpPr/>
+          <p:nvPr/>
+        </p:nvSpPr>
+        <p:spPr>
+          <a:xfrm>
+            <a:off x="777240" y="4023360"/>
+            <a:ext cx="658368" cy="658368"/>
+          </a:xfrm>
+          <a:prstGeom prst="ellipse">
+            <a:avLst/>
+          </a:prstGeom>
+          <a:solidFill>
+            <a:schemeClr val="tx2">
+              <a:alpha val="80000"/>
+            </a:schemeClr>
+          </a:solidFill>
+          <a:ln w="19050">
             <a:solidFill>
               <a:schemeClr val="accent2"/>
             </a:solidFill>
@@ -5530,7 +5364,7 @@
       </p:sp>
       <p:pic>
         <p:nvPicPr>
-          <p:cNvPr id="21" name="Benefit icon" descr="preencoded.png">    </p:cNvPr>
+          <p:cNvPr id="24" name="Benefit 5 icon" descr="preencoded.png">    </p:cNvPr>
           <p:cNvPicPr>
             <a:picLocks noChangeAspect="1"/>
           </p:cNvPicPr>
@@ -5544,8 +5378,8 @@
         </p:blipFill>
         <p:spPr>
           <a:xfrm>
-            <a:off x="749808" y="5733288"/>
-            <a:ext cx="292608" cy="292608"/>
+            <a:off x="935248" y="4181368"/>
+            <a:ext cx="342351" cy="342351"/>
           </a:xfrm>
           <a:prstGeom prst="rect">
             <a:avLst/>
@@ -5554,14 +5388,14 @@
       </p:pic>
       <p:sp>
         <p:nvSpPr>
-          <p:cNvPr id="22" name="Text 14"/>
+          <p:cNvPr id="25" name="Text 17"/>
           <p:cNvSpPr txBox="1"/>
           <p:nvPr/>
         </p:nvSpPr>
         <p:spPr>
           <a:xfrm>
-            <a:off x="1188720" y="5596128"/>
-            <a:ext cx="10271455" cy="566928"/>
+            <a:off x="777240" y="4818888"/>
+            <a:ext cx="2176272" cy="1051560"/>
           </a:xfrm>
           <a:prstGeom prst="rect">
             <a:avLst/>
@@ -5570,7 +5404,7 @@
           <a:ln/>
         </p:spPr>
         <p:txBody>
-          <a:bodyPr wrap="square" lIns="0" tIns="0" rIns="0" bIns="0" rtlCol="0" anchor="ctr"/>
+          <a:bodyPr wrap="square" lIns="0" tIns="0" rIns="0" bIns="0" rtlCol="0" anchor="t"/>
           <a:lstStyle/>
           <a:p>
             <a:pPr indent="0" marL="0">
@@ -5582,11 +5416,14 @@
             <a:r>
               <a:rPr lang="en-US" sz="1600" b="1" dirty="0">
                 <a:solidFill>
-                  <a:schemeClr val="accent2"/>
-                </a:solidFill>
-              </a:rPr>
-              <a:t>Benefit:  </a:t>
-            </a:r>
+                  <a:schemeClr val="bg1"/>
+                </a:solidFill>
+              </a:rPr>
+              <a:t>Live order status</a:t>
+            </a:r>
+            <a:endParaRPr lang="en-US" sz="1500" dirty="0"/>
+          </a:p>
+          <a:p>
             <a:pPr indent="0" marL="0">
               <a:spcAft>
                 <a:spcPts val="400"/>
@@ -5594,14 +5431,422 @@
               <a:buNone/>
             </a:pPr>
             <a:r>
-              <a:rPr lang="en-US" sz="1600" dirty="0">
+              <a:rPr lang="en-US" sz="1400" dirty="0">
+                <a:solidFill>
+                  <a:schemeClr val="bg2"/>
+                </a:solidFill>
+              </a:rPr>
+              <a:t>Know where it is without phoning</a:t>
+            </a:r>
+            <a:endParaRPr lang="en-US" sz="1500" dirty="0"/>
+          </a:p>
+        </p:txBody>
+      </p:sp>
+      <p:sp>
+        <p:nvSpPr>
+          <p:cNvPr id="26" name="Benefit card 6"/>
+          <p:cNvSpPr/>
+          <p:nvPr/>
+        </p:nvSpPr>
+        <p:spPr>
+          <a:xfrm>
+            <a:off x="3355848" y="3794760"/>
+            <a:ext cx="2587752" cy="2148840"/>
+          </a:xfrm>
+          <a:prstGeom prst="roundRect">
+            <a:avLst>
+              <a:gd name="adj" fmla="val 5106"/>
+            </a:avLst>
+          </a:prstGeom>
+          <a:solidFill>
+            <a:schemeClr val="accent6">
+              <a:alpha val="88000"/>
+            </a:schemeClr>
+          </a:solidFill>
+          <a:ln w="12700">
+            <a:solidFill>
+              <a:schemeClr val="accent5"/>
+            </a:solidFill>
+            <a:prstDash val="solid"/>
+          </a:ln>
+        </p:spPr>
+      </p:sp>
+      <p:sp>
+        <p:nvSpPr>
+          <p:cNvPr id="27" name="Benefit 6 circle"/>
+          <p:cNvSpPr/>
+          <p:nvPr/>
+        </p:nvSpPr>
+        <p:spPr>
+          <a:xfrm>
+            <a:off x="3584448" y="4023360"/>
+            <a:ext cx="658368" cy="658368"/>
+          </a:xfrm>
+          <a:prstGeom prst="ellipse">
+            <a:avLst/>
+          </a:prstGeom>
+          <a:solidFill>
+            <a:schemeClr val="tx2">
+              <a:alpha val="80000"/>
+            </a:schemeClr>
+          </a:solidFill>
+          <a:ln w="19050">
+            <a:solidFill>
+              <a:schemeClr val="accent2"/>
+            </a:solidFill>
+            <a:prstDash val="solid"/>
+          </a:ln>
+        </p:spPr>
+      </p:sp>
+      <p:pic>
+        <p:nvPicPr>
+          <p:cNvPr id="28" name="Benefit 6 icon" descr="preencoded.png">    </p:cNvPr>
+          <p:cNvPicPr>
+            <a:picLocks noChangeAspect="1"/>
+          </p:cNvPicPr>
+          <p:nvPr/>
+        </p:nvPicPr>
+        <p:blipFill>
+          <a:blip r:embed="rId9"/>
+          <a:stretch>
+            <a:fillRect/>
+          </a:stretch>
+        </p:blipFill>
+        <p:spPr>
+          <a:xfrm>
+            <a:off x="3742456" y="4181368"/>
+            <a:ext cx="342351" cy="342351"/>
+          </a:xfrm>
+          <a:prstGeom prst="rect">
+            <a:avLst/>
+          </a:prstGeom>
+        </p:spPr>
+      </p:pic>
+      <p:sp>
+        <p:nvSpPr>
+          <p:cNvPr id="29" name="Text 20"/>
+          <p:cNvSpPr txBox="1"/>
+          <p:nvPr/>
+        </p:nvSpPr>
+        <p:spPr>
+          <a:xfrm>
+            <a:off x="3584448" y="4818888"/>
+            <a:ext cx="2176272" cy="1051560"/>
+          </a:xfrm>
+          <a:prstGeom prst="rect">
+            <a:avLst/>
+          </a:prstGeom>
+          <a:noFill/>
+          <a:ln/>
+        </p:spPr>
+        <p:txBody>
+          <a:bodyPr wrap="square" lIns="0" tIns="0" rIns="0" bIns="0" rtlCol="0" anchor="t"/>
+          <a:lstStyle/>
+          <a:p>
+            <a:pPr indent="0" marL="0">
+              <a:spcAft>
+                <a:spcPts val="400"/>
+              </a:spcAft>
+              <a:buNone/>
+            </a:pPr>
+            <a:r>
+              <a:rPr lang="en-US" sz="1600" b="1" dirty="0">
                 <a:solidFill>
                   <a:schemeClr val="bg1"/>
                 </a:solidFill>
               </a:rPr>
-              <a:t>Head office can see your minimum needs and plan supply around them.</a:t>
-            </a:r>
-            <a:endParaRPr lang="en-US" sz="1600" dirty="0"/>
+              <a:t>Record what arrived</a:t>
+            </a:r>
+            <a:endParaRPr lang="en-US" sz="1500" dirty="0"/>
+          </a:p>
+          <a:p>
+            <a:pPr indent="0" marL="0">
+              <a:spcAft>
+                <a:spcPts val="400"/>
+              </a:spcAft>
+              <a:buNone/>
+            </a:pPr>
+            <a:r>
+              <a:rPr lang="en-US" sz="1400" dirty="0">
+                <a:solidFill>
+                  <a:schemeClr val="bg2"/>
+                </a:solidFill>
+              </a:rPr>
+              <a:t>Shortages are on record and followed up</a:t>
+            </a:r>
+            <a:endParaRPr lang="en-US" sz="1500" dirty="0"/>
+          </a:p>
+        </p:txBody>
+      </p:sp>
+      <p:sp>
+        <p:nvSpPr>
+          <p:cNvPr id="30" name="Benefit card 7"/>
+          <p:cNvSpPr/>
+          <p:nvPr/>
+        </p:nvSpPr>
+        <p:spPr>
+          <a:xfrm>
+            <a:off x="6163056" y="3794760"/>
+            <a:ext cx="2587752" cy="2148840"/>
+          </a:xfrm>
+          <a:prstGeom prst="roundRect">
+            <a:avLst>
+              <a:gd name="adj" fmla="val 5106"/>
+            </a:avLst>
+          </a:prstGeom>
+          <a:solidFill>
+            <a:schemeClr val="accent6">
+              <a:alpha val="88000"/>
+            </a:schemeClr>
+          </a:solidFill>
+          <a:ln w="12700">
+            <a:solidFill>
+              <a:schemeClr val="accent5"/>
+            </a:solidFill>
+            <a:prstDash val="solid"/>
+          </a:ln>
+        </p:spPr>
+      </p:sp>
+      <p:sp>
+        <p:nvSpPr>
+          <p:cNvPr id="31" name="Benefit 7 circle"/>
+          <p:cNvSpPr/>
+          <p:nvPr/>
+        </p:nvSpPr>
+        <p:spPr>
+          <a:xfrm>
+            <a:off x="6391656" y="4023360"/>
+            <a:ext cx="658368" cy="658368"/>
+          </a:xfrm>
+          <a:prstGeom prst="ellipse">
+            <a:avLst/>
+          </a:prstGeom>
+          <a:solidFill>
+            <a:schemeClr val="tx2">
+              <a:alpha val="80000"/>
+            </a:schemeClr>
+          </a:solidFill>
+          <a:ln w="19050">
+            <a:solidFill>
+              <a:schemeClr val="accent2"/>
+            </a:solidFill>
+            <a:prstDash val="solid"/>
+          </a:ln>
+        </p:spPr>
+      </p:sp>
+      <p:pic>
+        <p:nvPicPr>
+          <p:cNvPr id="32" name="Benefit 7 icon" descr="preencoded.png">    </p:cNvPr>
+          <p:cNvPicPr>
+            <a:picLocks noChangeAspect="1"/>
+          </p:cNvPicPr>
+          <p:nvPr/>
+        </p:nvPicPr>
+        <p:blipFill>
+          <a:blip r:embed="rId10"/>
+          <a:stretch>
+            <a:fillRect/>
+          </a:stretch>
+        </p:blipFill>
+        <p:spPr>
+          <a:xfrm>
+            <a:off x="6549664" y="4181368"/>
+            <a:ext cx="342351" cy="342351"/>
+          </a:xfrm>
+          <a:prstGeom prst="rect">
+            <a:avLst/>
+          </a:prstGeom>
+        </p:spPr>
+      </p:pic>
+      <p:sp>
+        <p:nvSpPr>
+          <p:cNvPr id="33" name="Text 23"/>
+          <p:cNvSpPr txBox="1"/>
+          <p:nvPr/>
+        </p:nvSpPr>
+        <p:spPr>
+          <a:xfrm>
+            <a:off x="6391656" y="4818888"/>
+            <a:ext cx="2176272" cy="1051560"/>
+          </a:xfrm>
+          <a:prstGeom prst="rect">
+            <a:avLst/>
+          </a:prstGeom>
+          <a:noFill/>
+          <a:ln/>
+        </p:spPr>
+        <p:txBody>
+          <a:bodyPr wrap="square" lIns="0" tIns="0" rIns="0" bIns="0" rtlCol="0" anchor="t"/>
+          <a:lstStyle/>
+          <a:p>
+            <a:pPr indent="0" marL="0">
+              <a:spcAft>
+                <a:spcPts val="400"/>
+              </a:spcAft>
+              <a:buNone/>
+            </a:pPr>
+            <a:r>
+              <a:rPr lang="en-US" sz="1600" b="1" dirty="0">
+                <a:solidFill>
+                  <a:schemeClr val="bg1"/>
+                </a:solidFill>
+              </a:rPr>
+              <a:t>Printable purchase orders</a:t>
+            </a:r>
+            <a:endParaRPr lang="en-US" sz="1500" dirty="0"/>
+          </a:p>
+          <a:p>
+            <a:pPr indent="0" marL="0">
+              <a:spcAft>
+                <a:spcPts val="400"/>
+              </a:spcAft>
+              <a:buNone/>
+            </a:pPr>
+            <a:r>
+              <a:rPr lang="en-US" sz="1400" dirty="0">
+                <a:solidFill>
+                  <a:schemeClr val="bg2"/>
+                </a:solidFill>
+              </a:rPr>
+              <a:t>Check deliveries at the door</a:t>
+            </a:r>
+            <a:endParaRPr lang="en-US" sz="1500" dirty="0"/>
+          </a:p>
+        </p:txBody>
+      </p:sp>
+      <p:sp>
+        <p:nvSpPr>
+          <p:cNvPr id="34" name="Benefit card 8"/>
+          <p:cNvSpPr/>
+          <p:nvPr/>
+        </p:nvSpPr>
+        <p:spPr>
+          <a:xfrm>
+            <a:off x="8970264" y="3794760"/>
+            <a:ext cx="2587752" cy="2148840"/>
+          </a:xfrm>
+          <a:prstGeom prst="roundRect">
+            <a:avLst>
+              <a:gd name="adj" fmla="val 5106"/>
+            </a:avLst>
+          </a:prstGeom>
+          <a:solidFill>
+            <a:schemeClr val="accent6">
+              <a:alpha val="88000"/>
+            </a:schemeClr>
+          </a:solidFill>
+          <a:ln w="12700">
+            <a:solidFill>
+              <a:schemeClr val="accent5"/>
+            </a:solidFill>
+            <a:prstDash val="solid"/>
+          </a:ln>
+        </p:spPr>
+      </p:sp>
+      <p:sp>
+        <p:nvSpPr>
+          <p:cNvPr id="35" name="Benefit 8 circle"/>
+          <p:cNvSpPr/>
+          <p:nvPr/>
+        </p:nvSpPr>
+        <p:spPr>
+          <a:xfrm>
+            <a:off x="9198864" y="4023360"/>
+            <a:ext cx="658368" cy="658368"/>
+          </a:xfrm>
+          <a:prstGeom prst="ellipse">
+            <a:avLst/>
+          </a:prstGeom>
+          <a:solidFill>
+            <a:schemeClr val="tx2">
+              <a:alpha val="80000"/>
+            </a:schemeClr>
+          </a:solidFill>
+          <a:ln w="19050">
+            <a:solidFill>
+              <a:schemeClr val="accent2"/>
+            </a:solidFill>
+            <a:prstDash val="solid"/>
+          </a:ln>
+        </p:spPr>
+      </p:sp>
+      <p:pic>
+        <p:nvPicPr>
+          <p:cNvPr id="36" name="Benefit 8 icon" descr="preencoded.png">    </p:cNvPr>
+          <p:cNvPicPr>
+            <a:picLocks noChangeAspect="1"/>
+          </p:cNvPicPr>
+          <p:nvPr/>
+        </p:nvPicPr>
+        <p:blipFill>
+          <a:blip r:embed="rId11"/>
+          <a:stretch>
+            <a:fillRect/>
+          </a:stretch>
+        </p:blipFill>
+        <p:spPr>
+          <a:xfrm>
+            <a:off x="9356872" y="4181368"/>
+            <a:ext cx="342351" cy="342351"/>
+          </a:xfrm>
+          <a:prstGeom prst="rect">
+            <a:avLst/>
+          </a:prstGeom>
+        </p:spPr>
+      </p:pic>
+      <p:sp>
+        <p:nvSpPr>
+          <p:cNvPr id="37" name="Text 26"/>
+          <p:cNvSpPr txBox="1"/>
+          <p:nvPr/>
+        </p:nvSpPr>
+        <p:spPr>
+          <a:xfrm>
+            <a:off x="9198864" y="4818888"/>
+            <a:ext cx="2176272" cy="1051560"/>
+          </a:xfrm>
+          <a:prstGeom prst="rect">
+            <a:avLst/>
+          </a:prstGeom>
+          <a:noFill/>
+          <a:ln/>
+        </p:spPr>
+        <p:txBody>
+          <a:bodyPr wrap="square" lIns="0" tIns="0" rIns="0" bIns="0" rtlCol="0" anchor="t"/>
+          <a:lstStyle/>
+          <a:p>
+            <a:pPr indent="0" marL="0">
+              <a:spcAft>
+                <a:spcPts val="400"/>
+              </a:spcAft>
+              <a:buNone/>
+            </a:pPr>
+            <a:r>
+              <a:rPr lang="en-US" sz="1600" b="1" dirty="0">
+                <a:solidFill>
+                  <a:schemeClr val="bg1"/>
+                </a:solidFill>
+              </a:rPr>
+              <a:t>Messages tab</a:t>
+            </a:r>
+            <a:endParaRPr lang="en-US" sz="1500" dirty="0"/>
+          </a:p>
+          <a:p>
+            <a:pPr indent="0" marL="0">
+              <a:spcAft>
+                <a:spcPts val="400"/>
+              </a:spcAft>
+              <a:buNone/>
+            </a:pPr>
+            <a:r>
+              <a:rPr lang="en-US" sz="1400" dirty="0">
+                <a:solidFill>
+                  <a:schemeClr val="bg2"/>
+                </a:solidFill>
+              </a:rPr>
+              <a:t>Questions go to head office, in writing</a:t>
+            </a:r>
+            <a:endParaRPr lang="en-US" sz="1500" dirty="0"/>
           </a:p>
         </p:txBody>
       </p:sp>
@@ -5861,7 +6106,7 @@
                   <a:schemeClr val="bg1"/>
                 </a:solidFill>
               </a:rPr>
-              <a:t>A day in the life of a branch order</a:t>
+              <a:t>Getting started: how to log in</a:t>
             </a:r>
             <a:endParaRPr lang="en-US" sz="3400" dirty="0"/>
           </a:p>
@@ -5869,57 +6114,18 @@
       </p:sp>
       <p:sp>
         <p:nvSpPr>
-          <p:cNvPr id="6" name="Text 3"/>
-          <p:cNvSpPr txBox="1"/>
-          <p:nvPr/>
-        </p:nvSpPr>
-        <p:spPr>
-          <a:xfrm>
-            <a:off x="548640" y="1325880"/>
-            <a:ext cx="3657600" cy="274320"/>
-          </a:xfrm>
-          <a:prstGeom prst="rect">
-            <a:avLst/>
-          </a:prstGeom>
-          <a:noFill/>
-          <a:ln/>
-        </p:spPr>
-        <p:txBody>
-          <a:bodyPr wrap="square" lIns="0" tIns="0" rIns="0" bIns="0" rtlCol="0" anchor="t"/>
-          <a:lstStyle/>
-          <a:p>
-            <a:pPr indent="0" marL="0">
-              <a:spcAft>
-                <a:spcPts val="400"/>
-              </a:spcAft>
-              <a:buNone/>
-            </a:pPr>
-            <a:r>
-              <a:rPr lang="en-US" sz="1300" b="1" spc="100" kern="0" dirty="0">
-                <a:solidFill>
-                  <a:schemeClr val="bg2"/>
-                </a:solidFill>
-              </a:rPr>
-              <a:t>TODAY (ORDER DAY)</a:t>
-            </a:r>
-            <a:endParaRPr lang="en-US" sz="1300" dirty="0"/>
-          </a:p>
-        </p:txBody>
-      </p:sp>
-      <p:sp>
-        <p:nvSpPr>
-          <p:cNvPr id="7" name="Flow Check stock, save draft"/>
+          <p:cNvPr id="6" name="Login step 1"/>
           <p:cNvSpPr/>
           <p:nvPr/>
         </p:nvSpPr>
         <p:spPr>
           <a:xfrm>
-            <a:off x="548640" y="1691640"/>
-            <a:ext cx="3246120" cy="914400"/>
+            <a:off x="548640" y="1417320"/>
+            <a:ext cx="6675120" cy="841248"/>
           </a:xfrm>
           <a:prstGeom prst="roundRect">
             <a:avLst>
-              <a:gd name="adj" fmla="val 12000"/>
+              <a:gd name="adj" fmla="val 13043"/>
             </a:avLst>
           </a:prstGeom>
           <a:solidFill>
@@ -5937,14 +6143,53 @@
       </p:sp>
       <p:sp>
         <p:nvSpPr>
+          <p:cNvPr id="7" name="Text 4"/>
+          <p:cNvSpPr txBox="1"/>
+          <p:nvPr/>
+        </p:nvSpPr>
+        <p:spPr>
+          <a:xfrm>
+            <a:off x="731520" y="1417320"/>
+            <a:ext cx="548640" cy="841248"/>
+          </a:xfrm>
+          <a:prstGeom prst="rect">
+            <a:avLst/>
+          </a:prstGeom>
+          <a:noFill/>
+          <a:ln/>
+        </p:spPr>
+        <p:txBody>
+          <a:bodyPr wrap="square" lIns="0" tIns="0" rIns="0" bIns="0" rtlCol="0" anchor="ctr"/>
+          <a:lstStyle/>
+          <a:p>
+            <a:pPr algn="ctr" indent="0" marL="0">
+              <a:spcAft>
+                <a:spcPts val="400"/>
+              </a:spcAft>
+              <a:buNone/>
+            </a:pPr>
+            <a:r>
+              <a:rPr lang="en-US" sz="3000" b="1" dirty="0">
+                <a:solidFill>
+                  <a:schemeClr val="accent1"/>
+                </a:solidFill>
+              </a:rPr>
+              <a:t>1</a:t>
+            </a:r>
+            <a:endParaRPr lang="en-US" sz="3000" dirty="0"/>
+          </a:p>
+        </p:txBody>
+      </p:sp>
+      <p:sp>
+        <p:nvSpPr>
           <p:cNvPr id="8" name="Text 5"/>
           <p:cNvSpPr txBox="1"/>
           <p:nvPr/>
         </p:nvSpPr>
         <p:spPr>
           <a:xfrm>
-            <a:off x="685800" y="1691640"/>
-            <a:ext cx="2971800" cy="914400"/>
+            <a:off x="1463040" y="1417320"/>
+            <a:ext cx="5577840" cy="841248"/>
           </a:xfrm>
           <a:prstGeom prst="rect">
             <a:avLst/>
@@ -5956,7 +6201,7 @@
           <a:bodyPr wrap="square" lIns="0" tIns="0" rIns="0" bIns="0" rtlCol="0" anchor="ctr"/>
           <a:lstStyle/>
           <a:p>
-            <a:pPr algn="ctr" indent="0" marL="0">
+            <a:pPr indent="0" marL="0">
               <a:spcAft>
                 <a:spcPts val="200"/>
               </a:spcAft>
@@ -5968,12 +6213,12 @@
                   <a:schemeClr val="bg1"/>
                 </a:solidFill>
               </a:rPr>
-              <a:t>Check stock, save draft</a:t>
+              <a:t>Open the system in your browser</a:t>
             </a:r>
             <a:endParaRPr lang="en-US" sz="1500" dirty="0"/>
           </a:p>
           <a:p>
-            <a:pPr algn="ctr" indent="0" marL="0">
+            <a:pPr indent="0" marL="0">
               <a:spcAft>
                 <a:spcPts val="200"/>
               </a:spcAft>
@@ -5985,7 +6230,7 @@
                   <a:schemeClr val="bg2"/>
                 </a:solidFill>
               </a:rPr>
-              <a:t>New Order tab</a:t>
+              <a:t>[insert live URL]</a:t>
             </a:r>
             <a:endParaRPr lang="en-US" sz="1500" dirty="0"/>
           </a:p>
@@ -5993,103 +6238,18 @@
       </p:sp>
       <p:sp>
         <p:nvSpPr>
-          <p:cNvPr id="9" name="Flow Submit by 2:00 PM"/>
+          <p:cNvPr id="9" name="Login step 2"/>
           <p:cNvSpPr/>
           <p:nvPr/>
         </p:nvSpPr>
         <p:spPr>
           <a:xfrm>
-            <a:off x="4480560" y="1691640"/>
-            <a:ext cx="3246120" cy="914400"/>
+            <a:off x="548640" y="2423160"/>
+            <a:ext cx="6675120" cy="841248"/>
           </a:xfrm>
           <a:prstGeom prst="roundRect">
             <a:avLst>
-              <a:gd name="adj" fmla="val 12000"/>
-            </a:avLst>
-          </a:prstGeom>
-          <a:solidFill>
-            <a:schemeClr val="accent1">
-              <a:alpha val="22000"/>
-            </a:schemeClr>
-          </a:solidFill>
-          <a:ln w="31750">
-            <a:solidFill>
-              <a:schemeClr val="accent1"/>
-            </a:solidFill>
-            <a:prstDash val="solid"/>
-          </a:ln>
-        </p:spPr>
-      </p:sp>
-      <p:sp>
-        <p:nvSpPr>
-          <p:cNvPr id="10" name="Text 7"/>
-          <p:cNvSpPr txBox="1"/>
-          <p:nvPr/>
-        </p:nvSpPr>
-        <p:spPr>
-          <a:xfrm>
-            <a:off x="4617720" y="1691640"/>
-            <a:ext cx="2971800" cy="914400"/>
-          </a:xfrm>
-          <a:prstGeom prst="rect">
-            <a:avLst/>
-          </a:prstGeom>
-          <a:noFill/>
-          <a:ln/>
-        </p:spPr>
-        <p:txBody>
-          <a:bodyPr wrap="square" lIns="0" tIns="0" rIns="0" bIns="0" rtlCol="0" anchor="ctr"/>
-          <a:lstStyle/>
-          <a:p>
-            <a:pPr algn="ctr" indent="0" marL="0">
-              <a:spcAft>
-                <a:spcPts val="200"/>
-              </a:spcAft>
-              <a:buNone/>
-            </a:pPr>
-            <a:r>
-              <a:rPr lang="en-US" sz="1700" b="1" dirty="0">
-                <a:solidFill>
-                  <a:schemeClr val="bg1"/>
-                </a:solidFill>
-              </a:rPr>
-              <a:t>Submit by 2:00 PM</a:t>
-            </a:r>
-            <a:endParaRPr lang="en-US" sz="1500" dirty="0"/>
-          </a:p>
-          <a:p>
-            <a:pPr algn="ctr" indent="0" marL="0">
-              <a:spcAft>
-                <a:spcPts val="200"/>
-              </a:spcAft>
-              <a:buNone/>
-            </a:pPr>
-            <a:r>
-              <a:rPr lang="en-US" sz="1400" dirty="0">
-                <a:solidFill>
-                  <a:schemeClr val="bg2"/>
-                </a:solidFill>
-              </a:rPr>
-              <a:t>Order locks: SUBMITTED</a:t>
-            </a:r>
-            <a:endParaRPr lang="en-US" sz="1500" dirty="0"/>
-          </a:p>
-        </p:txBody>
-      </p:sp>
-      <p:sp>
-        <p:nvSpPr>
-          <p:cNvPr id="11" name="Flow Head office assigns"/>
-          <p:cNvSpPr/>
-          <p:nvPr/>
-        </p:nvSpPr>
-        <p:spPr>
-          <a:xfrm>
-            <a:off x="8412480" y="1691640"/>
-            <a:ext cx="3246120" cy="914400"/>
-          </a:xfrm>
-          <a:prstGeom prst="roundRect">
-            <a:avLst>
-              <a:gd name="adj" fmla="val 12000"/>
+              <a:gd name="adj" fmla="val 13043"/>
             </a:avLst>
           </a:prstGeom>
           <a:solidFill>
@@ -6107,14 +6267,14 @@
       </p:sp>
       <p:sp>
         <p:nvSpPr>
-          <p:cNvPr id="12" name="Text 9"/>
+          <p:cNvPr id="10" name="Text 7"/>
           <p:cNvSpPr txBox="1"/>
           <p:nvPr/>
         </p:nvSpPr>
         <p:spPr>
           <a:xfrm>
-            <a:off x="8549640" y="1691640"/>
-            <a:ext cx="2971800" cy="914400"/>
+            <a:off x="731520" y="2423160"/>
+            <a:ext cx="548640" cy="841248"/>
           </a:xfrm>
           <a:prstGeom prst="rect">
             <a:avLst/>
@@ -6128,6 +6288,45 @@
           <a:p>
             <a:pPr algn="ctr" indent="0" marL="0">
               <a:spcAft>
+                <a:spcPts val="400"/>
+              </a:spcAft>
+              <a:buNone/>
+            </a:pPr>
+            <a:r>
+              <a:rPr lang="en-US" sz="3000" b="1" dirty="0">
+                <a:solidFill>
+                  <a:schemeClr val="accent1"/>
+                </a:solidFill>
+              </a:rPr>
+              <a:t>2</a:t>
+            </a:r>
+            <a:endParaRPr lang="en-US" sz="3000" dirty="0"/>
+          </a:p>
+        </p:txBody>
+      </p:sp>
+      <p:sp>
+        <p:nvSpPr>
+          <p:cNvPr id="11" name="Text 8"/>
+          <p:cNvSpPr txBox="1"/>
+          <p:nvPr/>
+        </p:nvSpPr>
+        <p:spPr>
+          <a:xfrm>
+            <a:off x="1463040" y="2423160"/>
+            <a:ext cx="5577840" cy="841248"/>
+          </a:xfrm>
+          <a:prstGeom prst="rect">
+            <a:avLst/>
+          </a:prstGeom>
+          <a:noFill/>
+          <a:ln/>
+        </p:spPr>
+        <p:txBody>
+          <a:bodyPr wrap="square" lIns="0" tIns="0" rIns="0" bIns="0" rtlCol="0" anchor="ctr"/>
+          <a:lstStyle/>
+          <a:p>
+            <a:pPr indent="0" marL="0">
+              <a:spcAft>
                 <a:spcPts val="200"/>
               </a:spcAft>
               <a:buNone/>
@@ -6138,12 +6337,12 @@
                   <a:schemeClr val="bg1"/>
                 </a:solidFill>
               </a:rPr>
-              <a:t>Head office assigns</a:t>
+              <a:t>Enter your branch username</a:t>
             </a:r>
             <a:endParaRPr lang="en-US" sz="1500" dirty="0"/>
           </a:p>
           <a:p>
-            <a:pPr algn="ctr" indent="0" marL="0">
+            <a:pPr indent="0" marL="0">
               <a:spcAft>
                 <a:spcPts val="200"/>
               </a:spcAft>
@@ -6155,7 +6354,7 @@
                   <a:schemeClr val="bg2"/>
                 </a:solidFill>
               </a:rPr>
-              <a:t>Status becomes ASSIGNED</a:t>
+              <a:t>e.g. br01, plus the starting password from head office</a:t>
             </a:r>
             <a:endParaRPr lang="en-US" sz="1500" dirty="0"/>
           </a:p>
@@ -6163,18 +6362,18 @@
       </p:sp>
       <p:sp>
         <p:nvSpPr>
-          <p:cNvPr id="13" name="Flow Delivery arrives"/>
+          <p:cNvPr id="12" name="Login step 3"/>
           <p:cNvSpPr/>
           <p:nvPr/>
         </p:nvSpPr>
         <p:spPr>
           <a:xfrm>
-            <a:off x="548640" y="4526280"/>
-            <a:ext cx="3246120" cy="914400"/>
+            <a:off x="548640" y="3429000"/>
+            <a:ext cx="6675120" cy="841248"/>
           </a:xfrm>
           <a:prstGeom prst="roundRect">
             <a:avLst>
-              <a:gd name="adj" fmla="val 12000"/>
+              <a:gd name="adj" fmla="val 13043"/>
             </a:avLst>
           </a:prstGeom>
           <a:solidFill>
@@ -6192,14 +6391,53 @@
       </p:sp>
       <p:sp>
         <p:nvSpPr>
+          <p:cNvPr id="13" name="Text 10"/>
+          <p:cNvSpPr txBox="1"/>
+          <p:nvPr/>
+        </p:nvSpPr>
+        <p:spPr>
+          <a:xfrm>
+            <a:off x="731520" y="3429000"/>
+            <a:ext cx="548640" cy="841248"/>
+          </a:xfrm>
+          <a:prstGeom prst="rect">
+            <a:avLst/>
+          </a:prstGeom>
+          <a:noFill/>
+          <a:ln/>
+        </p:spPr>
+        <p:txBody>
+          <a:bodyPr wrap="square" lIns="0" tIns="0" rIns="0" bIns="0" rtlCol="0" anchor="ctr"/>
+          <a:lstStyle/>
+          <a:p>
+            <a:pPr algn="ctr" indent="0" marL="0">
+              <a:spcAft>
+                <a:spcPts val="400"/>
+              </a:spcAft>
+              <a:buNone/>
+            </a:pPr>
+            <a:r>
+              <a:rPr lang="en-US" sz="3000" b="1" dirty="0">
+                <a:solidFill>
+                  <a:schemeClr val="accent1"/>
+                </a:solidFill>
+              </a:rPr>
+              <a:t>3</a:t>
+            </a:r>
+            <a:endParaRPr lang="en-US" sz="3000" dirty="0"/>
+          </a:p>
+        </p:txBody>
+      </p:sp>
+      <p:sp>
+        <p:nvSpPr>
           <p:cNvPr id="14" name="Text 11"/>
           <p:cNvSpPr txBox="1"/>
           <p:nvPr/>
         </p:nvSpPr>
         <p:spPr>
           <a:xfrm>
-            <a:off x="685800" y="4526280"/>
-            <a:ext cx="2971800" cy="914400"/>
+            <a:off x="1463040" y="3429000"/>
+            <a:ext cx="5577840" cy="841248"/>
           </a:xfrm>
           <a:prstGeom prst="rect">
             <a:avLst/>
@@ -6211,7 +6449,7 @@
           <a:bodyPr wrap="square" lIns="0" tIns="0" rIns="0" bIns="0" rtlCol="0" anchor="ctr"/>
           <a:lstStyle/>
           <a:p>
-            <a:pPr algn="ctr" indent="0" marL="0">
+            <a:pPr indent="0" marL="0">
               <a:spcAft>
                 <a:spcPts val="200"/>
               </a:spcAft>
@@ -6223,12 +6461,12 @@
                   <a:schemeClr val="bg1"/>
                 </a:solidFill>
               </a:rPr>
-              <a:t>Delivery arrives</a:t>
+              <a:t>Choose your own password</a:t>
             </a:r>
             <a:endParaRPr lang="en-US" sz="1500" dirty="0"/>
           </a:p>
           <a:p>
-            <a:pPr algn="ctr" indent="0" marL="0">
+            <a:pPr indent="0" marL="0">
               <a:spcAft>
                 <a:spcPts val="200"/>
               </a:spcAft>
@@ -6240,7 +6478,7 @@
                   <a:schemeClr val="bg2"/>
                 </a:solidFill>
               </a:rPr>
-              <a:t>Check it against the PO</a:t>
+              <a:t>Required at first sign-in before you can continue</a:t>
             </a:r>
             <a:endParaRPr lang="en-US" sz="1500" dirty="0"/>
           </a:p>
@@ -6248,18 +6486,18 @@
       </p:sp>
       <p:sp>
         <p:nvSpPr>
-          <p:cNvPr id="15" name="Flow Confirm Delivery"/>
+          <p:cNvPr id="15" name="Login step 4"/>
           <p:cNvSpPr/>
           <p:nvPr/>
         </p:nvSpPr>
         <p:spPr>
           <a:xfrm>
-            <a:off x="4480560" y="4526280"/>
-            <a:ext cx="3246120" cy="914400"/>
+            <a:off x="548640" y="4434840"/>
+            <a:ext cx="6675120" cy="841248"/>
           </a:xfrm>
           <a:prstGeom prst="roundRect">
             <a:avLst>
-              <a:gd name="adj" fmla="val 12000"/>
+              <a:gd name="adj" fmla="val 13043"/>
             </a:avLst>
           </a:prstGeom>
           <a:solidFill>
@@ -6283,8 +6521,8 @@
         </p:nvSpPr>
         <p:spPr>
           <a:xfrm>
-            <a:off x="4617720" y="4526280"/>
-            <a:ext cx="2971800" cy="914400"/>
+            <a:off x="731520" y="4434840"/>
+            <a:ext cx="548640" cy="841248"/>
           </a:xfrm>
           <a:prstGeom prst="rect">
             <a:avLst/>
@@ -6298,6 +6536,45 @@
           <a:p>
             <a:pPr algn="ctr" indent="0" marL="0">
               <a:spcAft>
+                <a:spcPts val="400"/>
+              </a:spcAft>
+              <a:buNone/>
+            </a:pPr>
+            <a:r>
+              <a:rPr lang="en-US" sz="3000" b="1" dirty="0">
+                <a:solidFill>
+                  <a:schemeClr val="accent1"/>
+                </a:solidFill>
+              </a:rPr>
+              <a:t>4</a:t>
+            </a:r>
+            <a:endParaRPr lang="en-US" sz="3000" dirty="0"/>
+          </a:p>
+        </p:txBody>
+      </p:sp>
+      <p:sp>
+        <p:nvSpPr>
+          <p:cNvPr id="17" name="Text 14"/>
+          <p:cNvSpPr txBox="1"/>
+          <p:nvPr/>
+        </p:nvSpPr>
+        <p:spPr>
+          <a:xfrm>
+            <a:off x="1463040" y="4434840"/>
+            <a:ext cx="5577840" cy="841248"/>
+          </a:xfrm>
+          <a:prstGeom prst="rect">
+            <a:avLst/>
+          </a:prstGeom>
+          <a:noFill/>
+          <a:ln/>
+        </p:spPr>
+        <p:txBody>
+          <a:bodyPr wrap="square" lIns="0" tIns="0" rIns="0" bIns="0" rtlCol="0" anchor="ctr"/>
+          <a:lstStyle/>
+          <a:p>
+            <a:pPr indent="0" marL="0">
+              <a:spcAft>
                 <a:spcPts val="200"/>
               </a:spcAft>
               <a:buNone/>
@@ -6308,12 +6585,12 @@
                   <a:schemeClr val="bg1"/>
                 </a:solidFill>
               </a:rPr>
-              <a:t>Confirm Delivery</a:t>
+              <a:t>Keep it within your team</a:t>
             </a:r>
             <a:endParaRPr lang="en-US" sz="1500" dirty="0"/>
           </a:p>
           <a:p>
-            <a:pPr algn="ctr" indent="0" marL="0">
+            <a:pPr indent="0" marL="0">
               <a:spcAft>
                 <a:spcPts val="200"/>
               </a:spcAft>
@@ -6325,7 +6602,7 @@
                   <a:schemeClr val="bg2"/>
                 </a:solidFill>
               </a:rPr>
-              <a:t>Status becomes CONFIRMED</a:t>
+              <a:t>Share it only with your branch team</a:t>
             </a:r>
             <a:endParaRPr lang="en-US" sz="1500" dirty="0"/>
           </a:p>
@@ -6333,241 +6610,342 @@
       </p:sp>
       <p:sp>
         <p:nvSpPr>
-          <p:cNvPr id="17" name="Flow arrow 1"/>
+          <p:cNvPr id="18" name="Lockout card"/>
           <p:cNvSpPr/>
           <p:nvPr/>
         </p:nvSpPr>
         <p:spPr>
           <a:xfrm>
-            <a:off x="3840480" y="2148840"/>
-            <a:ext cx="594360" cy="0"/>
-          </a:xfrm>
-          <a:prstGeom prst="line">
-            <a:avLst/>
-          </a:prstGeom>
-          <a:noFill/>
-          <a:ln w="22225">
-            <a:solidFill>
-              <a:schemeClr val="bg2"/>
-            </a:solidFill>
-            <a:prstDash val="solid"/>
-            <a:tailEnd type="triangle"/>
-          </a:ln>
-        </p:spPr>
-      </p:sp>
-      <p:sp>
-        <p:nvSpPr>
-          <p:cNvPr id="18" name="Flow arrow 2"/>
-          <p:cNvSpPr/>
-          <p:nvPr/>
-        </p:nvSpPr>
-        <p:spPr>
-          <a:xfrm>
-            <a:off x="7772400" y="2148840"/>
-            <a:ext cx="594360" cy="0"/>
-          </a:xfrm>
-          <a:prstGeom prst="line">
-            <a:avLst/>
-          </a:prstGeom>
-          <a:noFill/>
-          <a:ln w="22225">
-            <a:solidFill>
-              <a:schemeClr val="bg2"/>
-            </a:solidFill>
-            <a:prstDash val="solid"/>
-            <a:tailEnd type="triangle"/>
-          </a:ln>
-        </p:spPr>
-      </p:sp>
-      <p:sp>
-        <p:nvSpPr>
-          <p:cNvPr id="19" name="Missed arrow"/>
-          <p:cNvSpPr/>
-          <p:nvPr/>
-        </p:nvSpPr>
-        <p:spPr>
-          <a:xfrm>
-            <a:off x="6103620" y="2651760"/>
-            <a:ext cx="0" cy="320040"/>
-          </a:xfrm>
-          <a:prstGeom prst="line">
-            <a:avLst/>
-          </a:prstGeom>
-          <a:noFill/>
-          <a:ln w="19050">
-            <a:solidFill>
-              <a:schemeClr val="accent4"/>
-            </a:solidFill>
-            <a:prstDash val="dash"/>
-            <a:tailEnd type="triangle"/>
-          </a:ln>
-        </p:spPr>
-      </p:sp>
-      <p:sp>
-        <p:nvSpPr>
-          <p:cNvPr id="20" name="Missed cutoff box"/>
-          <p:cNvSpPr/>
-          <p:nvPr/>
-        </p:nvSpPr>
-        <p:spPr>
-          <a:xfrm>
-            <a:off x="4663440" y="3017520"/>
-            <a:ext cx="2880360" cy="868680"/>
+            <a:off x="7589520" y="1417320"/>
+            <a:ext cx="4053535" cy="3858768"/>
           </a:xfrm>
           <a:prstGeom prst="roundRect">
             <a:avLst>
-              <a:gd name="adj" fmla="val 12632"/>
+              <a:gd name="adj" fmla="val 2844"/>
             </a:avLst>
           </a:prstGeom>
           <a:solidFill>
             <a:schemeClr val="accent6">
-              <a:alpha val="80000"/>
+              <a:alpha val="88000"/>
             </a:schemeClr>
           </a:solidFill>
           <a:ln w="12700">
             <a:solidFill>
               <a:schemeClr val="accent4"/>
             </a:solidFill>
-            <a:prstDash val="dash"/>
+            <a:prstDash val="solid"/>
           </a:ln>
         </p:spPr>
       </p:sp>
       <p:sp>
         <p:nvSpPr>
-          <p:cNvPr id="21" name="Text 18"/>
-          <p:cNvSpPr txBox="1"/>
-          <p:nvPr/>
-        </p:nvSpPr>
-        <p:spPr>
-          <a:xfrm>
-            <a:off x="4754880" y="3017520"/>
-            <a:ext cx="2697480" cy="868680"/>
-          </a:xfrm>
-          <a:prstGeom prst="rect">
-            <a:avLst/>
-          </a:prstGeom>
-          <a:noFill/>
-          <a:ln/>
-        </p:spPr>
-        <p:txBody>
-          <a:bodyPr wrap="square" lIns="0" tIns="0" rIns="0" bIns="0" rtlCol="0" anchor="ctr"/>
-          <a:lstStyle/>
-          <a:p>
-            <a:pPr algn="ctr" indent="0" marL="0">
-              <a:spcAft>
-                <a:spcPts val="200"/>
-              </a:spcAft>
-              <a:buNone/>
-            </a:pPr>
-            <a:r>
-              <a:rPr lang="en-US" sz="1600" b="1" dirty="0">
-                <a:solidFill>
-                  <a:schemeClr val="accent4"/>
-                </a:solidFill>
-              </a:rPr>
-              <a:t>Missed 2:00 PM?</a:t>
-            </a:r>
-            <a:endParaRPr lang="en-US" sz="1600" dirty="0"/>
-          </a:p>
-          <a:p>
-            <a:pPr algn="ctr" indent="0" marL="0">
-              <a:spcAft>
-                <a:spcPts val="200"/>
-              </a:spcAft>
-              <a:buNone/>
-            </a:pPr>
-            <a:r>
-              <a:rPr lang="en-US" sz="1400" dirty="0">
-                <a:solidFill>
-                  <a:schemeClr val="bg2"/>
-                </a:solidFill>
-              </a:rPr>
-              <a:t>Auto-order: draft or past week</a:t>
-            </a:r>
-            <a:endParaRPr lang="en-US" sz="1600" dirty="0"/>
-          </a:p>
-        </p:txBody>
-      </p:sp>
-      <p:sp>
-        <p:nvSpPr>
-          <p:cNvPr id="22" name="Elbow down"/>
+          <p:cNvPr id="19" name="Lockout circle"/>
           <p:cNvSpPr/>
           <p:nvPr/>
         </p:nvSpPr>
         <p:spPr>
           <a:xfrm>
-            <a:off x="10035540" y="2651760"/>
-            <a:ext cx="0" cy="1463040"/>
-          </a:xfrm>
-          <a:prstGeom prst="line">
-            <a:avLst/>
-          </a:prstGeom>
-          <a:noFill/>
-          <a:ln w="22225">
+            <a:off x="9159088" y="1691640"/>
+            <a:ext cx="914400" cy="914400"/>
+          </a:xfrm>
+          <a:prstGeom prst="ellipse">
+            <a:avLst/>
+          </a:prstGeom>
+          <a:solidFill>
+            <a:schemeClr val="tx2">
+              <a:alpha val="80000"/>
+            </a:schemeClr>
+          </a:solidFill>
+          <a:ln w="19050">
             <a:solidFill>
-              <a:schemeClr val="bg2"/>
+              <a:schemeClr val="accent4"/>
             </a:solidFill>
             <a:prstDash val="solid"/>
           </a:ln>
         </p:spPr>
       </p:sp>
-      <p:sp>
-        <p:nvSpPr>
-          <p:cNvPr id="23" name="Elbow across"/>
+      <p:pic>
+        <p:nvPicPr>
+          <p:cNvPr id="20" name="Lockout icon" descr="preencoded.png">    </p:cNvPr>
+          <p:cNvPicPr>
+            <a:picLocks noChangeAspect="1"/>
+          </p:cNvPicPr>
+          <p:nvPr/>
+        </p:nvPicPr>
+        <p:blipFill>
+          <a:blip r:embed="rId4"/>
+          <a:stretch>
+            <a:fillRect/>
+          </a:stretch>
+        </p:blipFill>
+        <p:spPr>
+          <a:xfrm>
+            <a:off x="9378544" y="1911096"/>
+            <a:ext cx="475488" cy="475488"/>
+          </a:xfrm>
+          <a:prstGeom prst="rect">
+            <a:avLst/>
+          </a:prstGeom>
+        </p:spPr>
+      </p:pic>
+      <p:sp>
+        <p:nvSpPr>
+          <p:cNvPr id="21" name="Text 17"/>
+          <p:cNvSpPr txBox="1"/>
+          <p:nvPr/>
+        </p:nvSpPr>
+        <p:spPr>
+          <a:xfrm>
+            <a:off x="7589520" y="2697480"/>
+            <a:ext cx="2026768" cy="914400"/>
+          </a:xfrm>
+          <a:prstGeom prst="rect">
+            <a:avLst/>
+          </a:prstGeom>
+          <a:noFill/>
+          <a:ln/>
+        </p:spPr>
+        <p:txBody>
+          <a:bodyPr wrap="square" lIns="0" tIns="0" rIns="0" bIns="0" rtlCol="0" anchor="ctr"/>
+          <a:lstStyle/>
+          <a:p>
+            <a:pPr algn="ctr" indent="0" marL="0">
+              <a:spcAft>
+                <a:spcPts val="400"/>
+              </a:spcAft>
+              <a:buNone/>
+            </a:pPr>
+            <a:r>
+              <a:rPr lang="en-US" sz="6000" b="1" dirty="0">
+                <a:solidFill>
+                  <a:schemeClr val="accent4"/>
+                </a:solidFill>
+              </a:rPr>
+              <a:t>5</a:t>
+            </a:r>
+            <a:endParaRPr lang="en-US" sz="6000" dirty="0"/>
+          </a:p>
+        </p:txBody>
+      </p:sp>
+      <p:sp>
+        <p:nvSpPr>
+          <p:cNvPr id="22" name="Text 18"/>
+          <p:cNvSpPr txBox="1"/>
+          <p:nvPr/>
+        </p:nvSpPr>
+        <p:spPr>
+          <a:xfrm>
+            <a:off x="9616288" y="2697480"/>
+            <a:ext cx="2026768" cy="914400"/>
+          </a:xfrm>
+          <a:prstGeom prst="rect">
+            <a:avLst/>
+          </a:prstGeom>
+          <a:noFill/>
+          <a:ln/>
+        </p:spPr>
+        <p:txBody>
+          <a:bodyPr wrap="square" lIns="0" tIns="0" rIns="0" bIns="0" rtlCol="0" anchor="ctr"/>
+          <a:lstStyle/>
+          <a:p>
+            <a:pPr algn="ctr" indent="0" marL="0">
+              <a:spcAft>
+                <a:spcPts val="400"/>
+              </a:spcAft>
+              <a:buNone/>
+            </a:pPr>
+            <a:r>
+              <a:rPr lang="en-US" sz="6000" b="1" dirty="0">
+                <a:solidFill>
+                  <a:schemeClr val="accent4"/>
+                </a:solidFill>
+              </a:rPr>
+              <a:t>15</a:t>
+            </a:r>
+            <a:endParaRPr lang="en-US" sz="6000" dirty="0"/>
+          </a:p>
+        </p:txBody>
+      </p:sp>
+      <p:sp>
+        <p:nvSpPr>
+          <p:cNvPr id="23" name="Text 19"/>
+          <p:cNvSpPr txBox="1"/>
+          <p:nvPr/>
+        </p:nvSpPr>
+        <p:spPr>
+          <a:xfrm>
+            <a:off x="7589520" y="3611880"/>
+            <a:ext cx="2026768" cy="320040"/>
+          </a:xfrm>
+          <a:prstGeom prst="rect">
+            <a:avLst/>
+          </a:prstGeom>
+          <a:noFill/>
+          <a:ln/>
+        </p:spPr>
+        <p:txBody>
+          <a:bodyPr wrap="square" lIns="0" tIns="0" rIns="0" bIns="0" rtlCol="0" anchor="t"/>
+          <a:lstStyle/>
+          <a:p>
+            <a:pPr algn="ctr" indent="0" marL="0">
+              <a:spcAft>
+                <a:spcPts val="400"/>
+              </a:spcAft>
+              <a:buNone/>
+            </a:pPr>
+            <a:r>
+              <a:rPr lang="en-US" sz="1400" dirty="0">
+                <a:solidFill>
+                  <a:schemeClr val="bg2"/>
+                </a:solidFill>
+              </a:rPr>
+              <a:t>wrong passwords</a:t>
+            </a:r>
+            <a:endParaRPr lang="en-US" sz="1400" dirty="0"/>
+          </a:p>
+        </p:txBody>
+      </p:sp>
+      <p:sp>
+        <p:nvSpPr>
+          <p:cNvPr id="24" name="Text 20"/>
+          <p:cNvSpPr txBox="1"/>
+          <p:nvPr/>
+        </p:nvSpPr>
+        <p:spPr>
+          <a:xfrm>
+            <a:off x="9616288" y="3611880"/>
+            <a:ext cx="2026768" cy="320040"/>
+          </a:xfrm>
+          <a:prstGeom prst="rect">
+            <a:avLst/>
+          </a:prstGeom>
+          <a:noFill/>
+          <a:ln/>
+        </p:spPr>
+        <p:txBody>
+          <a:bodyPr wrap="square" lIns="0" tIns="0" rIns="0" bIns="0" rtlCol="0" anchor="t"/>
+          <a:lstStyle/>
+          <a:p>
+            <a:pPr algn="ctr" indent="0" marL="0">
+              <a:spcAft>
+                <a:spcPts val="400"/>
+              </a:spcAft>
+              <a:buNone/>
+            </a:pPr>
+            <a:r>
+              <a:rPr lang="en-US" sz="1400" dirty="0">
+                <a:solidFill>
+                  <a:schemeClr val="bg2"/>
+                </a:solidFill>
+              </a:rPr>
+              <a:t>minutes locked</a:t>
+            </a:r>
+            <a:endParaRPr lang="en-US" sz="1400" dirty="0"/>
+          </a:p>
+        </p:txBody>
+      </p:sp>
+      <p:sp>
+        <p:nvSpPr>
+          <p:cNvPr id="25" name="Text 21"/>
+          <p:cNvSpPr txBox="1"/>
+          <p:nvPr/>
+        </p:nvSpPr>
+        <p:spPr>
+          <a:xfrm>
+            <a:off x="7863840" y="4206240"/>
+            <a:ext cx="3504895" cy="731520"/>
+          </a:xfrm>
+          <a:prstGeom prst="rect">
+            <a:avLst/>
+          </a:prstGeom>
+          <a:noFill/>
+          <a:ln/>
+        </p:spPr>
+        <p:txBody>
+          <a:bodyPr wrap="square" lIns="0" tIns="0" rIns="0" bIns="0" rtlCol="0" anchor="ctr"/>
+          <a:lstStyle/>
+          <a:p>
+            <a:pPr algn="ctr" indent="0" marL="0">
+              <a:spcAft>
+                <a:spcPts val="400"/>
+              </a:spcAft>
+              <a:buNone/>
+            </a:pPr>
+            <a:r>
+              <a:rPr lang="en-US" sz="1600" dirty="0">
+                <a:solidFill>
+                  <a:schemeClr val="bg1"/>
+                </a:solidFill>
+              </a:rPr>
+              <a:t>Wait it out, or call support.</a:t>
+            </a:r>
+            <a:endParaRPr lang="en-US" sz="1600" dirty="0"/>
+          </a:p>
+        </p:txBody>
+      </p:sp>
+      <p:sp>
+        <p:nvSpPr>
+          <p:cNvPr id="26" name="Benefit pill"/>
           <p:cNvSpPr/>
           <p:nvPr/>
         </p:nvSpPr>
         <p:spPr>
           <a:xfrm>
-            <a:off x="2171700" y="4114800"/>
-            <a:ext cx="7863840" cy="0"/>
-          </a:xfrm>
-          <a:prstGeom prst="line">
-            <a:avLst/>
-          </a:prstGeom>
-          <a:noFill/>
-          <a:ln w="22225">
+            <a:off x="548640" y="5596128"/>
+            <a:ext cx="11094415" cy="566928"/>
+          </a:xfrm>
+          <a:prstGeom prst="roundRect">
+            <a:avLst>
+              <a:gd name="adj" fmla="val 19355"/>
+            </a:avLst>
+          </a:prstGeom>
+          <a:solidFill>
+            <a:schemeClr val="accent2">
+              <a:alpha val="28000"/>
+            </a:schemeClr>
+          </a:solidFill>
+          <a:ln w="12700">
             <a:solidFill>
-              <a:schemeClr val="bg2"/>
+              <a:schemeClr val="accent2"/>
             </a:solidFill>
             <a:prstDash val="solid"/>
           </a:ln>
         </p:spPr>
       </p:sp>
-      <p:sp>
-        <p:nvSpPr>
-          <p:cNvPr id="24" name="Elbow into delivery"/>
-          <p:cNvSpPr/>
-          <p:nvPr/>
-        </p:nvSpPr>
-        <p:spPr>
-          <a:xfrm>
-            <a:off x="2171700" y="4114800"/>
-            <a:ext cx="0" cy="365760"/>
-          </a:xfrm>
-          <a:prstGeom prst="line">
-            <a:avLst/>
-          </a:prstGeom>
-          <a:noFill/>
-          <a:ln w="22225">
-            <a:solidFill>
-              <a:schemeClr val="bg2"/>
-            </a:solidFill>
-            <a:prstDash val="solid"/>
-            <a:tailEnd type="triangle"/>
-          </a:ln>
-        </p:spPr>
-      </p:sp>
-      <p:sp>
-        <p:nvSpPr>
-          <p:cNvPr id="25" name="Text 22"/>
+      <p:pic>
+        <p:nvPicPr>
+          <p:cNvPr id="27" name="Benefit icon" descr="preencoded.png">    </p:cNvPr>
+          <p:cNvPicPr>
+            <a:picLocks noChangeAspect="1"/>
+          </p:cNvPicPr>
+          <p:nvPr/>
+        </p:nvPicPr>
+        <p:blipFill>
+          <a:blip r:embed="rId5"/>
+          <a:stretch>
+            <a:fillRect/>
+          </a:stretch>
+        </p:blipFill>
+        <p:spPr>
+          <a:xfrm>
+            <a:off x="749808" y="5733288"/>
+            <a:ext cx="292608" cy="292608"/>
+          </a:xfrm>
+          <a:prstGeom prst="rect">
+            <a:avLst/>
+          </a:prstGeom>
+        </p:spPr>
+      </p:pic>
+      <p:sp>
+        <p:nvSpPr>
+          <p:cNvPr id="28" name="Text 23"/>
           <p:cNvSpPr txBox="1"/>
           <p:nvPr/>
         </p:nvSpPr>
         <p:spPr>
           <a:xfrm>
-            <a:off x="7109460" y="3767328"/>
-            <a:ext cx="2788920" cy="274320"/>
+            <a:off x="1188720" y="5596128"/>
+            <a:ext cx="10271455" cy="566928"/>
           </a:xfrm>
           <a:prstGeom prst="rect">
             <a:avLst/>
@@ -6576,48 +6954,23 @@
           <a:ln/>
         </p:spPr>
         <p:txBody>
-          <a:bodyPr wrap="square" lIns="0" tIns="0" rIns="0" bIns="0" rtlCol="0" anchor="t"/>
-          <a:lstStyle/>
-          <a:p>
-            <a:pPr algn="r" indent="0" marL="0">
+          <a:bodyPr wrap="square" lIns="0" tIns="0" rIns="0" bIns="0" rtlCol="0" anchor="ctr"/>
+          <a:lstStyle/>
+          <a:p>
+            <a:pPr indent="0" marL="0">
               <a:spcAft>
                 <a:spcPts val="400"/>
               </a:spcAft>
               <a:buNone/>
             </a:pPr>
             <a:r>
-              <a:rPr lang="en-US" sz="1300" dirty="0">
-                <a:solidFill>
-                  <a:schemeClr val="bg2"/>
-                </a:solidFill>
-              </a:rPr>
-              <a:t>supplier delivers next day</a:t>
-            </a:r>
-            <a:endParaRPr lang="en-US" sz="1300" dirty="0"/>
-          </a:p>
-        </p:txBody>
-      </p:sp>
-      <p:sp>
-        <p:nvSpPr>
-          <p:cNvPr id="26" name="Text 23"/>
-          <p:cNvSpPr txBox="1"/>
-          <p:nvPr/>
-        </p:nvSpPr>
-        <p:spPr>
-          <a:xfrm>
-            <a:off x="2354580" y="4187952"/>
-            <a:ext cx="3657600" cy="274320"/>
-          </a:xfrm>
-          <a:prstGeom prst="rect">
-            <a:avLst/>
-          </a:prstGeom>
-          <a:noFill/>
-          <a:ln/>
-        </p:spPr>
-        <p:txBody>
-          <a:bodyPr wrap="square" lIns="0" tIns="0" rIns="0" bIns="0" rtlCol="0" anchor="t"/>
-          <a:lstStyle/>
-          <a:p>
+              <a:rPr lang="en-US" sz="1600" b="1" dirty="0">
+                <a:solidFill>
+                  <a:schemeClr val="accent2"/>
+                </a:solidFill>
+              </a:rPr>
+              <a:t>Benefit:  </a:t>
+            </a:r>
             <a:pPr indent="0" marL="0">
               <a:spcAft>
                 <a:spcPts val="400"/>
@@ -6625,77 +6978,14 @@
               <a:buNone/>
             </a:pPr>
             <a:r>
-              <a:rPr lang="en-US" sz="1300" b="1" spc="100" kern="0" dirty="0">
-                <a:solidFill>
-                  <a:schemeClr val="bg2"/>
-                </a:solidFill>
-              </a:rPr>
-              <a:t>TOMORROW (DELIVERY DAY)</a:t>
-            </a:r>
-            <a:endParaRPr lang="en-US" sz="1300" dirty="0"/>
-          </a:p>
-        </p:txBody>
-      </p:sp>
-      <p:sp>
-        <p:nvSpPr>
-          <p:cNvPr id="27" name="Flow arrow 3"/>
-          <p:cNvSpPr/>
-          <p:nvPr/>
-        </p:nvSpPr>
-        <p:spPr>
-          <a:xfrm>
-            <a:off x="3840480" y="4983480"/>
-            <a:ext cx="594360" cy="0"/>
-          </a:xfrm>
-          <a:prstGeom prst="line">
-            <a:avLst/>
-          </a:prstGeom>
-          <a:noFill/>
-          <a:ln w="22225">
-            <a:solidFill>
-              <a:schemeClr val="bg2"/>
-            </a:solidFill>
-            <a:prstDash val="solid"/>
-            <a:tailEnd type="triangle"/>
-          </a:ln>
-        </p:spPr>
-      </p:sp>
-      <p:sp>
-        <p:nvSpPr>
-          <p:cNvPr id="28" name="Text 25"/>
-          <p:cNvSpPr txBox="1"/>
-          <p:nvPr/>
-        </p:nvSpPr>
-        <p:spPr>
-          <a:xfrm>
-            <a:off x="8412480" y="4526280"/>
-            <a:ext cx="3246120" cy="914400"/>
-          </a:xfrm>
-          <a:prstGeom prst="rect">
-            <a:avLst/>
-          </a:prstGeom>
-          <a:noFill/>
-          <a:ln/>
-        </p:spPr>
-        <p:txBody>
-          <a:bodyPr wrap="square" lIns="0" tIns="0" rIns="0" bIns="0" rtlCol="0" anchor="ctr"/>
-          <a:lstStyle/>
-          <a:p>
-            <a:pPr indent="0" marL="0">
-              <a:spcAft>
-                <a:spcPts val="400"/>
-              </a:spcAft>
-              <a:buNone/>
-            </a:pPr>
-            <a:r>
-              <a:rPr lang="en-US" sz="1500" i="1" dirty="0">
-                <a:solidFill>
-                  <a:schemeClr val="accent1"/>
-                </a:solidFill>
-              </a:rPr>
-              <a:t>The one time to remember is 2:00 PM. The dashed box is the safety net, not the plan.</a:t>
-            </a:r>
-            <a:endParaRPr lang="en-US" sz="1500" dirty="0"/>
+              <a:rPr lang="en-US" sz="1600" dirty="0">
+                <a:solidFill>
+                  <a:schemeClr val="bg1"/>
+                </a:solidFill>
+              </a:rPr>
+              <a:t>Your own password keeps your branch's orders safe.</a:t>
+            </a:r>
+            <a:endParaRPr lang="en-US" sz="1600" dirty="0"/>
           </a:p>
         </p:txBody>
       </p:sp>
@@ -6955,7 +7245,7 @@
                   <a:schemeClr val="bg1"/>
                 </a:solidFill>
               </a:rPr>
-              <a:t>What's in it for your branch</a:t>
+              <a:t>Where to get help</a:t>
             </a:r>
             <a:endParaRPr lang="en-US" sz="3400" dirty="0"/>
           </a:p>
@@ -6963,18 +7253,18 @@
       </p:sp>
       <p:sp>
         <p:nvSpPr>
-          <p:cNvPr id="6" name="Benefit card 1"/>
+          <p:cNvPr id="6" name="Help card Messages tab"/>
           <p:cNvSpPr/>
           <p:nvPr/>
         </p:nvSpPr>
         <p:spPr>
           <a:xfrm>
-            <a:off x="548640" y="1417320"/>
-            <a:ext cx="2587752" cy="2148840"/>
+            <a:off x="548640" y="1463040"/>
+            <a:ext cx="2587752" cy="3840480"/>
           </a:xfrm>
           <a:prstGeom prst="roundRect">
             <a:avLst>
-              <a:gd name="adj" fmla="val 5106"/>
+              <a:gd name="adj" fmla="val 4240"/>
             </a:avLst>
           </a:prstGeom>
           <a:solidFill>
@@ -6992,14 +7282,14 @@
       </p:sp>
       <p:sp>
         <p:nvSpPr>
-          <p:cNvPr id="7" name="Benefit 1 circle"/>
+          <p:cNvPr id="7" name="Help Messages tab circle"/>
           <p:cNvSpPr/>
           <p:nvPr/>
         </p:nvSpPr>
         <p:spPr>
           <a:xfrm>
-            <a:off x="777240" y="1645920"/>
-            <a:ext cx="658368" cy="658368"/>
+            <a:off x="1339596" y="1828800"/>
+            <a:ext cx="1005840" cy="1005840"/>
           </a:xfrm>
           <a:prstGeom prst="ellipse">
             <a:avLst/>
@@ -7011,7 +7301,7 @@
           </a:solidFill>
           <a:ln w="19050">
             <a:solidFill>
-              <a:schemeClr val="accent2"/>
+              <a:schemeClr val="accent1"/>
             </a:solidFill>
             <a:prstDash val="solid"/>
           </a:ln>
@@ -7019,7 +7309,7 @@
       </p:sp>
       <p:pic>
         <p:nvPicPr>
-          <p:cNvPr id="8" name="Benefit 1 icon" descr="preencoded.png">    </p:cNvPr>
+          <p:cNvPr id="8" name="Help Messages tab icon" descr="preencoded.png">    </p:cNvPr>
           <p:cNvPicPr>
             <a:picLocks noChangeAspect="1"/>
           </p:cNvPicPr>
@@ -7033,8 +7323,8 @@
         </p:blipFill>
         <p:spPr>
           <a:xfrm>
-            <a:off x="935248" y="1803928"/>
-            <a:ext cx="342351" cy="342351"/>
+            <a:off x="1580998" y="2070202"/>
+            <a:ext cx="523037" cy="523037"/>
           </a:xfrm>
           <a:prstGeom prst="rect">
             <a:avLst/>
@@ -7049,8 +7339,8 @@
         </p:nvSpPr>
         <p:spPr>
           <a:xfrm>
-            <a:off x="777240" y="2441448"/>
-            <a:ext cx="2176272" cy="1051560"/>
+            <a:off x="731520" y="3063240"/>
+            <a:ext cx="2221992" cy="457200"/>
           </a:xfrm>
           <a:prstGeom prst="rect">
             <a:avLst/>
@@ -7062,55 +7352,77 @@
           <a:bodyPr wrap="square" lIns="0" tIns="0" rIns="0" bIns="0" rtlCol="0" anchor="t"/>
           <a:lstStyle/>
           <a:p>
-            <a:pPr indent="0" marL="0">
+            <a:pPr algn="ctr" indent="0" marL="0">
               <a:spcAft>
                 <a:spcPts val="400"/>
               </a:spcAft>
               <a:buNone/>
             </a:pPr>
             <a:r>
-              <a:rPr lang="en-US" sz="1600" b="1" dirty="0">
+              <a:rPr lang="en-US" sz="1900" b="1" dirty="0">
                 <a:solidFill>
                   <a:schemeClr val="bg1"/>
                 </a:solidFill>
               </a:rPr>
-              <a:t>Order online in minutes</a:t>
+              <a:t>Messages tab</a:t>
+            </a:r>
+            <a:endParaRPr lang="en-US" sz="1900" dirty="0"/>
+          </a:p>
+        </p:txBody>
+      </p:sp>
+      <p:sp>
+        <p:nvSpPr>
+          <p:cNvPr id="10" name="Text 6"/>
+          <p:cNvSpPr txBox="1"/>
+          <p:nvPr/>
+        </p:nvSpPr>
+        <p:spPr>
+          <a:xfrm>
+            <a:off x="777240" y="3611880"/>
+            <a:ext cx="2130552" cy="1554480"/>
+          </a:xfrm>
+          <a:prstGeom prst="rect">
+            <a:avLst/>
+          </a:prstGeom>
+          <a:noFill/>
+          <a:ln/>
+        </p:spPr>
+        <p:txBody>
+          <a:bodyPr wrap="square" lIns="0" tIns="0" rIns="0" bIns="0" rtlCol="0" anchor="t"/>
+          <a:lstStyle/>
+          <a:p>
+            <a:pPr algn="ctr" indent="0" marL="0">
+              <a:spcAft>
+                <a:spcPts val="400"/>
+              </a:spcAft>
+              <a:buNone/>
+            </a:pPr>
+            <a:r>
+              <a:rPr lang="en-US" sz="1500" dirty="0">
+                <a:solidFill>
+                  <a:schemeClr val="bg2"/>
+                </a:solidFill>
+              </a:rPr>
+              <a:t>Chat with head office inside the system. A red badge on the bell shows unread replies.</a:t>
             </a:r>
             <a:endParaRPr lang="en-US" sz="1500" dirty="0"/>
           </a:p>
-          <a:p>
-            <a:pPr indent="0" marL="0">
-              <a:spcAft>
-                <a:spcPts val="400"/>
-              </a:spcAft>
-              <a:buNone/>
-            </a:pPr>
-            <a:r>
-              <a:rPr lang="en-US" sz="1400" dirty="0">
-                <a:solidFill>
-                  <a:schemeClr val="bg2"/>
-                </a:solidFill>
-              </a:rPr>
-              <a:t>No calls, messages or paper to chase</a:t>
-            </a:r>
-            <a:endParaRPr lang="en-US" sz="1500" dirty="0"/>
-          </a:p>
-        </p:txBody>
-      </p:sp>
-      <p:sp>
-        <p:nvSpPr>
-          <p:cNvPr id="10" name="Benefit card 2"/>
+        </p:txBody>
+      </p:sp>
+      <p:sp>
+        <p:nvSpPr>
+          <p:cNvPr id="11" name="Help card Branch Guidelines"/>
           <p:cNvSpPr/>
           <p:nvPr/>
         </p:nvSpPr>
         <p:spPr>
           <a:xfrm>
-            <a:off x="3355848" y="1417320"/>
-            <a:ext cx="2587752" cy="2148840"/>
+            <a:off x="3355848" y="1463040"/>
+            <a:ext cx="2587752" cy="3840480"/>
           </a:xfrm>
           <a:prstGeom prst="roundRect">
             <a:avLst>
-              <a:gd name="adj" fmla="val 5106"/>
+              <a:gd name="adj" fmla="val 4240"/>
             </a:avLst>
           </a:prstGeom>
           <a:solidFill>
@@ -7128,14 +7440,14 @@
       </p:sp>
       <p:sp>
         <p:nvSpPr>
-          <p:cNvPr id="11" name="Benefit 2 circle"/>
+          <p:cNvPr id="12" name="Help Branch Guidelines circle"/>
           <p:cNvSpPr/>
           <p:nvPr/>
         </p:nvSpPr>
         <p:spPr>
           <a:xfrm>
-            <a:off x="3584448" y="1645920"/>
-            <a:ext cx="658368" cy="658368"/>
+            <a:off x="4146804" y="1828800"/>
+            <a:ext cx="1005840" cy="1005840"/>
           </a:xfrm>
           <a:prstGeom prst="ellipse">
             <a:avLst/>
@@ -7147,7 +7459,7 @@
           </a:solidFill>
           <a:ln w="19050">
             <a:solidFill>
-              <a:schemeClr val="accent2"/>
+              <a:schemeClr val="accent1"/>
             </a:solidFill>
             <a:prstDash val="solid"/>
           </a:ln>
@@ -7155,7 +7467,7 @@
       </p:sp>
       <p:pic>
         <p:nvPicPr>
-          <p:cNvPr id="12" name="Benefit 2 icon" descr="preencoded.png">    </p:cNvPr>
+          <p:cNvPr id="13" name="Help Branch Guidelines icon" descr="preencoded.png">    </p:cNvPr>
           <p:cNvPicPr>
             <a:picLocks noChangeAspect="1"/>
           </p:cNvPicPr>
@@ -7169,8 +7481,8 @@
         </p:blipFill>
         <p:spPr>
           <a:xfrm>
-            <a:off x="3742456" y="1803928"/>
-            <a:ext cx="342351" cy="342351"/>
+            <a:off x="4388206" y="2070202"/>
+            <a:ext cx="523037" cy="523037"/>
           </a:xfrm>
           <a:prstGeom prst="rect">
             <a:avLst/>
@@ -7179,14 +7491,14 @@
       </p:pic>
       <p:sp>
         <p:nvSpPr>
-          <p:cNvPr id="13" name="Text 8"/>
+          <p:cNvPr id="14" name="Text 9"/>
           <p:cNvSpPr txBox="1"/>
           <p:nvPr/>
         </p:nvSpPr>
         <p:spPr>
           <a:xfrm>
-            <a:off x="3584448" y="2441448"/>
-            <a:ext cx="2176272" cy="1051560"/>
+            <a:off x="3538728" y="3063240"/>
+            <a:ext cx="2221992" cy="457200"/>
           </a:xfrm>
           <a:prstGeom prst="rect">
             <a:avLst/>
@@ -7198,55 +7510,252 @@
           <a:bodyPr wrap="square" lIns="0" tIns="0" rIns="0" bIns="0" rtlCol="0" anchor="t"/>
           <a:lstStyle/>
           <a:p>
-            <a:pPr indent="0" marL="0">
+            <a:pPr algn="ctr" indent="0" marL="0">
               <a:spcAft>
                 <a:spcPts val="400"/>
               </a:spcAft>
               <a:buNone/>
             </a:pPr>
             <a:r>
-              <a:rPr lang="en-US" sz="1600" b="1" dirty="0">
+              <a:rPr lang="en-US" sz="1900" b="1" dirty="0">
                 <a:solidFill>
                   <a:schemeClr val="bg1"/>
                 </a:solidFill>
               </a:rPr>
-              <a:t>Stock in hand while ordering</a:t>
+              <a:t>Branch Guidelines</a:t>
+            </a:r>
+            <a:endParaRPr lang="en-US" sz="1900" dirty="0"/>
+          </a:p>
+        </p:txBody>
+      </p:sp>
+      <p:sp>
+        <p:nvSpPr>
+          <p:cNvPr id="15" name="Text 10"/>
+          <p:cNvSpPr txBox="1"/>
+          <p:nvPr/>
+        </p:nvSpPr>
+        <p:spPr>
+          <a:xfrm>
+            <a:off x="3584448" y="3611880"/>
+            <a:ext cx="2130552" cy="1554480"/>
+          </a:xfrm>
+          <a:prstGeom prst="rect">
+            <a:avLst/>
+          </a:prstGeom>
+          <a:noFill/>
+          <a:ln/>
+        </p:spPr>
+        <p:txBody>
+          <a:bodyPr wrap="square" lIns="0" tIns="0" rIns="0" bIns="0" rtlCol="0" anchor="t"/>
+          <a:lstStyle/>
+          <a:p>
+            <a:pPr algn="ctr" indent="0" marL="0">
+              <a:spcAft>
+                <a:spcPts val="400"/>
+              </a:spcAft>
+              <a:buNone/>
+            </a:pPr>
+            <a:r>
+              <a:rPr lang="en-US" sz="1500" dirty="0">
+                <a:solidFill>
+                  <a:schemeClr val="bg2"/>
+                </a:solidFill>
+              </a:rPr>
+              <a:t>The ordering rules, in Sinhala and English, available any time.</a:t>
             </a:r>
             <a:endParaRPr lang="en-US" sz="1500" dirty="0"/>
           </a:p>
-          <a:p>
-            <a:pPr indent="0" marL="0">
-              <a:spcAft>
-                <a:spcPts val="400"/>
-              </a:spcAft>
-              <a:buNone/>
-            </a:pPr>
-            <a:r>
-              <a:rPr lang="en-US" sz="1400" dirty="0">
-                <a:solidFill>
-                  <a:schemeClr val="bg2"/>
-                </a:solidFill>
-              </a:rPr>
-              <a:t>Order what you need, waste less</a:t>
-            </a:r>
-            <a:endParaRPr lang="en-US" sz="1500" dirty="0"/>
-          </a:p>
-        </p:txBody>
-      </p:sp>
-      <p:sp>
-        <p:nvSpPr>
-          <p:cNvPr id="14" name="Benefit card 3"/>
+        </p:txBody>
+      </p:sp>
+      <p:sp>
+        <p:nvSpPr>
+          <p:cNvPr id="16" name="Help card Support phone"/>
           <p:cNvSpPr/>
           <p:nvPr/>
         </p:nvSpPr>
         <p:spPr>
           <a:xfrm>
-            <a:off x="6163056" y="1417320"/>
-            <a:ext cx="2587752" cy="2148840"/>
+            <a:off x="6163056" y="1463040"/>
+            <a:ext cx="2587752" cy="3840480"/>
           </a:xfrm>
           <a:prstGeom prst="roundRect">
             <a:avLst>
-              <a:gd name="adj" fmla="val 5106"/>
+              <a:gd name="adj" fmla="val 4240"/>
+            </a:avLst>
+          </a:prstGeom>
+          <a:solidFill>
+            <a:schemeClr val="accent6">
+              <a:alpha val="88000"/>
+            </a:schemeClr>
+          </a:solidFill>
+          <a:ln w="25400">
+            <a:solidFill>
+              <a:schemeClr val="accent1"/>
+            </a:solidFill>
+            <a:prstDash val="solid"/>
+          </a:ln>
+        </p:spPr>
+      </p:sp>
+      <p:sp>
+        <p:nvSpPr>
+          <p:cNvPr id="17" name="Help Support phone circle"/>
+          <p:cNvSpPr/>
+          <p:nvPr/>
+        </p:nvSpPr>
+        <p:spPr>
+          <a:xfrm>
+            <a:off x="6954012" y="1828800"/>
+            <a:ext cx="1005840" cy="1005840"/>
+          </a:xfrm>
+          <a:prstGeom prst="ellipse">
+            <a:avLst/>
+          </a:prstGeom>
+          <a:solidFill>
+            <a:schemeClr val="tx2">
+              <a:alpha val="80000"/>
+            </a:schemeClr>
+          </a:solidFill>
+          <a:ln w="19050">
+            <a:solidFill>
+              <a:schemeClr val="accent1"/>
+            </a:solidFill>
+            <a:prstDash val="solid"/>
+          </a:ln>
+        </p:spPr>
+      </p:sp>
+      <p:pic>
+        <p:nvPicPr>
+          <p:cNvPr id="18" name="Help Support phone icon" descr="preencoded.png">    </p:cNvPr>
+          <p:cNvPicPr>
+            <a:picLocks noChangeAspect="1"/>
+          </p:cNvPicPr>
+          <p:nvPr/>
+        </p:nvPicPr>
+        <p:blipFill>
+          <a:blip r:embed="rId6"/>
+          <a:stretch>
+            <a:fillRect/>
+          </a:stretch>
+        </p:blipFill>
+        <p:spPr>
+          <a:xfrm>
+            <a:off x="7195414" y="2070202"/>
+            <a:ext cx="523037" cy="523037"/>
+          </a:xfrm>
+          <a:prstGeom prst="rect">
+            <a:avLst/>
+          </a:prstGeom>
+        </p:spPr>
+      </p:pic>
+      <p:sp>
+        <p:nvSpPr>
+          <p:cNvPr id="19" name="Text 13"/>
+          <p:cNvSpPr txBox="1"/>
+          <p:nvPr/>
+        </p:nvSpPr>
+        <p:spPr>
+          <a:xfrm>
+            <a:off x="6345936" y="3063240"/>
+            <a:ext cx="2221992" cy="457200"/>
+          </a:xfrm>
+          <a:prstGeom prst="rect">
+            <a:avLst/>
+          </a:prstGeom>
+          <a:noFill/>
+          <a:ln/>
+        </p:spPr>
+        <p:txBody>
+          <a:bodyPr wrap="square" lIns="0" tIns="0" rIns="0" bIns="0" rtlCol="0" anchor="t"/>
+          <a:lstStyle/>
+          <a:p>
+            <a:pPr algn="ctr" indent="0" marL="0">
+              <a:spcAft>
+                <a:spcPts val="400"/>
+              </a:spcAft>
+              <a:buNone/>
+            </a:pPr>
+            <a:r>
+              <a:rPr lang="en-US" sz="1900" b="1" dirty="0">
+                <a:solidFill>
+                  <a:schemeClr val="bg1"/>
+                </a:solidFill>
+              </a:rPr>
+              <a:t>Support phone</a:t>
+            </a:r>
+            <a:endParaRPr lang="en-US" sz="1900" dirty="0"/>
+          </a:p>
+        </p:txBody>
+      </p:sp>
+      <p:sp>
+        <p:nvSpPr>
+          <p:cNvPr id="20" name="Text 14"/>
+          <p:cNvSpPr txBox="1"/>
+          <p:nvPr/>
+        </p:nvSpPr>
+        <p:spPr>
+          <a:xfrm>
+            <a:off x="6391656" y="3611880"/>
+            <a:ext cx="2130552" cy="1554480"/>
+          </a:xfrm>
+          <a:prstGeom prst="rect">
+            <a:avLst/>
+          </a:prstGeom>
+          <a:noFill/>
+          <a:ln/>
+        </p:spPr>
+        <p:txBody>
+          <a:bodyPr wrap="square" lIns="0" tIns="0" rIns="0" bIns="0" rtlCol="0" anchor="t"/>
+          <a:lstStyle/>
+          <a:p>
+            <a:pPr algn="ctr" indent="0" marL="0">
+              <a:spcAft>
+                <a:spcPts val="400"/>
+              </a:spcAft>
+              <a:buNone/>
+            </a:pPr>
+            <a:r>
+              <a:rPr lang="en-US" sz="2200" b="1" dirty="0">
+                <a:solidFill>
+                  <a:schemeClr val="accent1"/>
+                </a:solidFill>
+              </a:rPr>
+              <a:t>076 562 2317</a:t>
+            </a:r>
+            <a:endParaRPr lang="en-US" sz="1500" dirty="0"/>
+          </a:p>
+          <a:p>
+            <a:pPr algn="ctr" indent="0" marL="0">
+              <a:spcAft>
+                <a:spcPts val="400"/>
+              </a:spcAft>
+              <a:buNone/>
+            </a:pPr>
+            <a:r>
+              <a:rPr lang="en-US" sz="1500" dirty="0">
+                <a:solidFill>
+                  <a:schemeClr val="bg2"/>
+                </a:solidFill>
+              </a:rPr>
+              <a:t>Shown in Branch Guidelines; head office can update it.</a:t>
+            </a:r>
+            <a:endParaRPr lang="en-US" sz="1500" dirty="0"/>
+          </a:p>
+        </p:txBody>
+      </p:sp>
+      <p:sp>
+        <p:nvSpPr>
+          <p:cNvPr id="21" name="Help card Training materials"/>
+          <p:cNvSpPr/>
+          <p:nvPr/>
+        </p:nvSpPr>
+        <p:spPr>
+          <a:xfrm>
+            <a:off x="8970264" y="1463040"/>
+            <a:ext cx="2587752" cy="3840480"/>
+          </a:xfrm>
+          <a:prstGeom prst="roundRect">
+            <a:avLst>
+              <a:gd name="adj" fmla="val 4240"/>
             </a:avLst>
           </a:prstGeom>
           <a:solidFill>
@@ -7264,14 +7773,14 @@
       </p:sp>
       <p:sp>
         <p:nvSpPr>
-          <p:cNvPr id="15" name="Benefit 3 circle"/>
+          <p:cNvPr id="22" name="Help Training materials circle"/>
           <p:cNvSpPr/>
           <p:nvPr/>
         </p:nvSpPr>
         <p:spPr>
           <a:xfrm>
-            <a:off x="6391656" y="1645920"/>
-            <a:ext cx="658368" cy="658368"/>
+            <a:off x="9761220" y="1828800"/>
+            <a:ext cx="1005840" cy="1005840"/>
           </a:xfrm>
           <a:prstGeom prst="ellipse">
             <a:avLst/>
@@ -7283,7 +7792,7 @@
           </a:solidFill>
           <a:ln w="19050">
             <a:solidFill>
-              <a:schemeClr val="accent2"/>
+              <a:schemeClr val="accent1"/>
             </a:solidFill>
             <a:prstDash val="solid"/>
           </a:ln>
@@ -7291,143 +7800,7 @@
       </p:sp>
       <p:pic>
         <p:nvPicPr>
-          <p:cNvPr id="16" name="Benefit 3 icon" descr="preencoded.png">    </p:cNvPr>
-          <p:cNvPicPr>
-            <a:picLocks noChangeAspect="1"/>
-          </p:cNvPicPr>
-          <p:nvPr/>
-        </p:nvPicPr>
-        <p:blipFill>
-          <a:blip r:embed="rId6"/>
-          <a:stretch>
-            <a:fillRect/>
-          </a:stretch>
-        </p:blipFill>
-        <p:spPr>
-          <a:xfrm>
-            <a:off x="6549664" y="1803928"/>
-            <a:ext cx="342351" cy="342351"/>
-          </a:xfrm>
-          <a:prstGeom prst="rect">
-            <a:avLst/>
-          </a:prstGeom>
-        </p:spPr>
-      </p:pic>
-      <p:sp>
-        <p:nvSpPr>
-          <p:cNvPr id="17" name="Text 11"/>
-          <p:cNvSpPr txBox="1"/>
-          <p:nvPr/>
-        </p:nvSpPr>
-        <p:spPr>
-          <a:xfrm>
-            <a:off x="6391656" y="2441448"/>
-            <a:ext cx="2176272" cy="1051560"/>
-          </a:xfrm>
-          <a:prstGeom prst="rect">
-            <a:avLst/>
-          </a:prstGeom>
-          <a:noFill/>
-          <a:ln/>
-        </p:spPr>
-        <p:txBody>
-          <a:bodyPr wrap="square" lIns="0" tIns="0" rIns="0" bIns="0" rtlCol="0" anchor="t"/>
-          <a:lstStyle/>
-          <a:p>
-            <a:pPr indent="0" marL="0">
-              <a:spcAft>
-                <a:spcPts val="400"/>
-              </a:spcAft>
-              <a:buNone/>
-            </a:pPr>
-            <a:r>
-              <a:rPr lang="en-US" sz="1600" b="1" dirty="0">
-                <a:solidFill>
-                  <a:schemeClr val="bg1"/>
-                </a:solidFill>
-              </a:rPr>
-              <a:t>Save a draft, submit later</a:t>
-            </a:r>
-            <a:endParaRPr lang="en-US" sz="1500" dirty="0"/>
-          </a:p>
-          <a:p>
-            <a:pPr indent="0" marL="0">
-              <a:spcAft>
-                <a:spcPts val="400"/>
-              </a:spcAft>
-              <a:buNone/>
-            </a:pPr>
-            <a:r>
-              <a:rPr lang="en-US" sz="1400" dirty="0">
-                <a:solidFill>
-                  <a:schemeClr val="bg2"/>
-                </a:solidFill>
-              </a:rPr>
-              <a:t>Order around your busy hours</a:t>
-            </a:r>
-            <a:endParaRPr lang="en-US" sz="1500" dirty="0"/>
-          </a:p>
-        </p:txBody>
-      </p:sp>
-      <p:sp>
-        <p:nvSpPr>
-          <p:cNvPr id="18" name="Benefit card 4"/>
-          <p:cNvSpPr/>
-          <p:nvPr/>
-        </p:nvSpPr>
-        <p:spPr>
-          <a:xfrm>
-            <a:off x="8970264" y="1417320"/>
-            <a:ext cx="2587752" cy="2148840"/>
-          </a:xfrm>
-          <a:prstGeom prst="roundRect">
-            <a:avLst>
-              <a:gd name="adj" fmla="val 5106"/>
-            </a:avLst>
-          </a:prstGeom>
-          <a:solidFill>
-            <a:schemeClr val="accent6">
-              <a:alpha val="88000"/>
-            </a:schemeClr>
-          </a:solidFill>
-          <a:ln w="12700">
-            <a:solidFill>
-              <a:schemeClr val="accent5"/>
-            </a:solidFill>
-            <a:prstDash val="solid"/>
-          </a:ln>
-        </p:spPr>
-      </p:sp>
-      <p:sp>
-        <p:nvSpPr>
-          <p:cNvPr id="19" name="Benefit 4 circle"/>
-          <p:cNvSpPr/>
-          <p:nvPr/>
-        </p:nvSpPr>
-        <p:spPr>
-          <a:xfrm>
-            <a:off x="9198864" y="1645920"/>
-            <a:ext cx="658368" cy="658368"/>
-          </a:xfrm>
-          <a:prstGeom prst="ellipse">
-            <a:avLst/>
-          </a:prstGeom>
-          <a:solidFill>
-            <a:schemeClr val="tx2">
-              <a:alpha val="80000"/>
-            </a:schemeClr>
-          </a:solidFill>
-          <a:ln w="19050">
-            <a:solidFill>
-              <a:schemeClr val="accent2"/>
-            </a:solidFill>
-            <a:prstDash val="solid"/>
-          </a:ln>
-        </p:spPr>
-      </p:sp>
-      <p:pic>
-        <p:nvPicPr>
-          <p:cNvPr id="20" name="Benefit 4 icon" descr="preencoded.png">    </p:cNvPr>
+          <p:cNvPr id="23" name="Help Training materials icon" descr="preencoded.png">    </p:cNvPr>
           <p:cNvPicPr>
             <a:picLocks noChangeAspect="1"/>
           </p:cNvPicPr>
@@ -7441,8 +7814,8 @@
         </p:blipFill>
         <p:spPr>
           <a:xfrm>
-            <a:off x="9356872" y="1803928"/>
-            <a:ext cx="342351" cy="342351"/>
+            <a:off x="10002622" y="2070202"/>
+            <a:ext cx="523037" cy="523037"/>
           </a:xfrm>
           <a:prstGeom prst="rect">
             <a:avLst/>
@@ -7451,14 +7824,14 @@
       </p:pic>
       <p:sp>
         <p:nvSpPr>
-          <p:cNvPr id="21" name="Text 14"/>
+          <p:cNvPr id="24" name="Text 17"/>
           <p:cNvSpPr txBox="1"/>
           <p:nvPr/>
         </p:nvSpPr>
         <p:spPr>
           <a:xfrm>
-            <a:off x="9198864" y="2441448"/>
-            <a:ext cx="2176272" cy="1051560"/>
+            <a:off x="9153144" y="3063240"/>
+            <a:ext cx="2221992" cy="457200"/>
           </a:xfrm>
           <a:prstGeom prst="rect">
             <a:avLst/>
@@ -7470,131 +7843,34 @@
           <a:bodyPr wrap="square" lIns="0" tIns="0" rIns="0" bIns="0" rtlCol="0" anchor="t"/>
           <a:lstStyle/>
           <a:p>
-            <a:pPr indent="0" marL="0">
+            <a:pPr algn="ctr" indent="0" marL="0">
               <a:spcAft>
                 <a:spcPts val="400"/>
               </a:spcAft>
               <a:buNone/>
             </a:pPr>
             <a:r>
-              <a:rPr lang="en-US" sz="1600" b="1" dirty="0">
+              <a:rPr lang="en-US" sz="1900" b="1" dirty="0">
                 <a:solidFill>
                   <a:schemeClr val="bg1"/>
                 </a:solidFill>
               </a:rPr>
-              <a:t>Automatic order if you miss it</a:t>
-            </a:r>
-            <a:endParaRPr lang="en-US" sz="1500" dirty="0"/>
-          </a:p>
-          <a:p>
-            <a:pPr indent="0" marL="0">
-              <a:spcAft>
-                <a:spcPts val="400"/>
-              </a:spcAft>
-              <a:buNone/>
-            </a:pPr>
-            <a:r>
-              <a:rPr lang="en-US" sz="1400" dirty="0">
-                <a:solidFill>
-                  <a:schemeClr val="bg2"/>
-                </a:solidFill>
-              </a:rPr>
-              <a:t>Shelves are never left empty</a:t>
-            </a:r>
-            <a:endParaRPr lang="en-US" sz="1500" dirty="0"/>
-          </a:p>
-        </p:txBody>
-      </p:sp>
-      <p:sp>
-        <p:nvSpPr>
-          <p:cNvPr id="22" name="Benefit card 5"/>
-          <p:cNvSpPr/>
-          <p:nvPr/>
-        </p:nvSpPr>
-        <p:spPr>
-          <a:xfrm>
-            <a:off x="548640" y="3794760"/>
-            <a:ext cx="2587752" cy="2148840"/>
-          </a:xfrm>
-          <a:prstGeom prst="roundRect">
-            <a:avLst>
-              <a:gd name="adj" fmla="val 5106"/>
-            </a:avLst>
-          </a:prstGeom>
-          <a:solidFill>
-            <a:schemeClr val="accent6">
-              <a:alpha val="88000"/>
-            </a:schemeClr>
-          </a:solidFill>
-          <a:ln w="12700">
-            <a:solidFill>
-              <a:schemeClr val="accent5"/>
-            </a:solidFill>
-            <a:prstDash val="solid"/>
-          </a:ln>
-        </p:spPr>
-      </p:sp>
-      <p:sp>
-        <p:nvSpPr>
-          <p:cNvPr id="23" name="Benefit 5 circle"/>
-          <p:cNvSpPr/>
-          <p:nvPr/>
-        </p:nvSpPr>
-        <p:spPr>
-          <a:xfrm>
-            <a:off x="777240" y="4023360"/>
-            <a:ext cx="658368" cy="658368"/>
-          </a:xfrm>
-          <a:prstGeom prst="ellipse">
-            <a:avLst/>
-          </a:prstGeom>
-          <a:solidFill>
-            <a:schemeClr val="tx2">
-              <a:alpha val="80000"/>
-            </a:schemeClr>
-          </a:solidFill>
-          <a:ln w="19050">
-            <a:solidFill>
-              <a:schemeClr val="accent2"/>
-            </a:solidFill>
-            <a:prstDash val="solid"/>
-          </a:ln>
-        </p:spPr>
-      </p:sp>
-      <p:pic>
-        <p:nvPicPr>
-          <p:cNvPr id="24" name="Benefit 5 icon" descr="preencoded.png">    </p:cNvPr>
-          <p:cNvPicPr>
-            <a:picLocks noChangeAspect="1"/>
-          </p:cNvPicPr>
-          <p:nvPr/>
-        </p:nvPicPr>
-        <p:blipFill>
-          <a:blip r:embed="rId8"/>
-          <a:stretch>
-            <a:fillRect/>
-          </a:stretch>
-        </p:blipFill>
-        <p:spPr>
-          <a:xfrm>
-            <a:off x="935248" y="4181368"/>
-            <a:ext cx="342351" cy="342351"/>
-          </a:xfrm>
-          <a:prstGeom prst="rect">
-            <a:avLst/>
-          </a:prstGeom>
-        </p:spPr>
-      </p:pic>
-      <p:sp>
-        <p:nvSpPr>
-          <p:cNvPr id="25" name="Text 17"/>
+              <a:t>Training materials</a:t>
+            </a:r>
+            <a:endParaRPr lang="en-US" sz="1900" dirty="0"/>
+          </a:p>
+        </p:txBody>
+      </p:sp>
+      <p:sp>
+        <p:nvSpPr>
+          <p:cNvPr id="25" name="Text 18"/>
           <p:cNvSpPr txBox="1"/>
           <p:nvPr/>
         </p:nvSpPr>
         <p:spPr>
           <a:xfrm>
-            <a:off x="777240" y="4818888"/>
-            <a:ext cx="2176272" cy="1051560"/>
+            <a:off x="9198864" y="3611880"/>
+            <a:ext cx="2130552" cy="1554480"/>
           </a:xfrm>
           <a:prstGeom prst="rect">
             <a:avLst/>
@@ -7606,444 +7882,19 @@
           <a:bodyPr wrap="square" lIns="0" tIns="0" rIns="0" bIns="0" rtlCol="0" anchor="t"/>
           <a:lstStyle/>
           <a:p>
-            <a:pPr indent="0" marL="0">
+            <a:pPr algn="ctr" indent="0" marL="0">
               <a:spcAft>
                 <a:spcPts val="400"/>
               </a:spcAft>
               <a:buNone/>
             </a:pPr>
             <a:r>
-              <a:rPr lang="en-US" sz="1600" b="1" dirty="0">
-                <a:solidFill>
-                  <a:schemeClr val="bg1"/>
-                </a:solidFill>
-              </a:rPr>
-              <a:t>Live order status</a:t>
-            </a:r>
-            <a:endParaRPr lang="en-US" sz="1500" dirty="0"/>
-          </a:p>
-          <a:p>
-            <a:pPr indent="0" marL="0">
-              <a:spcAft>
-                <a:spcPts val="400"/>
-              </a:spcAft>
-              <a:buNone/>
-            </a:pPr>
-            <a:r>
-              <a:rPr lang="en-US" sz="1400" dirty="0">
+              <a:rPr lang="en-US" sz="1500" dirty="0">
                 <a:solidFill>
                   <a:schemeClr val="bg2"/>
                 </a:solidFill>
               </a:rPr>
-              <a:t>Know where it is without phoning</a:t>
-            </a:r>
-            <a:endParaRPr lang="en-US" sz="1500" dirty="0"/>
-          </a:p>
-        </p:txBody>
-      </p:sp>
-      <p:sp>
-        <p:nvSpPr>
-          <p:cNvPr id="26" name="Benefit card 6"/>
-          <p:cNvSpPr/>
-          <p:nvPr/>
-        </p:nvSpPr>
-        <p:spPr>
-          <a:xfrm>
-            <a:off x="3355848" y="3794760"/>
-            <a:ext cx="2587752" cy="2148840"/>
-          </a:xfrm>
-          <a:prstGeom prst="roundRect">
-            <a:avLst>
-              <a:gd name="adj" fmla="val 5106"/>
-            </a:avLst>
-          </a:prstGeom>
-          <a:solidFill>
-            <a:schemeClr val="accent6">
-              <a:alpha val="88000"/>
-            </a:schemeClr>
-          </a:solidFill>
-          <a:ln w="12700">
-            <a:solidFill>
-              <a:schemeClr val="accent5"/>
-            </a:solidFill>
-            <a:prstDash val="solid"/>
-          </a:ln>
-        </p:spPr>
-      </p:sp>
-      <p:sp>
-        <p:nvSpPr>
-          <p:cNvPr id="27" name="Benefit 6 circle"/>
-          <p:cNvSpPr/>
-          <p:nvPr/>
-        </p:nvSpPr>
-        <p:spPr>
-          <a:xfrm>
-            <a:off x="3584448" y="4023360"/>
-            <a:ext cx="658368" cy="658368"/>
-          </a:xfrm>
-          <a:prstGeom prst="ellipse">
-            <a:avLst/>
-          </a:prstGeom>
-          <a:solidFill>
-            <a:schemeClr val="tx2">
-              <a:alpha val="80000"/>
-            </a:schemeClr>
-          </a:solidFill>
-          <a:ln w="19050">
-            <a:solidFill>
-              <a:schemeClr val="accent2"/>
-            </a:solidFill>
-            <a:prstDash val="solid"/>
-          </a:ln>
-        </p:spPr>
-      </p:sp>
-      <p:pic>
-        <p:nvPicPr>
-          <p:cNvPr id="28" name="Benefit 6 icon" descr="preencoded.png">    </p:cNvPr>
-          <p:cNvPicPr>
-            <a:picLocks noChangeAspect="1"/>
-          </p:cNvPicPr>
-          <p:nvPr/>
-        </p:nvPicPr>
-        <p:blipFill>
-          <a:blip r:embed="rId9"/>
-          <a:stretch>
-            <a:fillRect/>
-          </a:stretch>
-        </p:blipFill>
-        <p:spPr>
-          <a:xfrm>
-            <a:off x="3742456" y="4181368"/>
-            <a:ext cx="342351" cy="342351"/>
-          </a:xfrm>
-          <a:prstGeom prst="rect">
-            <a:avLst/>
-          </a:prstGeom>
-        </p:spPr>
-      </p:pic>
-      <p:sp>
-        <p:nvSpPr>
-          <p:cNvPr id="29" name="Text 20"/>
-          <p:cNvSpPr txBox="1"/>
-          <p:nvPr/>
-        </p:nvSpPr>
-        <p:spPr>
-          <a:xfrm>
-            <a:off x="3584448" y="4818888"/>
-            <a:ext cx="2176272" cy="1051560"/>
-          </a:xfrm>
-          <a:prstGeom prst="rect">
-            <a:avLst/>
-          </a:prstGeom>
-          <a:noFill/>
-          <a:ln/>
-        </p:spPr>
-        <p:txBody>
-          <a:bodyPr wrap="square" lIns="0" tIns="0" rIns="0" bIns="0" rtlCol="0" anchor="t"/>
-          <a:lstStyle/>
-          <a:p>
-            <a:pPr indent="0" marL="0">
-              <a:spcAft>
-                <a:spcPts val="400"/>
-              </a:spcAft>
-              <a:buNone/>
-            </a:pPr>
-            <a:r>
-              <a:rPr lang="en-US" sz="1600" b="1" dirty="0">
-                <a:solidFill>
-                  <a:schemeClr val="bg1"/>
-                </a:solidFill>
-              </a:rPr>
-              <a:t>Record what arrived</a:t>
-            </a:r>
-            <a:endParaRPr lang="en-US" sz="1500" dirty="0"/>
-          </a:p>
-          <a:p>
-            <a:pPr indent="0" marL="0">
-              <a:spcAft>
-                <a:spcPts val="400"/>
-              </a:spcAft>
-              <a:buNone/>
-            </a:pPr>
-            <a:r>
-              <a:rPr lang="en-US" sz="1400" dirty="0">
-                <a:solidFill>
-                  <a:schemeClr val="bg2"/>
-                </a:solidFill>
-              </a:rPr>
-              <a:t>Shortages are on record and followed up</a:t>
-            </a:r>
-            <a:endParaRPr lang="en-US" sz="1500" dirty="0"/>
-          </a:p>
-        </p:txBody>
-      </p:sp>
-      <p:sp>
-        <p:nvSpPr>
-          <p:cNvPr id="30" name="Benefit card 7"/>
-          <p:cNvSpPr/>
-          <p:nvPr/>
-        </p:nvSpPr>
-        <p:spPr>
-          <a:xfrm>
-            <a:off x="6163056" y="3794760"/>
-            <a:ext cx="2587752" cy="2148840"/>
-          </a:xfrm>
-          <a:prstGeom prst="roundRect">
-            <a:avLst>
-              <a:gd name="adj" fmla="val 5106"/>
-            </a:avLst>
-          </a:prstGeom>
-          <a:solidFill>
-            <a:schemeClr val="accent6">
-              <a:alpha val="88000"/>
-            </a:schemeClr>
-          </a:solidFill>
-          <a:ln w="12700">
-            <a:solidFill>
-              <a:schemeClr val="accent5"/>
-            </a:solidFill>
-            <a:prstDash val="solid"/>
-          </a:ln>
-        </p:spPr>
-      </p:sp>
-      <p:sp>
-        <p:nvSpPr>
-          <p:cNvPr id="31" name="Benefit 7 circle"/>
-          <p:cNvSpPr/>
-          <p:nvPr/>
-        </p:nvSpPr>
-        <p:spPr>
-          <a:xfrm>
-            <a:off x="6391656" y="4023360"/>
-            <a:ext cx="658368" cy="658368"/>
-          </a:xfrm>
-          <a:prstGeom prst="ellipse">
-            <a:avLst/>
-          </a:prstGeom>
-          <a:solidFill>
-            <a:schemeClr val="tx2">
-              <a:alpha val="80000"/>
-            </a:schemeClr>
-          </a:solidFill>
-          <a:ln w="19050">
-            <a:solidFill>
-              <a:schemeClr val="accent2"/>
-            </a:solidFill>
-            <a:prstDash val="solid"/>
-          </a:ln>
-        </p:spPr>
-      </p:sp>
-      <p:pic>
-        <p:nvPicPr>
-          <p:cNvPr id="32" name="Benefit 7 icon" descr="preencoded.png">    </p:cNvPr>
-          <p:cNvPicPr>
-            <a:picLocks noChangeAspect="1"/>
-          </p:cNvPicPr>
-          <p:nvPr/>
-        </p:nvPicPr>
-        <p:blipFill>
-          <a:blip r:embed="rId10"/>
-          <a:stretch>
-            <a:fillRect/>
-          </a:stretch>
-        </p:blipFill>
-        <p:spPr>
-          <a:xfrm>
-            <a:off x="6549664" y="4181368"/>
-            <a:ext cx="342351" cy="342351"/>
-          </a:xfrm>
-          <a:prstGeom prst="rect">
-            <a:avLst/>
-          </a:prstGeom>
-        </p:spPr>
-      </p:pic>
-      <p:sp>
-        <p:nvSpPr>
-          <p:cNvPr id="33" name="Text 23"/>
-          <p:cNvSpPr txBox="1"/>
-          <p:nvPr/>
-        </p:nvSpPr>
-        <p:spPr>
-          <a:xfrm>
-            <a:off x="6391656" y="4818888"/>
-            <a:ext cx="2176272" cy="1051560"/>
-          </a:xfrm>
-          <a:prstGeom prst="rect">
-            <a:avLst/>
-          </a:prstGeom>
-          <a:noFill/>
-          <a:ln/>
-        </p:spPr>
-        <p:txBody>
-          <a:bodyPr wrap="square" lIns="0" tIns="0" rIns="0" bIns="0" rtlCol="0" anchor="t"/>
-          <a:lstStyle/>
-          <a:p>
-            <a:pPr indent="0" marL="0">
-              <a:spcAft>
-                <a:spcPts val="400"/>
-              </a:spcAft>
-              <a:buNone/>
-            </a:pPr>
-            <a:r>
-              <a:rPr lang="en-US" sz="1600" b="1" dirty="0">
-                <a:solidFill>
-                  <a:schemeClr val="bg1"/>
-                </a:solidFill>
-              </a:rPr>
-              <a:t>Printable purchase orders</a:t>
-            </a:r>
-            <a:endParaRPr lang="en-US" sz="1500" dirty="0"/>
-          </a:p>
-          <a:p>
-            <a:pPr indent="0" marL="0">
-              <a:spcAft>
-                <a:spcPts val="400"/>
-              </a:spcAft>
-              <a:buNone/>
-            </a:pPr>
-            <a:r>
-              <a:rPr lang="en-US" sz="1400" dirty="0">
-                <a:solidFill>
-                  <a:schemeClr val="bg2"/>
-                </a:solidFill>
-              </a:rPr>
-              <a:t>Check deliveries at the door</a:t>
-            </a:r>
-            <a:endParaRPr lang="en-US" sz="1500" dirty="0"/>
-          </a:p>
-        </p:txBody>
-      </p:sp>
-      <p:sp>
-        <p:nvSpPr>
-          <p:cNvPr id="34" name="Benefit card 8"/>
-          <p:cNvSpPr/>
-          <p:nvPr/>
-        </p:nvSpPr>
-        <p:spPr>
-          <a:xfrm>
-            <a:off x="8970264" y="3794760"/>
-            <a:ext cx="2587752" cy="2148840"/>
-          </a:xfrm>
-          <a:prstGeom prst="roundRect">
-            <a:avLst>
-              <a:gd name="adj" fmla="val 5106"/>
-            </a:avLst>
-          </a:prstGeom>
-          <a:solidFill>
-            <a:schemeClr val="accent6">
-              <a:alpha val="88000"/>
-            </a:schemeClr>
-          </a:solidFill>
-          <a:ln w="12700">
-            <a:solidFill>
-              <a:schemeClr val="accent5"/>
-            </a:solidFill>
-            <a:prstDash val="solid"/>
-          </a:ln>
-        </p:spPr>
-      </p:sp>
-      <p:sp>
-        <p:nvSpPr>
-          <p:cNvPr id="35" name="Benefit 8 circle"/>
-          <p:cNvSpPr/>
-          <p:nvPr/>
-        </p:nvSpPr>
-        <p:spPr>
-          <a:xfrm>
-            <a:off x="9198864" y="4023360"/>
-            <a:ext cx="658368" cy="658368"/>
-          </a:xfrm>
-          <a:prstGeom prst="ellipse">
-            <a:avLst/>
-          </a:prstGeom>
-          <a:solidFill>
-            <a:schemeClr val="tx2">
-              <a:alpha val="80000"/>
-            </a:schemeClr>
-          </a:solidFill>
-          <a:ln w="19050">
-            <a:solidFill>
-              <a:schemeClr val="accent2"/>
-            </a:solidFill>
-            <a:prstDash val="solid"/>
-          </a:ln>
-        </p:spPr>
-      </p:sp>
-      <p:pic>
-        <p:nvPicPr>
-          <p:cNvPr id="36" name="Benefit 8 icon" descr="preencoded.png">    </p:cNvPr>
-          <p:cNvPicPr>
-            <a:picLocks noChangeAspect="1"/>
-          </p:cNvPicPr>
-          <p:nvPr/>
-        </p:nvPicPr>
-        <p:blipFill>
-          <a:blip r:embed="rId11"/>
-          <a:stretch>
-            <a:fillRect/>
-          </a:stretch>
-        </p:blipFill>
-        <p:spPr>
-          <a:xfrm>
-            <a:off x="9356872" y="4181368"/>
-            <a:ext cx="342351" cy="342351"/>
-          </a:xfrm>
-          <a:prstGeom prst="rect">
-            <a:avLst/>
-          </a:prstGeom>
-        </p:spPr>
-      </p:pic>
-      <p:sp>
-        <p:nvSpPr>
-          <p:cNvPr id="37" name="Text 26"/>
-          <p:cNvSpPr txBox="1"/>
-          <p:nvPr/>
-        </p:nvSpPr>
-        <p:spPr>
-          <a:xfrm>
-            <a:off x="9198864" y="4818888"/>
-            <a:ext cx="2176272" cy="1051560"/>
-          </a:xfrm>
-          <a:prstGeom prst="rect">
-            <a:avLst/>
-          </a:prstGeom>
-          <a:noFill/>
-          <a:ln/>
-        </p:spPr>
-        <p:txBody>
-          <a:bodyPr wrap="square" lIns="0" tIns="0" rIns="0" bIns="0" rtlCol="0" anchor="t"/>
-          <a:lstStyle/>
-          <a:p>
-            <a:pPr indent="0" marL="0">
-              <a:spcAft>
-                <a:spcPts val="400"/>
-              </a:spcAft>
-              <a:buNone/>
-            </a:pPr>
-            <a:r>
-              <a:rPr lang="en-US" sz="1600" b="1" dirty="0">
-                <a:solidFill>
-                  <a:schemeClr val="bg1"/>
-                </a:solidFill>
-              </a:rPr>
-              <a:t>Messages tab</a:t>
-            </a:r>
-            <a:endParaRPr lang="en-US" sz="1500" dirty="0"/>
-          </a:p>
-          <a:p>
-            <a:pPr indent="0" marL="0">
-              <a:spcAft>
-                <a:spcPts val="400"/>
-              </a:spcAft>
-              <a:buNone/>
-            </a:pPr>
-            <a:r>
-              <a:rPr lang="en-US" sz="1400" dirty="0">
-                <a:solidFill>
-                  <a:schemeClr val="bg2"/>
-                </a:solidFill>
-              </a:rPr>
-              <a:t>Questions go to head office, in writing</a:t>
+              <a:t>This deck and a quick-reference card: [insert link]</a:t>
             </a:r>
             <a:endParaRPr lang="en-US" sz="1500" dirty="0"/>
           </a:p>
@@ -8217,2056 +8068,6 @@
       </p:pic>
       <p:sp>
         <p:nvSpPr>
-          <p:cNvPr id="3" name="Background dimmer"/>
-          <p:cNvSpPr/>
-          <p:nvPr/>
-        </p:nvSpPr>
-        <p:spPr>
-          <a:xfrm>
-            <a:off x="0" y="0"/>
-            <a:ext cx="12191695" cy="6858000"/>
-          </a:xfrm>
-          <a:prstGeom prst="rect">
-            <a:avLst/>
-          </a:prstGeom>
-          <a:solidFill>
-            <a:schemeClr val="tx2">
-              <a:alpha val="70000"/>
-            </a:schemeClr>
-          </a:solidFill>
-          <a:ln/>
-        </p:spPr>
-      </p:sp>
-      <p:sp>
-        <p:nvSpPr>
-          <p:cNvPr id="4" name="Footer"/>
-          <p:cNvSpPr txBox="1"/>
-          <p:nvPr/>
-        </p:nvSpPr>
-        <p:spPr>
-          <a:xfrm>
-            <a:off x="548640" y="6382512"/>
-            <a:ext cx="5943600" cy="274320"/>
-          </a:xfrm>
-          <a:prstGeom prst="rect">
-            <a:avLst/>
-          </a:prstGeom>
-          <a:noFill/>
-          <a:ln/>
-        </p:spPr>
-        <p:txBody>
-          <a:bodyPr wrap="square" lIns="0" tIns="0" rIns="0" bIns="0" rtlCol="0" anchor="ctr"/>
-          <a:lstStyle/>
-          <a:p>
-            <a:pPr indent="0" marL="0">
-              <a:buNone/>
-            </a:pPr>
-            <a:r>
-              <a:rPr lang="en-US" sz="1100" dirty="0">
-                <a:solidFill>
-                  <a:schemeClr val="bg2"/>
-                </a:solidFill>
-              </a:rPr>
-              <a:t>SPAR Sri Lanka  ·  Fresh Procurement  ·  Branch User Training</a:t>
-            </a:r>
-            <a:endParaRPr lang="en-US" sz="1100" dirty="0"/>
-          </a:p>
-        </p:txBody>
-      </p:sp>
-      <p:sp>
-        <p:nvSpPr>
-          <p:cNvPr id="5" name="Text 0"/>
-          <p:cNvSpPr/>
-          <p:nvPr>
-            <p:ph idx="100" type="title" hasCustomPrompt="1"/>
-          </p:nvPr>
-        </p:nvSpPr>
-        <p:spPr>
-          <a:xfrm>
-            <a:off x="548640" y="365760"/>
-            <a:ext cx="11094415" cy="731520"/>
-          </a:xfrm>
-          <a:prstGeom prst="rect">
-            <a:avLst/>
-          </a:prstGeom>
-          <a:noFill/>
-          <a:ln/>
-        </p:spPr>
-        <p:txBody>
-          <a:bodyPr wrap="square" lIns="0" tIns="0" rIns="0" bIns="0" rtlCol="0" anchor="ctr"/>
-          <a:lstStyle/>
-          <a:p>
-            <a:pPr algn="l" indent="0" marL="0">
-              <a:buNone/>
-            </a:pPr>
-            <a:r>
-              <a:rPr lang="en-US" sz="3400" b="1" dirty="0">
-                <a:solidFill>
-                  <a:schemeClr val="bg1"/>
-                </a:solidFill>
-              </a:rPr>
-              <a:t>Getting started: how to log in</a:t>
-            </a:r>
-            <a:endParaRPr lang="en-US" sz="3400" dirty="0"/>
-          </a:p>
-        </p:txBody>
-      </p:sp>
-      <p:sp>
-        <p:nvSpPr>
-          <p:cNvPr id="6" name="Login step 1"/>
-          <p:cNvSpPr/>
-          <p:nvPr/>
-        </p:nvSpPr>
-        <p:spPr>
-          <a:xfrm>
-            <a:off x="548640" y="1417320"/>
-            <a:ext cx="6675120" cy="841248"/>
-          </a:xfrm>
-          <a:prstGeom prst="roundRect">
-            <a:avLst>
-              <a:gd name="adj" fmla="val 13043"/>
-            </a:avLst>
-          </a:prstGeom>
-          <a:solidFill>
-            <a:schemeClr val="accent6">
-              <a:alpha val="88000"/>
-            </a:schemeClr>
-          </a:solidFill>
-          <a:ln w="12700">
-            <a:solidFill>
-              <a:schemeClr val="accent5"/>
-            </a:solidFill>
-            <a:prstDash val="solid"/>
-          </a:ln>
-        </p:spPr>
-      </p:sp>
-      <p:sp>
-        <p:nvSpPr>
-          <p:cNvPr id="7" name="Text 4"/>
-          <p:cNvSpPr txBox="1"/>
-          <p:nvPr/>
-        </p:nvSpPr>
-        <p:spPr>
-          <a:xfrm>
-            <a:off x="731520" y="1417320"/>
-            <a:ext cx="548640" cy="841248"/>
-          </a:xfrm>
-          <a:prstGeom prst="rect">
-            <a:avLst/>
-          </a:prstGeom>
-          <a:noFill/>
-          <a:ln/>
-        </p:spPr>
-        <p:txBody>
-          <a:bodyPr wrap="square" lIns="0" tIns="0" rIns="0" bIns="0" rtlCol="0" anchor="ctr"/>
-          <a:lstStyle/>
-          <a:p>
-            <a:pPr algn="ctr" indent="0" marL="0">
-              <a:spcAft>
-                <a:spcPts val="400"/>
-              </a:spcAft>
-              <a:buNone/>
-            </a:pPr>
-            <a:r>
-              <a:rPr lang="en-US" sz="3000" b="1" dirty="0">
-                <a:solidFill>
-                  <a:schemeClr val="accent1"/>
-                </a:solidFill>
-              </a:rPr>
-              <a:t>1</a:t>
-            </a:r>
-            <a:endParaRPr lang="en-US" sz="3000" dirty="0"/>
-          </a:p>
-        </p:txBody>
-      </p:sp>
-      <p:sp>
-        <p:nvSpPr>
-          <p:cNvPr id="8" name="Text 5"/>
-          <p:cNvSpPr txBox="1"/>
-          <p:nvPr/>
-        </p:nvSpPr>
-        <p:spPr>
-          <a:xfrm>
-            <a:off x="1463040" y="1417320"/>
-            <a:ext cx="5577840" cy="841248"/>
-          </a:xfrm>
-          <a:prstGeom prst="rect">
-            <a:avLst/>
-          </a:prstGeom>
-          <a:noFill/>
-          <a:ln/>
-        </p:spPr>
-        <p:txBody>
-          <a:bodyPr wrap="square" lIns="0" tIns="0" rIns="0" bIns="0" rtlCol="0" anchor="ctr"/>
-          <a:lstStyle/>
-          <a:p>
-            <a:pPr indent="0" marL="0">
-              <a:spcAft>
-                <a:spcPts val="200"/>
-              </a:spcAft>
-              <a:buNone/>
-            </a:pPr>
-            <a:r>
-              <a:rPr lang="en-US" sz="1700" b="1" dirty="0">
-                <a:solidFill>
-                  <a:schemeClr val="bg1"/>
-                </a:solidFill>
-              </a:rPr>
-              <a:t>Open the system in your browser</a:t>
-            </a:r>
-            <a:endParaRPr lang="en-US" sz="1500" dirty="0"/>
-          </a:p>
-          <a:p>
-            <a:pPr indent="0" marL="0">
-              <a:spcAft>
-                <a:spcPts val="200"/>
-              </a:spcAft>
-              <a:buNone/>
-            </a:pPr>
-            <a:r>
-              <a:rPr lang="en-US" sz="1400" dirty="0">
-                <a:solidFill>
-                  <a:schemeClr val="bg2"/>
-                </a:solidFill>
-              </a:rPr>
-              <a:t>[insert live URL]</a:t>
-            </a:r>
-            <a:endParaRPr lang="en-US" sz="1500" dirty="0"/>
-          </a:p>
-        </p:txBody>
-      </p:sp>
-      <p:sp>
-        <p:nvSpPr>
-          <p:cNvPr id="9" name="Login step 2"/>
-          <p:cNvSpPr/>
-          <p:nvPr/>
-        </p:nvSpPr>
-        <p:spPr>
-          <a:xfrm>
-            <a:off x="548640" y="2423160"/>
-            <a:ext cx="6675120" cy="841248"/>
-          </a:xfrm>
-          <a:prstGeom prst="roundRect">
-            <a:avLst>
-              <a:gd name="adj" fmla="val 13043"/>
-            </a:avLst>
-          </a:prstGeom>
-          <a:solidFill>
-            <a:schemeClr val="accent6">
-              <a:alpha val="88000"/>
-            </a:schemeClr>
-          </a:solidFill>
-          <a:ln w="12700">
-            <a:solidFill>
-              <a:schemeClr val="accent5"/>
-            </a:solidFill>
-            <a:prstDash val="solid"/>
-          </a:ln>
-        </p:spPr>
-      </p:sp>
-      <p:sp>
-        <p:nvSpPr>
-          <p:cNvPr id="10" name="Text 7"/>
-          <p:cNvSpPr txBox="1"/>
-          <p:nvPr/>
-        </p:nvSpPr>
-        <p:spPr>
-          <a:xfrm>
-            <a:off x="731520" y="2423160"/>
-            <a:ext cx="548640" cy="841248"/>
-          </a:xfrm>
-          <a:prstGeom prst="rect">
-            <a:avLst/>
-          </a:prstGeom>
-          <a:noFill/>
-          <a:ln/>
-        </p:spPr>
-        <p:txBody>
-          <a:bodyPr wrap="square" lIns="0" tIns="0" rIns="0" bIns="0" rtlCol="0" anchor="ctr"/>
-          <a:lstStyle/>
-          <a:p>
-            <a:pPr algn="ctr" indent="0" marL="0">
-              <a:spcAft>
-                <a:spcPts val="400"/>
-              </a:spcAft>
-              <a:buNone/>
-            </a:pPr>
-            <a:r>
-              <a:rPr lang="en-US" sz="3000" b="1" dirty="0">
-                <a:solidFill>
-                  <a:schemeClr val="accent1"/>
-                </a:solidFill>
-              </a:rPr>
-              <a:t>2</a:t>
-            </a:r>
-            <a:endParaRPr lang="en-US" sz="3000" dirty="0"/>
-          </a:p>
-        </p:txBody>
-      </p:sp>
-      <p:sp>
-        <p:nvSpPr>
-          <p:cNvPr id="11" name="Text 8"/>
-          <p:cNvSpPr txBox="1"/>
-          <p:nvPr/>
-        </p:nvSpPr>
-        <p:spPr>
-          <a:xfrm>
-            <a:off x="1463040" y="2423160"/>
-            <a:ext cx="5577840" cy="841248"/>
-          </a:xfrm>
-          <a:prstGeom prst="rect">
-            <a:avLst/>
-          </a:prstGeom>
-          <a:noFill/>
-          <a:ln/>
-        </p:spPr>
-        <p:txBody>
-          <a:bodyPr wrap="square" lIns="0" tIns="0" rIns="0" bIns="0" rtlCol="0" anchor="ctr"/>
-          <a:lstStyle/>
-          <a:p>
-            <a:pPr indent="0" marL="0">
-              <a:spcAft>
-                <a:spcPts val="200"/>
-              </a:spcAft>
-              <a:buNone/>
-            </a:pPr>
-            <a:r>
-              <a:rPr lang="en-US" sz="1700" b="1" dirty="0">
-                <a:solidFill>
-                  <a:schemeClr val="bg1"/>
-                </a:solidFill>
-              </a:rPr>
-              <a:t>Enter your branch username</a:t>
-            </a:r>
-            <a:endParaRPr lang="en-US" sz="1500" dirty="0"/>
-          </a:p>
-          <a:p>
-            <a:pPr indent="0" marL="0">
-              <a:spcAft>
-                <a:spcPts val="200"/>
-              </a:spcAft>
-              <a:buNone/>
-            </a:pPr>
-            <a:r>
-              <a:rPr lang="en-US" sz="1400" dirty="0">
-                <a:solidFill>
-                  <a:schemeClr val="bg2"/>
-                </a:solidFill>
-              </a:rPr>
-              <a:t>e.g. br01, plus the starting password from head office</a:t>
-            </a:r>
-            <a:endParaRPr lang="en-US" sz="1500" dirty="0"/>
-          </a:p>
-        </p:txBody>
-      </p:sp>
-      <p:sp>
-        <p:nvSpPr>
-          <p:cNvPr id="12" name="Login step 3"/>
-          <p:cNvSpPr/>
-          <p:nvPr/>
-        </p:nvSpPr>
-        <p:spPr>
-          <a:xfrm>
-            <a:off x="548640" y="3429000"/>
-            <a:ext cx="6675120" cy="841248"/>
-          </a:xfrm>
-          <a:prstGeom prst="roundRect">
-            <a:avLst>
-              <a:gd name="adj" fmla="val 13043"/>
-            </a:avLst>
-          </a:prstGeom>
-          <a:solidFill>
-            <a:schemeClr val="accent6">
-              <a:alpha val="88000"/>
-            </a:schemeClr>
-          </a:solidFill>
-          <a:ln w="12700">
-            <a:solidFill>
-              <a:schemeClr val="accent5"/>
-            </a:solidFill>
-            <a:prstDash val="solid"/>
-          </a:ln>
-        </p:spPr>
-      </p:sp>
-      <p:sp>
-        <p:nvSpPr>
-          <p:cNvPr id="13" name="Text 10"/>
-          <p:cNvSpPr txBox="1"/>
-          <p:nvPr/>
-        </p:nvSpPr>
-        <p:spPr>
-          <a:xfrm>
-            <a:off x="731520" y="3429000"/>
-            <a:ext cx="548640" cy="841248"/>
-          </a:xfrm>
-          <a:prstGeom prst="rect">
-            <a:avLst/>
-          </a:prstGeom>
-          <a:noFill/>
-          <a:ln/>
-        </p:spPr>
-        <p:txBody>
-          <a:bodyPr wrap="square" lIns="0" tIns="0" rIns="0" bIns="0" rtlCol="0" anchor="ctr"/>
-          <a:lstStyle/>
-          <a:p>
-            <a:pPr algn="ctr" indent="0" marL="0">
-              <a:spcAft>
-                <a:spcPts val="400"/>
-              </a:spcAft>
-              <a:buNone/>
-            </a:pPr>
-            <a:r>
-              <a:rPr lang="en-US" sz="3000" b="1" dirty="0">
-                <a:solidFill>
-                  <a:schemeClr val="accent1"/>
-                </a:solidFill>
-              </a:rPr>
-              <a:t>3</a:t>
-            </a:r>
-            <a:endParaRPr lang="en-US" sz="3000" dirty="0"/>
-          </a:p>
-        </p:txBody>
-      </p:sp>
-      <p:sp>
-        <p:nvSpPr>
-          <p:cNvPr id="14" name="Text 11"/>
-          <p:cNvSpPr txBox="1"/>
-          <p:nvPr/>
-        </p:nvSpPr>
-        <p:spPr>
-          <a:xfrm>
-            <a:off x="1463040" y="3429000"/>
-            <a:ext cx="5577840" cy="841248"/>
-          </a:xfrm>
-          <a:prstGeom prst="rect">
-            <a:avLst/>
-          </a:prstGeom>
-          <a:noFill/>
-          <a:ln/>
-        </p:spPr>
-        <p:txBody>
-          <a:bodyPr wrap="square" lIns="0" tIns="0" rIns="0" bIns="0" rtlCol="0" anchor="ctr"/>
-          <a:lstStyle/>
-          <a:p>
-            <a:pPr indent="0" marL="0">
-              <a:spcAft>
-                <a:spcPts val="200"/>
-              </a:spcAft>
-              <a:buNone/>
-            </a:pPr>
-            <a:r>
-              <a:rPr lang="en-US" sz="1700" b="1" dirty="0">
-                <a:solidFill>
-                  <a:schemeClr val="bg1"/>
-                </a:solidFill>
-              </a:rPr>
-              <a:t>Choose your own password</a:t>
-            </a:r>
-            <a:endParaRPr lang="en-US" sz="1500" dirty="0"/>
-          </a:p>
-          <a:p>
-            <a:pPr indent="0" marL="0">
-              <a:spcAft>
-                <a:spcPts val="200"/>
-              </a:spcAft>
-              <a:buNone/>
-            </a:pPr>
-            <a:r>
-              <a:rPr lang="en-US" sz="1400" dirty="0">
-                <a:solidFill>
-                  <a:schemeClr val="bg2"/>
-                </a:solidFill>
-              </a:rPr>
-              <a:t>Required at first sign-in before you can continue</a:t>
-            </a:r>
-            <a:endParaRPr lang="en-US" sz="1500" dirty="0"/>
-          </a:p>
-        </p:txBody>
-      </p:sp>
-      <p:sp>
-        <p:nvSpPr>
-          <p:cNvPr id="15" name="Login step 4"/>
-          <p:cNvSpPr/>
-          <p:nvPr/>
-        </p:nvSpPr>
-        <p:spPr>
-          <a:xfrm>
-            <a:off x="548640" y="4434840"/>
-            <a:ext cx="6675120" cy="841248"/>
-          </a:xfrm>
-          <a:prstGeom prst="roundRect">
-            <a:avLst>
-              <a:gd name="adj" fmla="val 13043"/>
-            </a:avLst>
-          </a:prstGeom>
-          <a:solidFill>
-            <a:schemeClr val="accent6">
-              <a:alpha val="88000"/>
-            </a:schemeClr>
-          </a:solidFill>
-          <a:ln w="12700">
-            <a:solidFill>
-              <a:schemeClr val="accent5"/>
-            </a:solidFill>
-            <a:prstDash val="solid"/>
-          </a:ln>
-        </p:spPr>
-      </p:sp>
-      <p:sp>
-        <p:nvSpPr>
-          <p:cNvPr id="16" name="Text 13"/>
-          <p:cNvSpPr txBox="1"/>
-          <p:nvPr/>
-        </p:nvSpPr>
-        <p:spPr>
-          <a:xfrm>
-            <a:off x="731520" y="4434840"/>
-            <a:ext cx="548640" cy="841248"/>
-          </a:xfrm>
-          <a:prstGeom prst="rect">
-            <a:avLst/>
-          </a:prstGeom>
-          <a:noFill/>
-          <a:ln/>
-        </p:spPr>
-        <p:txBody>
-          <a:bodyPr wrap="square" lIns="0" tIns="0" rIns="0" bIns="0" rtlCol="0" anchor="ctr"/>
-          <a:lstStyle/>
-          <a:p>
-            <a:pPr algn="ctr" indent="0" marL="0">
-              <a:spcAft>
-                <a:spcPts val="400"/>
-              </a:spcAft>
-              <a:buNone/>
-            </a:pPr>
-            <a:r>
-              <a:rPr lang="en-US" sz="3000" b="1" dirty="0">
-                <a:solidFill>
-                  <a:schemeClr val="accent1"/>
-                </a:solidFill>
-              </a:rPr>
-              <a:t>4</a:t>
-            </a:r>
-            <a:endParaRPr lang="en-US" sz="3000" dirty="0"/>
-          </a:p>
-        </p:txBody>
-      </p:sp>
-      <p:sp>
-        <p:nvSpPr>
-          <p:cNvPr id="17" name="Text 14"/>
-          <p:cNvSpPr txBox="1"/>
-          <p:nvPr/>
-        </p:nvSpPr>
-        <p:spPr>
-          <a:xfrm>
-            <a:off x="1463040" y="4434840"/>
-            <a:ext cx="5577840" cy="841248"/>
-          </a:xfrm>
-          <a:prstGeom prst="rect">
-            <a:avLst/>
-          </a:prstGeom>
-          <a:noFill/>
-          <a:ln/>
-        </p:spPr>
-        <p:txBody>
-          <a:bodyPr wrap="square" lIns="0" tIns="0" rIns="0" bIns="0" rtlCol="0" anchor="ctr"/>
-          <a:lstStyle/>
-          <a:p>
-            <a:pPr indent="0" marL="0">
-              <a:spcAft>
-                <a:spcPts val="200"/>
-              </a:spcAft>
-              <a:buNone/>
-            </a:pPr>
-            <a:r>
-              <a:rPr lang="en-US" sz="1700" b="1" dirty="0">
-                <a:solidFill>
-                  <a:schemeClr val="bg1"/>
-                </a:solidFill>
-              </a:rPr>
-              <a:t>Keep it within your team</a:t>
-            </a:r>
-            <a:endParaRPr lang="en-US" sz="1500" dirty="0"/>
-          </a:p>
-          <a:p>
-            <a:pPr indent="0" marL="0">
-              <a:spcAft>
-                <a:spcPts val="200"/>
-              </a:spcAft>
-              <a:buNone/>
-            </a:pPr>
-            <a:r>
-              <a:rPr lang="en-US" sz="1400" dirty="0">
-                <a:solidFill>
-                  <a:schemeClr val="bg2"/>
-                </a:solidFill>
-              </a:rPr>
-              <a:t>Share it only with your branch team</a:t>
-            </a:r>
-            <a:endParaRPr lang="en-US" sz="1500" dirty="0"/>
-          </a:p>
-        </p:txBody>
-      </p:sp>
-      <p:sp>
-        <p:nvSpPr>
-          <p:cNvPr id="18" name="Lockout card"/>
-          <p:cNvSpPr/>
-          <p:nvPr/>
-        </p:nvSpPr>
-        <p:spPr>
-          <a:xfrm>
-            <a:off x="7589520" y="1417320"/>
-            <a:ext cx="4053535" cy="3858768"/>
-          </a:xfrm>
-          <a:prstGeom prst="roundRect">
-            <a:avLst>
-              <a:gd name="adj" fmla="val 2844"/>
-            </a:avLst>
-          </a:prstGeom>
-          <a:solidFill>
-            <a:schemeClr val="accent6">
-              <a:alpha val="88000"/>
-            </a:schemeClr>
-          </a:solidFill>
-          <a:ln w="12700">
-            <a:solidFill>
-              <a:schemeClr val="accent4"/>
-            </a:solidFill>
-            <a:prstDash val="solid"/>
-          </a:ln>
-        </p:spPr>
-      </p:sp>
-      <p:sp>
-        <p:nvSpPr>
-          <p:cNvPr id="19" name="Lockout circle"/>
-          <p:cNvSpPr/>
-          <p:nvPr/>
-        </p:nvSpPr>
-        <p:spPr>
-          <a:xfrm>
-            <a:off x="9159088" y="1691640"/>
-            <a:ext cx="914400" cy="914400"/>
-          </a:xfrm>
-          <a:prstGeom prst="ellipse">
-            <a:avLst/>
-          </a:prstGeom>
-          <a:solidFill>
-            <a:schemeClr val="tx2">
-              <a:alpha val="80000"/>
-            </a:schemeClr>
-          </a:solidFill>
-          <a:ln w="19050">
-            <a:solidFill>
-              <a:schemeClr val="accent4"/>
-            </a:solidFill>
-            <a:prstDash val="solid"/>
-          </a:ln>
-        </p:spPr>
-      </p:sp>
-      <p:pic>
-        <p:nvPicPr>
-          <p:cNvPr id="20" name="Lockout icon" descr="preencoded.png">    </p:cNvPr>
-          <p:cNvPicPr>
-            <a:picLocks noChangeAspect="1"/>
-          </p:cNvPicPr>
-          <p:nvPr/>
-        </p:nvPicPr>
-        <p:blipFill>
-          <a:blip r:embed="rId4"/>
-          <a:stretch>
-            <a:fillRect/>
-          </a:stretch>
-        </p:blipFill>
-        <p:spPr>
-          <a:xfrm>
-            <a:off x="9378544" y="1911096"/>
-            <a:ext cx="475488" cy="475488"/>
-          </a:xfrm>
-          <a:prstGeom prst="rect">
-            <a:avLst/>
-          </a:prstGeom>
-        </p:spPr>
-      </p:pic>
-      <p:sp>
-        <p:nvSpPr>
-          <p:cNvPr id="21" name="Text 17"/>
-          <p:cNvSpPr txBox="1"/>
-          <p:nvPr/>
-        </p:nvSpPr>
-        <p:spPr>
-          <a:xfrm>
-            <a:off x="7589520" y="2697480"/>
-            <a:ext cx="2026768" cy="914400"/>
-          </a:xfrm>
-          <a:prstGeom prst="rect">
-            <a:avLst/>
-          </a:prstGeom>
-          <a:noFill/>
-          <a:ln/>
-        </p:spPr>
-        <p:txBody>
-          <a:bodyPr wrap="square" lIns="0" tIns="0" rIns="0" bIns="0" rtlCol="0" anchor="ctr"/>
-          <a:lstStyle/>
-          <a:p>
-            <a:pPr algn="ctr" indent="0" marL="0">
-              <a:spcAft>
-                <a:spcPts val="400"/>
-              </a:spcAft>
-              <a:buNone/>
-            </a:pPr>
-            <a:r>
-              <a:rPr lang="en-US" sz="6000" b="1" dirty="0">
-                <a:solidFill>
-                  <a:schemeClr val="accent4"/>
-                </a:solidFill>
-              </a:rPr>
-              <a:t>5</a:t>
-            </a:r>
-            <a:endParaRPr lang="en-US" sz="6000" dirty="0"/>
-          </a:p>
-        </p:txBody>
-      </p:sp>
-      <p:sp>
-        <p:nvSpPr>
-          <p:cNvPr id="22" name="Text 18"/>
-          <p:cNvSpPr txBox="1"/>
-          <p:nvPr/>
-        </p:nvSpPr>
-        <p:spPr>
-          <a:xfrm>
-            <a:off x="9616288" y="2697480"/>
-            <a:ext cx="2026768" cy="914400"/>
-          </a:xfrm>
-          <a:prstGeom prst="rect">
-            <a:avLst/>
-          </a:prstGeom>
-          <a:noFill/>
-          <a:ln/>
-        </p:spPr>
-        <p:txBody>
-          <a:bodyPr wrap="square" lIns="0" tIns="0" rIns="0" bIns="0" rtlCol="0" anchor="ctr"/>
-          <a:lstStyle/>
-          <a:p>
-            <a:pPr algn="ctr" indent="0" marL="0">
-              <a:spcAft>
-                <a:spcPts val="400"/>
-              </a:spcAft>
-              <a:buNone/>
-            </a:pPr>
-            <a:r>
-              <a:rPr lang="en-US" sz="6000" b="1" dirty="0">
-                <a:solidFill>
-                  <a:schemeClr val="accent4"/>
-                </a:solidFill>
-              </a:rPr>
-              <a:t>15</a:t>
-            </a:r>
-            <a:endParaRPr lang="en-US" sz="6000" dirty="0"/>
-          </a:p>
-        </p:txBody>
-      </p:sp>
-      <p:sp>
-        <p:nvSpPr>
-          <p:cNvPr id="23" name="Text 19"/>
-          <p:cNvSpPr txBox="1"/>
-          <p:nvPr/>
-        </p:nvSpPr>
-        <p:spPr>
-          <a:xfrm>
-            <a:off x="7589520" y="3611880"/>
-            <a:ext cx="2026768" cy="320040"/>
-          </a:xfrm>
-          <a:prstGeom prst="rect">
-            <a:avLst/>
-          </a:prstGeom>
-          <a:noFill/>
-          <a:ln/>
-        </p:spPr>
-        <p:txBody>
-          <a:bodyPr wrap="square" lIns="0" tIns="0" rIns="0" bIns="0" rtlCol="0" anchor="t"/>
-          <a:lstStyle/>
-          <a:p>
-            <a:pPr algn="ctr" indent="0" marL="0">
-              <a:spcAft>
-                <a:spcPts val="400"/>
-              </a:spcAft>
-              <a:buNone/>
-            </a:pPr>
-            <a:r>
-              <a:rPr lang="en-US" sz="1400" dirty="0">
-                <a:solidFill>
-                  <a:schemeClr val="bg2"/>
-                </a:solidFill>
-              </a:rPr>
-              <a:t>wrong passwords</a:t>
-            </a:r>
-            <a:endParaRPr lang="en-US" sz="1400" dirty="0"/>
-          </a:p>
-        </p:txBody>
-      </p:sp>
-      <p:sp>
-        <p:nvSpPr>
-          <p:cNvPr id="24" name="Text 20"/>
-          <p:cNvSpPr txBox="1"/>
-          <p:nvPr/>
-        </p:nvSpPr>
-        <p:spPr>
-          <a:xfrm>
-            <a:off x="9616288" y="3611880"/>
-            <a:ext cx="2026768" cy="320040"/>
-          </a:xfrm>
-          <a:prstGeom prst="rect">
-            <a:avLst/>
-          </a:prstGeom>
-          <a:noFill/>
-          <a:ln/>
-        </p:spPr>
-        <p:txBody>
-          <a:bodyPr wrap="square" lIns="0" tIns="0" rIns="0" bIns="0" rtlCol="0" anchor="t"/>
-          <a:lstStyle/>
-          <a:p>
-            <a:pPr algn="ctr" indent="0" marL="0">
-              <a:spcAft>
-                <a:spcPts val="400"/>
-              </a:spcAft>
-              <a:buNone/>
-            </a:pPr>
-            <a:r>
-              <a:rPr lang="en-US" sz="1400" dirty="0">
-                <a:solidFill>
-                  <a:schemeClr val="bg2"/>
-                </a:solidFill>
-              </a:rPr>
-              <a:t>minutes locked</a:t>
-            </a:r>
-            <a:endParaRPr lang="en-US" sz="1400" dirty="0"/>
-          </a:p>
-        </p:txBody>
-      </p:sp>
-      <p:sp>
-        <p:nvSpPr>
-          <p:cNvPr id="25" name="Text 21"/>
-          <p:cNvSpPr txBox="1"/>
-          <p:nvPr/>
-        </p:nvSpPr>
-        <p:spPr>
-          <a:xfrm>
-            <a:off x="7863840" y="4206240"/>
-            <a:ext cx="3504895" cy="731520"/>
-          </a:xfrm>
-          <a:prstGeom prst="rect">
-            <a:avLst/>
-          </a:prstGeom>
-          <a:noFill/>
-          <a:ln/>
-        </p:spPr>
-        <p:txBody>
-          <a:bodyPr wrap="square" lIns="0" tIns="0" rIns="0" bIns="0" rtlCol="0" anchor="ctr"/>
-          <a:lstStyle/>
-          <a:p>
-            <a:pPr algn="ctr" indent="0" marL="0">
-              <a:spcAft>
-                <a:spcPts val="400"/>
-              </a:spcAft>
-              <a:buNone/>
-            </a:pPr>
-            <a:r>
-              <a:rPr lang="en-US" sz="1600" dirty="0">
-                <a:solidFill>
-                  <a:schemeClr val="bg1"/>
-                </a:solidFill>
-              </a:rPr>
-              <a:t>Wait it out, or call support.</a:t>
-            </a:r>
-            <a:endParaRPr lang="en-US" sz="1600" dirty="0"/>
-          </a:p>
-        </p:txBody>
-      </p:sp>
-      <p:sp>
-        <p:nvSpPr>
-          <p:cNvPr id="26" name="Benefit pill"/>
-          <p:cNvSpPr/>
-          <p:nvPr/>
-        </p:nvSpPr>
-        <p:spPr>
-          <a:xfrm>
-            <a:off x="548640" y="5596128"/>
-            <a:ext cx="11094415" cy="566928"/>
-          </a:xfrm>
-          <a:prstGeom prst="roundRect">
-            <a:avLst>
-              <a:gd name="adj" fmla="val 19355"/>
-            </a:avLst>
-          </a:prstGeom>
-          <a:solidFill>
-            <a:schemeClr val="accent2">
-              <a:alpha val="28000"/>
-            </a:schemeClr>
-          </a:solidFill>
-          <a:ln w="12700">
-            <a:solidFill>
-              <a:schemeClr val="accent2"/>
-            </a:solidFill>
-            <a:prstDash val="solid"/>
-          </a:ln>
-        </p:spPr>
-      </p:sp>
-      <p:pic>
-        <p:nvPicPr>
-          <p:cNvPr id="27" name="Benefit icon" descr="preencoded.png">    </p:cNvPr>
-          <p:cNvPicPr>
-            <a:picLocks noChangeAspect="1"/>
-          </p:cNvPicPr>
-          <p:nvPr/>
-        </p:nvPicPr>
-        <p:blipFill>
-          <a:blip r:embed="rId5"/>
-          <a:stretch>
-            <a:fillRect/>
-          </a:stretch>
-        </p:blipFill>
-        <p:spPr>
-          <a:xfrm>
-            <a:off x="749808" y="5733288"/>
-            <a:ext cx="292608" cy="292608"/>
-          </a:xfrm>
-          <a:prstGeom prst="rect">
-            <a:avLst/>
-          </a:prstGeom>
-        </p:spPr>
-      </p:pic>
-      <p:sp>
-        <p:nvSpPr>
-          <p:cNvPr id="28" name="Text 23"/>
-          <p:cNvSpPr txBox="1"/>
-          <p:nvPr/>
-        </p:nvSpPr>
-        <p:spPr>
-          <a:xfrm>
-            <a:off x="1188720" y="5596128"/>
-            <a:ext cx="10271455" cy="566928"/>
-          </a:xfrm>
-          <a:prstGeom prst="rect">
-            <a:avLst/>
-          </a:prstGeom>
-          <a:noFill/>
-          <a:ln/>
-        </p:spPr>
-        <p:txBody>
-          <a:bodyPr wrap="square" lIns="0" tIns="0" rIns="0" bIns="0" rtlCol="0" anchor="ctr"/>
-          <a:lstStyle/>
-          <a:p>
-            <a:pPr indent="0" marL="0">
-              <a:spcAft>
-                <a:spcPts val="400"/>
-              </a:spcAft>
-              <a:buNone/>
-            </a:pPr>
-            <a:r>
-              <a:rPr lang="en-US" sz="1600" b="1" dirty="0">
-                <a:solidFill>
-                  <a:schemeClr val="accent2"/>
-                </a:solidFill>
-              </a:rPr>
-              <a:t>Benefit:  </a:t>
-            </a:r>
-            <a:pPr indent="0" marL="0">
-              <a:spcAft>
-                <a:spcPts val="400"/>
-              </a:spcAft>
-              <a:buNone/>
-            </a:pPr>
-            <a:r>
-              <a:rPr lang="en-US" sz="1600" dirty="0">
-                <a:solidFill>
-                  <a:schemeClr val="bg1"/>
-                </a:solidFill>
-              </a:rPr>
-              <a:t>Your own password keeps your branch's orders safe.</a:t>
-            </a:r>
-            <a:endParaRPr lang="en-US" sz="1600" dirty="0"/>
-          </a:p>
-        </p:txBody>
-      </p:sp>
-      <p:sp>
-        <p:nvSpPr>
-          <p:cNvPr id="25" name="Slide Number Placeholder 0"/>
-          <p:cNvSpPr>
-            <a:spLocks noGrp="1"/>
-          </p:cNvSpPr>
-          <p:nvPr>
-            <p:ph type="sldNum" sz="quarter" idx="4294967295"/>
-          </p:nvPr>
-        </p:nvSpPr>
-        <p:spPr>
-          <a:xfrm>
-            <a:off x="11094415" y="6382512"/>
-            <a:ext cx="548640" cy="274320"/>
-          </a:xfrm>
-          <a:prstGeom prst="rect">
-            <a:avLst/>
-          </a:prstGeom>
-          <a:extLst>
-            <a:ext uri="{C572A759-6A51-4108-AA02-DFA0A04FC94B}">
-              <ma14:wrappingTextBoxFlag xmlns:ma14="http://schemas.microsoft.com/office/mac/drawingml/2011/main" val="0"/>
-            </a:ext>
-          </a:extLst>
-        </p:spPr>
-        <p:txBody>
-          <a:bodyPr/>
-          <a:lstStyle>
-            <a:lvl1pPr>
-              <a:defRPr sz="1100">
-                <a:solidFill>
-                  <a:srgbClr val="BFE6EC"/>
-                </a:solidFill>
-              </a:defRPr>
-            </a:lvl1pPr>
-          </a:lstStyle>
-          <a:p>
-            <a:pPr algn="r"/>
-            <a:fld id="{F7021451-1387-4CA6-816F-3879F97B5CBC}" type="slidenum">
-              <a:rPr b="0" lang="en-US"/>
-              <a:t>15</a:t>
-            </a:fld>
-            <a:endParaRPr lang="en-US"/>
-          </a:p>
-        </p:txBody>
-      </p:sp>
-    </p:spTree>
-  </p:cSld>
-  <p:clrMapOvr>
-    <a:masterClrMapping/>
-  </p:clrMapOvr>
-  <p:transition spd="med">
-    <p:fade/>
-  </p:transition>
-  <p:timing>
-    <p:tnLst>
-      <p:par>
-        <p:cTn id="1" dur="indefinite" restart="never" nodeType="tmRoot">
-          <p:childTnLst>
-            <p:par>
-              <p:cTn id="2" fill="hold">
-                <p:stCondLst>
-                  <p:cond delay="indefinite"/>
-                  <p:cond evt="onBegin" delay="0">
-                    <p:tn val="2"/>
-                  </p:cond>
-                </p:stCondLst>
-                <p:childTnLst>
-                  <p:par>
-                    <p:cTn id="3" fill="hold">
-                      <p:stCondLst>
-                        <p:cond delay="0"/>
-                      </p:stCondLst>
-                      <p:childTnLst>
-                        <p:par>
-                          <p:cTn id="4" presetID="1" presetClass="mediacall" presetSubtype="0" fill="hold" nodeType="afterEffect">
-                            <p:stCondLst>
-                              <p:cond delay="0"/>
-                            </p:stCondLst>
-                            <p:childTnLst>
-                              <p:cmd type="call" cmd="playFrom(0.0)">
-                                <p:cBhvr>
-                                  <p:cTn id="5" dur="8000" fill="hold"/>
-                                  <p:tgtEl>
-                                    <p:spTgt spid="3"/>
-                                  </p:tgtEl>
-                                </p:cBhvr>
-                              </p:cmd>
-                            </p:childTnLst>
-                          </p:cTn>
-                        </p:par>
-                      </p:childTnLst>
-                    </p:cTn>
-                  </p:par>
-                </p:childTnLst>
-              </p:cTn>
-            </p:par>
-            <p:video>
-              <p:cMediaNode vol="0" mute="1">
-                <p:cTn id="6" repeatCount="indefinite" fill="hold" display="0">
-                  <p:stCondLst>
-                    <p:cond delay="indefinite"/>
-                  </p:stCondLst>
-                </p:cTn>
-                <p:tgtEl>
-                  <p:spTgt spid="3"/>
-                </p:tgtEl>
-              </p:cMediaNode>
-            </p:video>
-          </p:childTnLst>
-        </p:cTn>
-      </p:par>
-    </p:tnLst>
-  </p:timing>
-</p:sld>
-</file>
-
-<file path=ppt/slides/slide16.xml><?xml version="1.0" encoding="utf-8"?>
-<p:sld xmlns:a="http://schemas.openxmlformats.org/drawingml/2006/main" xmlns:r="http://schemas.openxmlformats.org/officeDocument/2006/relationships" xmlns:p="http://schemas.openxmlformats.org/presentationml/2006/main">
-  <p:cSld name="Slide 16">
-    <p:spTree>
-      <p:nvGrpSpPr>
-        <p:cNvPr id="1" name=""/>
-        <p:cNvGrpSpPr/>
-        <p:nvPr/>
-      </p:nvGrpSpPr>
-      <p:grpSpPr>
-        <a:xfrm>
-          <a:off x="0" y="0"/>
-          <a:ext cx="0" cy="0"/>
-          <a:chOff x="0" y="0"/>
-          <a:chExt cx="0" cy="0"/>
-        </a:xfrm>
-      </p:grpSpPr>
-      <p:pic>
-        <p:nvPicPr>
-          <p:cNvPr id="3" name="Animated background">
-            <a:hlinkClick r:id="" action="ppaction://media"/>
-          </p:cNvPr>
-          <p:cNvPicPr>
-            <a:picLocks noChangeAspect="1"/>
-          </p:cNvPicPr>
-          <p:nvPr>
-            <a:videoFile r:link="rId1"/>
-            <p:extLst>
-              <p:ext uri="{DAA4B4D4-6D71-4841-9C94-3DE7FCFB9230}">
-                <p14:media xmlns:p14="http://schemas.microsoft.com/office/powerpoint/2010/main" r:embed="rId2"/>
-              </p:ext>
-            </p:extLst>
-          </p:nvPr>
-        </p:nvPicPr>
-        <p:blipFill>
-          <a:blip r:embed="rId3"/>
-          <a:stretch>
-            <a:fillRect/>
-          </a:stretch>
-        </p:blipFill>
-        <p:spPr>
-          <a:xfrm>
-            <a:off x="0" y="0"/>
-            <a:ext cx="12191695" cy="6858000"/>
-          </a:xfrm>
-          <a:prstGeom prst="rect">
-            <a:avLst/>
-          </a:prstGeom>
-        </p:spPr>
-      </p:pic>
-      <p:sp>
-        <p:nvSpPr>
-          <p:cNvPr id="3" name="Background dimmer"/>
-          <p:cNvSpPr/>
-          <p:nvPr/>
-        </p:nvSpPr>
-        <p:spPr>
-          <a:xfrm>
-            <a:off x="0" y="0"/>
-            <a:ext cx="12191695" cy="6858000"/>
-          </a:xfrm>
-          <a:prstGeom prst="rect">
-            <a:avLst/>
-          </a:prstGeom>
-          <a:solidFill>
-            <a:schemeClr val="tx2">
-              <a:alpha val="70000"/>
-            </a:schemeClr>
-          </a:solidFill>
-          <a:ln/>
-        </p:spPr>
-      </p:sp>
-      <p:sp>
-        <p:nvSpPr>
-          <p:cNvPr id="4" name="Footer"/>
-          <p:cNvSpPr txBox="1"/>
-          <p:nvPr/>
-        </p:nvSpPr>
-        <p:spPr>
-          <a:xfrm>
-            <a:off x="548640" y="6382512"/>
-            <a:ext cx="5943600" cy="274320"/>
-          </a:xfrm>
-          <a:prstGeom prst="rect">
-            <a:avLst/>
-          </a:prstGeom>
-          <a:noFill/>
-          <a:ln/>
-        </p:spPr>
-        <p:txBody>
-          <a:bodyPr wrap="square" lIns="0" tIns="0" rIns="0" bIns="0" rtlCol="0" anchor="ctr"/>
-          <a:lstStyle/>
-          <a:p>
-            <a:pPr indent="0" marL="0">
-              <a:buNone/>
-            </a:pPr>
-            <a:r>
-              <a:rPr lang="en-US" sz="1100" dirty="0">
-                <a:solidFill>
-                  <a:schemeClr val="bg2"/>
-                </a:solidFill>
-              </a:rPr>
-              <a:t>SPAR Sri Lanka  ·  Fresh Procurement  ·  Branch User Training</a:t>
-            </a:r>
-            <a:endParaRPr lang="en-US" sz="1100" dirty="0"/>
-          </a:p>
-        </p:txBody>
-      </p:sp>
-      <p:sp>
-        <p:nvSpPr>
-          <p:cNvPr id="5" name="Text 0"/>
-          <p:cNvSpPr/>
-          <p:nvPr>
-            <p:ph idx="100" type="title" hasCustomPrompt="1"/>
-          </p:nvPr>
-        </p:nvSpPr>
-        <p:spPr>
-          <a:xfrm>
-            <a:off x="548640" y="365760"/>
-            <a:ext cx="11094415" cy="731520"/>
-          </a:xfrm>
-          <a:prstGeom prst="rect">
-            <a:avLst/>
-          </a:prstGeom>
-          <a:noFill/>
-          <a:ln/>
-        </p:spPr>
-        <p:txBody>
-          <a:bodyPr wrap="square" lIns="0" tIns="0" rIns="0" bIns="0" rtlCol="0" anchor="ctr"/>
-          <a:lstStyle/>
-          <a:p>
-            <a:pPr algn="l" indent="0" marL="0">
-              <a:buNone/>
-            </a:pPr>
-            <a:r>
-              <a:rPr lang="en-US" sz="3400" b="1" dirty="0">
-                <a:solidFill>
-                  <a:schemeClr val="bg1"/>
-                </a:solidFill>
-              </a:rPr>
-              <a:t>Where to get help</a:t>
-            </a:r>
-            <a:endParaRPr lang="en-US" sz="3400" dirty="0"/>
-          </a:p>
-        </p:txBody>
-      </p:sp>
-      <p:sp>
-        <p:nvSpPr>
-          <p:cNvPr id="6" name="Help card Messages tab"/>
-          <p:cNvSpPr/>
-          <p:nvPr/>
-        </p:nvSpPr>
-        <p:spPr>
-          <a:xfrm>
-            <a:off x="548640" y="1463040"/>
-            <a:ext cx="2587752" cy="3840480"/>
-          </a:xfrm>
-          <a:prstGeom prst="roundRect">
-            <a:avLst>
-              <a:gd name="adj" fmla="val 4240"/>
-            </a:avLst>
-          </a:prstGeom>
-          <a:solidFill>
-            <a:schemeClr val="accent6">
-              <a:alpha val="88000"/>
-            </a:schemeClr>
-          </a:solidFill>
-          <a:ln w="12700">
-            <a:solidFill>
-              <a:schemeClr val="accent5"/>
-            </a:solidFill>
-            <a:prstDash val="solid"/>
-          </a:ln>
-        </p:spPr>
-      </p:sp>
-      <p:sp>
-        <p:nvSpPr>
-          <p:cNvPr id="7" name="Help Messages tab circle"/>
-          <p:cNvSpPr/>
-          <p:nvPr/>
-        </p:nvSpPr>
-        <p:spPr>
-          <a:xfrm>
-            <a:off x="1339596" y="1828800"/>
-            <a:ext cx="1005840" cy="1005840"/>
-          </a:xfrm>
-          <a:prstGeom prst="ellipse">
-            <a:avLst/>
-          </a:prstGeom>
-          <a:solidFill>
-            <a:schemeClr val="tx2">
-              <a:alpha val="80000"/>
-            </a:schemeClr>
-          </a:solidFill>
-          <a:ln w="19050">
-            <a:solidFill>
-              <a:schemeClr val="accent1"/>
-            </a:solidFill>
-            <a:prstDash val="solid"/>
-          </a:ln>
-        </p:spPr>
-      </p:sp>
-      <p:pic>
-        <p:nvPicPr>
-          <p:cNvPr id="8" name="Help Messages tab icon" descr="preencoded.png">    </p:cNvPr>
-          <p:cNvPicPr>
-            <a:picLocks noChangeAspect="1"/>
-          </p:cNvPicPr>
-          <p:nvPr/>
-        </p:nvPicPr>
-        <p:blipFill>
-          <a:blip r:embed="rId4"/>
-          <a:stretch>
-            <a:fillRect/>
-          </a:stretch>
-        </p:blipFill>
-        <p:spPr>
-          <a:xfrm>
-            <a:off x="1580998" y="2070202"/>
-            <a:ext cx="523037" cy="523037"/>
-          </a:xfrm>
-          <a:prstGeom prst="rect">
-            <a:avLst/>
-          </a:prstGeom>
-        </p:spPr>
-      </p:pic>
-      <p:sp>
-        <p:nvSpPr>
-          <p:cNvPr id="9" name="Text 5"/>
-          <p:cNvSpPr txBox="1"/>
-          <p:nvPr/>
-        </p:nvSpPr>
-        <p:spPr>
-          <a:xfrm>
-            <a:off x="731520" y="3063240"/>
-            <a:ext cx="2221992" cy="457200"/>
-          </a:xfrm>
-          <a:prstGeom prst="rect">
-            <a:avLst/>
-          </a:prstGeom>
-          <a:noFill/>
-          <a:ln/>
-        </p:spPr>
-        <p:txBody>
-          <a:bodyPr wrap="square" lIns="0" tIns="0" rIns="0" bIns="0" rtlCol="0" anchor="t"/>
-          <a:lstStyle/>
-          <a:p>
-            <a:pPr algn="ctr" indent="0" marL="0">
-              <a:spcAft>
-                <a:spcPts val="400"/>
-              </a:spcAft>
-              <a:buNone/>
-            </a:pPr>
-            <a:r>
-              <a:rPr lang="en-US" sz="1900" b="1" dirty="0">
-                <a:solidFill>
-                  <a:schemeClr val="bg1"/>
-                </a:solidFill>
-              </a:rPr>
-              <a:t>Messages tab</a:t>
-            </a:r>
-            <a:endParaRPr lang="en-US" sz="1900" dirty="0"/>
-          </a:p>
-        </p:txBody>
-      </p:sp>
-      <p:sp>
-        <p:nvSpPr>
-          <p:cNvPr id="10" name="Text 6"/>
-          <p:cNvSpPr txBox="1"/>
-          <p:nvPr/>
-        </p:nvSpPr>
-        <p:spPr>
-          <a:xfrm>
-            <a:off x="777240" y="3611880"/>
-            <a:ext cx="2130552" cy="1554480"/>
-          </a:xfrm>
-          <a:prstGeom prst="rect">
-            <a:avLst/>
-          </a:prstGeom>
-          <a:noFill/>
-          <a:ln/>
-        </p:spPr>
-        <p:txBody>
-          <a:bodyPr wrap="square" lIns="0" tIns="0" rIns="0" bIns="0" rtlCol="0" anchor="t"/>
-          <a:lstStyle/>
-          <a:p>
-            <a:pPr algn="ctr" indent="0" marL="0">
-              <a:spcAft>
-                <a:spcPts val="400"/>
-              </a:spcAft>
-              <a:buNone/>
-            </a:pPr>
-            <a:r>
-              <a:rPr lang="en-US" sz="1500" dirty="0">
-                <a:solidFill>
-                  <a:schemeClr val="bg2"/>
-                </a:solidFill>
-              </a:rPr>
-              <a:t>Chat with head office inside the system. A red badge on the bell shows unread replies.</a:t>
-            </a:r>
-            <a:endParaRPr lang="en-US" sz="1500" dirty="0"/>
-          </a:p>
-        </p:txBody>
-      </p:sp>
-      <p:sp>
-        <p:nvSpPr>
-          <p:cNvPr id="11" name="Help card Branch Guidelines"/>
-          <p:cNvSpPr/>
-          <p:nvPr/>
-        </p:nvSpPr>
-        <p:spPr>
-          <a:xfrm>
-            <a:off x="3355848" y="1463040"/>
-            <a:ext cx="2587752" cy="3840480"/>
-          </a:xfrm>
-          <a:prstGeom prst="roundRect">
-            <a:avLst>
-              <a:gd name="adj" fmla="val 4240"/>
-            </a:avLst>
-          </a:prstGeom>
-          <a:solidFill>
-            <a:schemeClr val="accent6">
-              <a:alpha val="88000"/>
-            </a:schemeClr>
-          </a:solidFill>
-          <a:ln w="12700">
-            <a:solidFill>
-              <a:schemeClr val="accent5"/>
-            </a:solidFill>
-            <a:prstDash val="solid"/>
-          </a:ln>
-        </p:spPr>
-      </p:sp>
-      <p:sp>
-        <p:nvSpPr>
-          <p:cNvPr id="12" name="Help Branch Guidelines circle"/>
-          <p:cNvSpPr/>
-          <p:nvPr/>
-        </p:nvSpPr>
-        <p:spPr>
-          <a:xfrm>
-            <a:off x="4146804" y="1828800"/>
-            <a:ext cx="1005840" cy="1005840"/>
-          </a:xfrm>
-          <a:prstGeom prst="ellipse">
-            <a:avLst/>
-          </a:prstGeom>
-          <a:solidFill>
-            <a:schemeClr val="tx2">
-              <a:alpha val="80000"/>
-            </a:schemeClr>
-          </a:solidFill>
-          <a:ln w="19050">
-            <a:solidFill>
-              <a:schemeClr val="accent1"/>
-            </a:solidFill>
-            <a:prstDash val="solid"/>
-          </a:ln>
-        </p:spPr>
-      </p:sp>
-      <p:pic>
-        <p:nvPicPr>
-          <p:cNvPr id="13" name="Help Branch Guidelines icon" descr="preencoded.png">    </p:cNvPr>
-          <p:cNvPicPr>
-            <a:picLocks noChangeAspect="1"/>
-          </p:cNvPicPr>
-          <p:nvPr/>
-        </p:nvPicPr>
-        <p:blipFill>
-          <a:blip r:embed="rId5"/>
-          <a:stretch>
-            <a:fillRect/>
-          </a:stretch>
-        </p:blipFill>
-        <p:spPr>
-          <a:xfrm>
-            <a:off x="4388206" y="2070202"/>
-            <a:ext cx="523037" cy="523037"/>
-          </a:xfrm>
-          <a:prstGeom prst="rect">
-            <a:avLst/>
-          </a:prstGeom>
-        </p:spPr>
-      </p:pic>
-      <p:sp>
-        <p:nvSpPr>
-          <p:cNvPr id="14" name="Text 9"/>
-          <p:cNvSpPr txBox="1"/>
-          <p:nvPr/>
-        </p:nvSpPr>
-        <p:spPr>
-          <a:xfrm>
-            <a:off x="3538728" y="3063240"/>
-            <a:ext cx="2221992" cy="457200"/>
-          </a:xfrm>
-          <a:prstGeom prst="rect">
-            <a:avLst/>
-          </a:prstGeom>
-          <a:noFill/>
-          <a:ln/>
-        </p:spPr>
-        <p:txBody>
-          <a:bodyPr wrap="square" lIns="0" tIns="0" rIns="0" bIns="0" rtlCol="0" anchor="t"/>
-          <a:lstStyle/>
-          <a:p>
-            <a:pPr algn="ctr" indent="0" marL="0">
-              <a:spcAft>
-                <a:spcPts val="400"/>
-              </a:spcAft>
-              <a:buNone/>
-            </a:pPr>
-            <a:r>
-              <a:rPr lang="en-US" sz="1900" b="1" dirty="0">
-                <a:solidFill>
-                  <a:schemeClr val="bg1"/>
-                </a:solidFill>
-              </a:rPr>
-              <a:t>Branch Guidelines</a:t>
-            </a:r>
-            <a:endParaRPr lang="en-US" sz="1900" dirty="0"/>
-          </a:p>
-        </p:txBody>
-      </p:sp>
-      <p:sp>
-        <p:nvSpPr>
-          <p:cNvPr id="15" name="Text 10"/>
-          <p:cNvSpPr txBox="1"/>
-          <p:nvPr/>
-        </p:nvSpPr>
-        <p:spPr>
-          <a:xfrm>
-            <a:off x="3584448" y="3611880"/>
-            <a:ext cx="2130552" cy="1554480"/>
-          </a:xfrm>
-          <a:prstGeom prst="rect">
-            <a:avLst/>
-          </a:prstGeom>
-          <a:noFill/>
-          <a:ln/>
-        </p:spPr>
-        <p:txBody>
-          <a:bodyPr wrap="square" lIns="0" tIns="0" rIns="0" bIns="0" rtlCol="0" anchor="t"/>
-          <a:lstStyle/>
-          <a:p>
-            <a:pPr algn="ctr" indent="0" marL="0">
-              <a:spcAft>
-                <a:spcPts val="400"/>
-              </a:spcAft>
-              <a:buNone/>
-            </a:pPr>
-            <a:r>
-              <a:rPr lang="en-US" sz="1500" dirty="0">
-                <a:solidFill>
-                  <a:schemeClr val="bg2"/>
-                </a:solidFill>
-              </a:rPr>
-              <a:t>The ordering rules, in Sinhala and English, available any time.</a:t>
-            </a:r>
-            <a:endParaRPr lang="en-US" sz="1500" dirty="0"/>
-          </a:p>
-        </p:txBody>
-      </p:sp>
-      <p:sp>
-        <p:nvSpPr>
-          <p:cNvPr id="16" name="Help card Support phone"/>
-          <p:cNvSpPr/>
-          <p:nvPr/>
-        </p:nvSpPr>
-        <p:spPr>
-          <a:xfrm>
-            <a:off x="6163056" y="1463040"/>
-            <a:ext cx="2587752" cy="3840480"/>
-          </a:xfrm>
-          <a:prstGeom prst="roundRect">
-            <a:avLst>
-              <a:gd name="adj" fmla="val 4240"/>
-            </a:avLst>
-          </a:prstGeom>
-          <a:solidFill>
-            <a:schemeClr val="accent6">
-              <a:alpha val="88000"/>
-            </a:schemeClr>
-          </a:solidFill>
-          <a:ln w="25400">
-            <a:solidFill>
-              <a:schemeClr val="accent1"/>
-            </a:solidFill>
-            <a:prstDash val="solid"/>
-          </a:ln>
-        </p:spPr>
-      </p:sp>
-      <p:sp>
-        <p:nvSpPr>
-          <p:cNvPr id="17" name="Help Support phone circle"/>
-          <p:cNvSpPr/>
-          <p:nvPr/>
-        </p:nvSpPr>
-        <p:spPr>
-          <a:xfrm>
-            <a:off x="6954012" y="1828800"/>
-            <a:ext cx="1005840" cy="1005840"/>
-          </a:xfrm>
-          <a:prstGeom prst="ellipse">
-            <a:avLst/>
-          </a:prstGeom>
-          <a:solidFill>
-            <a:schemeClr val="tx2">
-              <a:alpha val="80000"/>
-            </a:schemeClr>
-          </a:solidFill>
-          <a:ln w="19050">
-            <a:solidFill>
-              <a:schemeClr val="accent1"/>
-            </a:solidFill>
-            <a:prstDash val="solid"/>
-          </a:ln>
-        </p:spPr>
-      </p:sp>
-      <p:pic>
-        <p:nvPicPr>
-          <p:cNvPr id="18" name="Help Support phone icon" descr="preencoded.png">    </p:cNvPr>
-          <p:cNvPicPr>
-            <a:picLocks noChangeAspect="1"/>
-          </p:cNvPicPr>
-          <p:nvPr/>
-        </p:nvPicPr>
-        <p:blipFill>
-          <a:blip r:embed="rId6"/>
-          <a:stretch>
-            <a:fillRect/>
-          </a:stretch>
-        </p:blipFill>
-        <p:spPr>
-          <a:xfrm>
-            <a:off x="7195414" y="2070202"/>
-            <a:ext cx="523037" cy="523037"/>
-          </a:xfrm>
-          <a:prstGeom prst="rect">
-            <a:avLst/>
-          </a:prstGeom>
-        </p:spPr>
-      </p:pic>
-      <p:sp>
-        <p:nvSpPr>
-          <p:cNvPr id="19" name="Text 13"/>
-          <p:cNvSpPr txBox="1"/>
-          <p:nvPr/>
-        </p:nvSpPr>
-        <p:spPr>
-          <a:xfrm>
-            <a:off x="6345936" y="3063240"/>
-            <a:ext cx="2221992" cy="457200"/>
-          </a:xfrm>
-          <a:prstGeom prst="rect">
-            <a:avLst/>
-          </a:prstGeom>
-          <a:noFill/>
-          <a:ln/>
-        </p:spPr>
-        <p:txBody>
-          <a:bodyPr wrap="square" lIns="0" tIns="0" rIns="0" bIns="0" rtlCol="0" anchor="t"/>
-          <a:lstStyle/>
-          <a:p>
-            <a:pPr algn="ctr" indent="0" marL="0">
-              <a:spcAft>
-                <a:spcPts val="400"/>
-              </a:spcAft>
-              <a:buNone/>
-            </a:pPr>
-            <a:r>
-              <a:rPr lang="en-US" sz="1900" b="1" dirty="0">
-                <a:solidFill>
-                  <a:schemeClr val="bg1"/>
-                </a:solidFill>
-              </a:rPr>
-              <a:t>Support phone</a:t>
-            </a:r>
-            <a:endParaRPr lang="en-US" sz="1900" dirty="0"/>
-          </a:p>
-        </p:txBody>
-      </p:sp>
-      <p:sp>
-        <p:nvSpPr>
-          <p:cNvPr id="20" name="Text 14"/>
-          <p:cNvSpPr txBox="1"/>
-          <p:nvPr/>
-        </p:nvSpPr>
-        <p:spPr>
-          <a:xfrm>
-            <a:off x="6391656" y="3611880"/>
-            <a:ext cx="2130552" cy="1554480"/>
-          </a:xfrm>
-          <a:prstGeom prst="rect">
-            <a:avLst/>
-          </a:prstGeom>
-          <a:noFill/>
-          <a:ln/>
-        </p:spPr>
-        <p:txBody>
-          <a:bodyPr wrap="square" lIns="0" tIns="0" rIns="0" bIns="0" rtlCol="0" anchor="t"/>
-          <a:lstStyle/>
-          <a:p>
-            <a:pPr algn="ctr" indent="0" marL="0">
-              <a:spcAft>
-                <a:spcPts val="400"/>
-              </a:spcAft>
-              <a:buNone/>
-            </a:pPr>
-            <a:r>
-              <a:rPr lang="en-US" sz="2200" b="1" dirty="0">
-                <a:solidFill>
-                  <a:schemeClr val="accent1"/>
-                </a:solidFill>
-              </a:rPr>
-              <a:t>076 562 2317</a:t>
-            </a:r>
-            <a:endParaRPr lang="en-US" sz="1500" dirty="0"/>
-          </a:p>
-          <a:p>
-            <a:pPr algn="ctr" indent="0" marL="0">
-              <a:spcAft>
-                <a:spcPts val="400"/>
-              </a:spcAft>
-              <a:buNone/>
-            </a:pPr>
-            <a:r>
-              <a:rPr lang="en-US" sz="1500" dirty="0">
-                <a:solidFill>
-                  <a:schemeClr val="bg2"/>
-                </a:solidFill>
-              </a:rPr>
-              <a:t>Shown in Branch Guidelines; head office can update it.</a:t>
-            </a:r>
-            <a:endParaRPr lang="en-US" sz="1500" dirty="0"/>
-          </a:p>
-        </p:txBody>
-      </p:sp>
-      <p:sp>
-        <p:nvSpPr>
-          <p:cNvPr id="21" name="Help card Training materials"/>
-          <p:cNvSpPr/>
-          <p:nvPr/>
-        </p:nvSpPr>
-        <p:spPr>
-          <a:xfrm>
-            <a:off x="8970264" y="1463040"/>
-            <a:ext cx="2587752" cy="3840480"/>
-          </a:xfrm>
-          <a:prstGeom prst="roundRect">
-            <a:avLst>
-              <a:gd name="adj" fmla="val 4240"/>
-            </a:avLst>
-          </a:prstGeom>
-          <a:solidFill>
-            <a:schemeClr val="accent6">
-              <a:alpha val="88000"/>
-            </a:schemeClr>
-          </a:solidFill>
-          <a:ln w="12700">
-            <a:solidFill>
-              <a:schemeClr val="accent5"/>
-            </a:solidFill>
-            <a:prstDash val="solid"/>
-          </a:ln>
-        </p:spPr>
-      </p:sp>
-      <p:sp>
-        <p:nvSpPr>
-          <p:cNvPr id="22" name="Help Training materials circle"/>
-          <p:cNvSpPr/>
-          <p:nvPr/>
-        </p:nvSpPr>
-        <p:spPr>
-          <a:xfrm>
-            <a:off x="9761220" y="1828800"/>
-            <a:ext cx="1005840" cy="1005840"/>
-          </a:xfrm>
-          <a:prstGeom prst="ellipse">
-            <a:avLst/>
-          </a:prstGeom>
-          <a:solidFill>
-            <a:schemeClr val="tx2">
-              <a:alpha val="80000"/>
-            </a:schemeClr>
-          </a:solidFill>
-          <a:ln w="19050">
-            <a:solidFill>
-              <a:schemeClr val="accent1"/>
-            </a:solidFill>
-            <a:prstDash val="solid"/>
-          </a:ln>
-        </p:spPr>
-      </p:sp>
-      <p:pic>
-        <p:nvPicPr>
-          <p:cNvPr id="23" name="Help Training materials icon" descr="preencoded.png">    </p:cNvPr>
-          <p:cNvPicPr>
-            <a:picLocks noChangeAspect="1"/>
-          </p:cNvPicPr>
-          <p:nvPr/>
-        </p:nvPicPr>
-        <p:blipFill>
-          <a:blip r:embed="rId7"/>
-          <a:stretch>
-            <a:fillRect/>
-          </a:stretch>
-        </p:blipFill>
-        <p:spPr>
-          <a:xfrm>
-            <a:off x="10002622" y="2070202"/>
-            <a:ext cx="523037" cy="523037"/>
-          </a:xfrm>
-          <a:prstGeom prst="rect">
-            <a:avLst/>
-          </a:prstGeom>
-        </p:spPr>
-      </p:pic>
-      <p:sp>
-        <p:nvSpPr>
-          <p:cNvPr id="24" name="Text 17"/>
-          <p:cNvSpPr txBox="1"/>
-          <p:nvPr/>
-        </p:nvSpPr>
-        <p:spPr>
-          <a:xfrm>
-            <a:off x="9153144" y="3063240"/>
-            <a:ext cx="2221992" cy="457200"/>
-          </a:xfrm>
-          <a:prstGeom prst="rect">
-            <a:avLst/>
-          </a:prstGeom>
-          <a:noFill/>
-          <a:ln/>
-        </p:spPr>
-        <p:txBody>
-          <a:bodyPr wrap="square" lIns="0" tIns="0" rIns="0" bIns="0" rtlCol="0" anchor="t"/>
-          <a:lstStyle/>
-          <a:p>
-            <a:pPr algn="ctr" indent="0" marL="0">
-              <a:spcAft>
-                <a:spcPts val="400"/>
-              </a:spcAft>
-              <a:buNone/>
-            </a:pPr>
-            <a:r>
-              <a:rPr lang="en-US" sz="1900" b="1" dirty="0">
-                <a:solidFill>
-                  <a:schemeClr val="bg1"/>
-                </a:solidFill>
-              </a:rPr>
-              <a:t>Training materials</a:t>
-            </a:r>
-            <a:endParaRPr lang="en-US" sz="1900" dirty="0"/>
-          </a:p>
-        </p:txBody>
-      </p:sp>
-      <p:sp>
-        <p:nvSpPr>
-          <p:cNvPr id="25" name="Text 18"/>
-          <p:cNvSpPr txBox="1"/>
-          <p:nvPr/>
-        </p:nvSpPr>
-        <p:spPr>
-          <a:xfrm>
-            <a:off x="9198864" y="3611880"/>
-            <a:ext cx="2130552" cy="1554480"/>
-          </a:xfrm>
-          <a:prstGeom prst="rect">
-            <a:avLst/>
-          </a:prstGeom>
-          <a:noFill/>
-          <a:ln/>
-        </p:spPr>
-        <p:txBody>
-          <a:bodyPr wrap="square" lIns="0" tIns="0" rIns="0" bIns="0" rtlCol="0" anchor="t"/>
-          <a:lstStyle/>
-          <a:p>
-            <a:pPr algn="ctr" indent="0" marL="0">
-              <a:spcAft>
-                <a:spcPts val="400"/>
-              </a:spcAft>
-              <a:buNone/>
-            </a:pPr>
-            <a:r>
-              <a:rPr lang="en-US" sz="1500" dirty="0">
-                <a:solidFill>
-                  <a:schemeClr val="bg2"/>
-                </a:solidFill>
-              </a:rPr>
-              <a:t>This deck and a quick-reference card: [insert link]</a:t>
-            </a:r>
-            <a:endParaRPr lang="en-US" sz="1500" dirty="0"/>
-          </a:p>
-        </p:txBody>
-      </p:sp>
-      <p:sp>
-        <p:nvSpPr>
-          <p:cNvPr id="25" name="Slide Number Placeholder 0"/>
-          <p:cNvSpPr>
-            <a:spLocks noGrp="1"/>
-          </p:cNvSpPr>
-          <p:nvPr>
-            <p:ph type="sldNum" sz="quarter" idx="4294967295"/>
-          </p:nvPr>
-        </p:nvSpPr>
-        <p:spPr>
-          <a:xfrm>
-            <a:off x="11094415" y="6382512"/>
-            <a:ext cx="548640" cy="274320"/>
-          </a:xfrm>
-          <a:prstGeom prst="rect">
-            <a:avLst/>
-          </a:prstGeom>
-          <a:extLst>
-            <a:ext uri="{C572A759-6A51-4108-AA02-DFA0A04FC94B}">
-              <ma14:wrappingTextBoxFlag xmlns:ma14="http://schemas.microsoft.com/office/mac/drawingml/2011/main" val="0"/>
-            </a:ext>
-          </a:extLst>
-        </p:spPr>
-        <p:txBody>
-          <a:bodyPr/>
-          <a:lstStyle>
-            <a:lvl1pPr>
-              <a:defRPr sz="1100">
-                <a:solidFill>
-                  <a:srgbClr val="BFE6EC"/>
-                </a:solidFill>
-              </a:defRPr>
-            </a:lvl1pPr>
-          </a:lstStyle>
-          <a:p>
-            <a:pPr algn="r"/>
-            <a:fld id="{F7021451-1387-4CA6-816F-3879F97B5CBC}" type="slidenum">
-              <a:rPr b="0" lang="en-US"/>
-              <a:t>16</a:t>
-            </a:fld>
-            <a:endParaRPr lang="en-US"/>
-          </a:p>
-        </p:txBody>
-      </p:sp>
-    </p:spTree>
-  </p:cSld>
-  <p:clrMapOvr>
-    <a:masterClrMapping/>
-  </p:clrMapOvr>
-  <p:transition spd="med">
-    <p:fade/>
-  </p:transition>
-  <p:timing>
-    <p:tnLst>
-      <p:par>
-        <p:cTn id="1" dur="indefinite" restart="never" nodeType="tmRoot">
-          <p:childTnLst>
-            <p:par>
-              <p:cTn id="2" fill="hold">
-                <p:stCondLst>
-                  <p:cond delay="indefinite"/>
-                  <p:cond evt="onBegin" delay="0">
-                    <p:tn val="2"/>
-                  </p:cond>
-                </p:stCondLst>
-                <p:childTnLst>
-                  <p:par>
-                    <p:cTn id="3" fill="hold">
-                      <p:stCondLst>
-                        <p:cond delay="0"/>
-                      </p:stCondLst>
-                      <p:childTnLst>
-                        <p:par>
-                          <p:cTn id="4" presetID="1" presetClass="mediacall" presetSubtype="0" fill="hold" nodeType="afterEffect">
-                            <p:stCondLst>
-                              <p:cond delay="0"/>
-                            </p:stCondLst>
-                            <p:childTnLst>
-                              <p:cmd type="call" cmd="playFrom(0.0)">
-                                <p:cBhvr>
-                                  <p:cTn id="5" dur="8000" fill="hold"/>
-                                  <p:tgtEl>
-                                    <p:spTgt spid="3"/>
-                                  </p:tgtEl>
-                                </p:cBhvr>
-                              </p:cmd>
-                            </p:childTnLst>
-                          </p:cTn>
-                        </p:par>
-                      </p:childTnLst>
-                    </p:cTn>
-                  </p:par>
-                </p:childTnLst>
-              </p:cTn>
-            </p:par>
-            <p:video>
-              <p:cMediaNode vol="0" mute="1">
-                <p:cTn id="6" repeatCount="indefinite" fill="hold" display="0">
-                  <p:stCondLst>
-                    <p:cond delay="indefinite"/>
-                  </p:stCondLst>
-                </p:cTn>
-                <p:tgtEl>
-                  <p:spTgt spid="3"/>
-                </p:tgtEl>
-              </p:cMediaNode>
-            </p:video>
-          </p:childTnLst>
-        </p:cTn>
-      </p:par>
-    </p:tnLst>
-  </p:timing>
-</p:sld>
-</file>
-
-<file path=ppt/slides/slide17.xml><?xml version="1.0" encoding="utf-8"?>
-<p:sld xmlns:a="http://schemas.openxmlformats.org/drawingml/2006/main" xmlns:r="http://schemas.openxmlformats.org/officeDocument/2006/relationships" xmlns:p="http://schemas.openxmlformats.org/presentationml/2006/main">
-  <p:cSld name="Slide 17">
-    <p:spTree>
-      <p:nvGrpSpPr>
-        <p:cNvPr id="1" name=""/>
-        <p:cNvGrpSpPr/>
-        <p:nvPr/>
-      </p:nvGrpSpPr>
-      <p:grpSpPr>
-        <a:xfrm>
-          <a:off x="0" y="0"/>
-          <a:ext cx="0" cy="0"/>
-          <a:chOff x="0" y="0"/>
-          <a:chExt cx="0" cy="0"/>
-        </a:xfrm>
-      </p:grpSpPr>
-      <p:pic>
-        <p:nvPicPr>
-          <p:cNvPr id="3" name="Animated background">
-            <a:hlinkClick r:id="" action="ppaction://media"/>
-          </p:cNvPr>
-          <p:cNvPicPr>
-            <a:picLocks noChangeAspect="1"/>
-          </p:cNvPicPr>
-          <p:nvPr>
-            <a:videoFile r:link="rId1"/>
-            <p:extLst>
-              <p:ext uri="{DAA4B4D4-6D71-4841-9C94-3DE7FCFB9230}">
-                <p14:media xmlns:p14="http://schemas.microsoft.com/office/powerpoint/2010/main" r:embed="rId2"/>
-              </p:ext>
-            </p:extLst>
-          </p:nvPr>
-        </p:nvPicPr>
-        <p:blipFill>
-          <a:blip r:embed="rId3"/>
-          <a:stretch>
-            <a:fillRect/>
-          </a:stretch>
-        </p:blipFill>
-        <p:spPr>
-          <a:xfrm>
-            <a:off x="0" y="0"/>
-            <a:ext cx="12191695" cy="6858000"/>
-          </a:xfrm>
-          <a:prstGeom prst="rect">
-            <a:avLst/>
-          </a:prstGeom>
-        </p:spPr>
-      </p:pic>
-      <p:sp>
-        <p:nvSpPr>
           <p:cNvPr id="3" name="Closing panel"/>
           <p:cNvSpPr/>
           <p:nvPr/>
@@ -17181,7 +14982,7 @@
                   <a:schemeClr val="bg1"/>
                 </a:solidFill>
               </a:rPr>
-              <a:t>Tracking your orders (My Orders)</a:t>
+              <a:t>Purchase Orders</a:t>
             </a:r>
             <a:endParaRPr lang="en-US" sz="3400" dirty="0"/>
           </a:p>
@@ -17189,381 +14990,18 @@
       </p:sp>
       <p:sp>
         <p:nvSpPr>
-          <p:cNvPr id="6" name="Status SUBMITTED"/>
+          <p:cNvPr id="6" name="PO explanation card"/>
           <p:cNvSpPr/>
           <p:nvPr/>
         </p:nvSpPr>
         <p:spPr>
           <a:xfrm>
             <a:off x="548640" y="1417320"/>
-            <a:ext cx="3337560" cy="685800"/>
+            <a:ext cx="5394960" cy="2148840"/>
           </a:xfrm>
           <a:prstGeom prst="roundRect">
             <a:avLst>
-              <a:gd name="adj" fmla="val 49333"/>
-            </a:avLst>
-          </a:prstGeom>
-          <a:solidFill>
-            <a:schemeClr val="accent6"/>
-          </a:solidFill>
-          <a:ln w="25400">
-            <a:solidFill>
-              <a:schemeClr val="accent4"/>
-            </a:solidFill>
-            <a:prstDash val="solid"/>
-          </a:ln>
-        </p:spPr>
-      </p:sp>
-      <p:sp>
-        <p:nvSpPr>
-          <p:cNvPr id="7" name="Text 4"/>
-          <p:cNvSpPr txBox="1"/>
-          <p:nvPr/>
-        </p:nvSpPr>
-        <p:spPr>
-          <a:xfrm>
-            <a:off x="548640" y="1417320"/>
-            <a:ext cx="3337560" cy="685800"/>
-          </a:xfrm>
-          <a:prstGeom prst="rect">
-            <a:avLst/>
-          </a:prstGeom>
-          <a:noFill/>
-          <a:ln/>
-        </p:spPr>
-        <p:txBody>
-          <a:bodyPr wrap="square" lIns="0" tIns="0" rIns="0" bIns="0" rtlCol="0" anchor="ctr"/>
-          <a:lstStyle/>
-          <a:p>
-            <a:pPr algn="ctr" indent="0" marL="0">
-              <a:spcAft>
-                <a:spcPts val="400"/>
-              </a:spcAft>
-              <a:buNone/>
-            </a:pPr>
-            <a:r>
-              <a:rPr lang="en-US" sz="2000" b="1" spc="100" kern="0" dirty="0">
-                <a:solidFill>
-                  <a:schemeClr val="accent4"/>
-                </a:solidFill>
-              </a:rPr>
-              <a:t>SUBMITTED</a:t>
-            </a:r>
-            <a:endParaRPr lang="en-US" sz="2000" dirty="0"/>
-          </a:p>
-        </p:txBody>
-      </p:sp>
-      <p:sp>
-        <p:nvSpPr>
-          <p:cNvPr id="8" name="Text 5"/>
-          <p:cNvSpPr txBox="1"/>
-          <p:nvPr/>
-        </p:nvSpPr>
-        <p:spPr>
-          <a:xfrm>
-            <a:off x="640080" y="2240280"/>
-            <a:ext cx="3154680" cy="685800"/>
-          </a:xfrm>
-          <a:prstGeom prst="rect">
-            <a:avLst/>
-          </a:prstGeom>
-          <a:noFill/>
-          <a:ln/>
-        </p:spPr>
-        <p:txBody>
-          <a:bodyPr wrap="square" lIns="0" tIns="0" rIns="0" bIns="0" rtlCol="0" anchor="t"/>
-          <a:lstStyle/>
-          <a:p>
-            <a:pPr algn="ctr" indent="0" marL="0">
-              <a:spcAft>
-                <a:spcPts val="400"/>
-              </a:spcAft>
-              <a:buNone/>
-            </a:pPr>
-            <a:r>
-              <a:rPr lang="en-US" sz="1500" dirty="0">
-                <a:solidFill>
-                  <a:schemeClr val="bg2"/>
-                </a:solidFill>
-              </a:rPr>
-              <a:t>Head office has received it.</a:t>
-            </a:r>
-            <a:endParaRPr lang="en-US" sz="1500" dirty="0"/>
-          </a:p>
-        </p:txBody>
-      </p:sp>
-      <p:sp>
-        <p:nvSpPr>
-          <p:cNvPr id="9" name="Status arrow 1"/>
-          <p:cNvSpPr/>
-          <p:nvPr/>
-        </p:nvSpPr>
-        <p:spPr>
-          <a:xfrm>
-            <a:off x="3959352" y="1760220"/>
-            <a:ext cx="402336" cy="0"/>
-          </a:xfrm>
-          <a:prstGeom prst="line">
-            <a:avLst/>
-          </a:prstGeom>
-          <a:noFill/>
-          <a:ln w="25400">
-            <a:solidFill>
-              <a:schemeClr val="bg2"/>
-            </a:solidFill>
-            <a:prstDash val="solid"/>
-            <a:tailEnd type="triangle"/>
-          </a:ln>
-        </p:spPr>
-      </p:sp>
-      <p:sp>
-        <p:nvSpPr>
-          <p:cNvPr id="10" name="Status ASSIGNED"/>
-          <p:cNvSpPr/>
-          <p:nvPr/>
-        </p:nvSpPr>
-        <p:spPr>
-          <a:xfrm>
-            <a:off x="4434840" y="1417320"/>
-            <a:ext cx="3337560" cy="685800"/>
-          </a:xfrm>
-          <a:prstGeom prst="roundRect">
-            <a:avLst>
-              <a:gd name="adj" fmla="val 49333"/>
-            </a:avLst>
-          </a:prstGeom>
-          <a:solidFill>
-            <a:schemeClr val="accent6"/>
-          </a:solidFill>
-          <a:ln w="25400">
-            <a:solidFill>
-              <a:schemeClr val="accent1"/>
-            </a:solidFill>
-            <a:prstDash val="solid"/>
-          </a:ln>
-        </p:spPr>
-      </p:sp>
-      <p:sp>
-        <p:nvSpPr>
-          <p:cNvPr id="11" name="Text 8"/>
-          <p:cNvSpPr txBox="1"/>
-          <p:nvPr/>
-        </p:nvSpPr>
-        <p:spPr>
-          <a:xfrm>
-            <a:off x="4434840" y="1417320"/>
-            <a:ext cx="3337560" cy="685800"/>
-          </a:xfrm>
-          <a:prstGeom prst="rect">
-            <a:avLst/>
-          </a:prstGeom>
-          <a:noFill/>
-          <a:ln/>
-        </p:spPr>
-        <p:txBody>
-          <a:bodyPr wrap="square" lIns="0" tIns="0" rIns="0" bIns="0" rtlCol="0" anchor="ctr"/>
-          <a:lstStyle/>
-          <a:p>
-            <a:pPr algn="ctr" indent="0" marL="0">
-              <a:spcAft>
-                <a:spcPts val="400"/>
-              </a:spcAft>
-              <a:buNone/>
-            </a:pPr>
-            <a:r>
-              <a:rPr lang="en-US" sz="2000" b="1" spc="100" kern="0" dirty="0">
-                <a:solidFill>
-                  <a:schemeClr val="accent1"/>
-                </a:solidFill>
-              </a:rPr>
-              <a:t>ASSIGNED</a:t>
-            </a:r>
-            <a:endParaRPr lang="en-US" sz="2000" dirty="0"/>
-          </a:p>
-        </p:txBody>
-      </p:sp>
-      <p:sp>
-        <p:nvSpPr>
-          <p:cNvPr id="12" name="Text 9"/>
-          <p:cNvSpPr txBox="1"/>
-          <p:nvPr/>
-        </p:nvSpPr>
-        <p:spPr>
-          <a:xfrm>
-            <a:off x="4526280" y="2240280"/>
-            <a:ext cx="3154680" cy="685800"/>
-          </a:xfrm>
-          <a:prstGeom prst="rect">
-            <a:avLst/>
-          </a:prstGeom>
-          <a:noFill/>
-          <a:ln/>
-        </p:spPr>
-        <p:txBody>
-          <a:bodyPr wrap="square" lIns="0" tIns="0" rIns="0" bIns="0" rtlCol="0" anchor="t"/>
-          <a:lstStyle/>
-          <a:p>
-            <a:pPr algn="ctr" indent="0" marL="0">
-              <a:spcAft>
-                <a:spcPts val="400"/>
-              </a:spcAft>
-              <a:buNone/>
-            </a:pPr>
-            <a:r>
-              <a:rPr lang="en-US" sz="1500" dirty="0">
-                <a:solidFill>
-                  <a:schemeClr val="bg2"/>
-                </a:solidFill>
-              </a:rPr>
-              <a:t>Suppliers arranged for every item. It's on its way.</a:t>
-            </a:r>
-            <a:endParaRPr lang="en-US" sz="1500" dirty="0"/>
-          </a:p>
-        </p:txBody>
-      </p:sp>
-      <p:sp>
-        <p:nvSpPr>
-          <p:cNvPr id="13" name="Status arrow 2"/>
-          <p:cNvSpPr/>
-          <p:nvPr/>
-        </p:nvSpPr>
-        <p:spPr>
-          <a:xfrm>
-            <a:off x="7845552" y="1760220"/>
-            <a:ext cx="402336" cy="0"/>
-          </a:xfrm>
-          <a:prstGeom prst="line">
-            <a:avLst/>
-          </a:prstGeom>
-          <a:noFill/>
-          <a:ln w="25400">
-            <a:solidFill>
-              <a:schemeClr val="bg2"/>
-            </a:solidFill>
-            <a:prstDash val="solid"/>
-            <a:tailEnd type="triangle"/>
-          </a:ln>
-        </p:spPr>
-      </p:sp>
-      <p:sp>
-        <p:nvSpPr>
-          <p:cNvPr id="14" name="Status CONFIRMED"/>
-          <p:cNvSpPr/>
-          <p:nvPr/>
-        </p:nvSpPr>
-        <p:spPr>
-          <a:xfrm>
-            <a:off x="8321040" y="1417320"/>
-            <a:ext cx="3337560" cy="685800"/>
-          </a:xfrm>
-          <a:prstGeom prst="roundRect">
-            <a:avLst>
-              <a:gd name="adj" fmla="val 49333"/>
-            </a:avLst>
-          </a:prstGeom>
-          <a:solidFill>
-            <a:schemeClr val="accent6"/>
-          </a:solidFill>
-          <a:ln w="25400">
-            <a:solidFill>
-              <a:schemeClr val="accent2"/>
-            </a:solidFill>
-            <a:prstDash val="solid"/>
-          </a:ln>
-        </p:spPr>
-      </p:sp>
-      <p:sp>
-        <p:nvSpPr>
-          <p:cNvPr id="15" name="Text 12"/>
-          <p:cNvSpPr txBox="1"/>
-          <p:nvPr/>
-        </p:nvSpPr>
-        <p:spPr>
-          <a:xfrm>
-            <a:off x="8321040" y="1417320"/>
-            <a:ext cx="3337560" cy="685800"/>
-          </a:xfrm>
-          <a:prstGeom prst="rect">
-            <a:avLst/>
-          </a:prstGeom>
-          <a:noFill/>
-          <a:ln/>
-        </p:spPr>
-        <p:txBody>
-          <a:bodyPr wrap="square" lIns="0" tIns="0" rIns="0" bIns="0" rtlCol="0" anchor="ctr"/>
-          <a:lstStyle/>
-          <a:p>
-            <a:pPr algn="ctr" indent="0" marL="0">
-              <a:spcAft>
-                <a:spcPts val="400"/>
-              </a:spcAft>
-              <a:buNone/>
-            </a:pPr>
-            <a:r>
-              <a:rPr lang="en-US" sz="2000" b="1" spc="100" kern="0" dirty="0">
-                <a:solidFill>
-                  <a:schemeClr val="accent2"/>
-                </a:solidFill>
-              </a:rPr>
-              <a:t>CONFIRMED</a:t>
-            </a:r>
-            <a:endParaRPr lang="en-US" sz="2000" dirty="0"/>
-          </a:p>
-        </p:txBody>
-      </p:sp>
-      <p:sp>
-        <p:nvSpPr>
-          <p:cNvPr id="16" name="Text 13"/>
-          <p:cNvSpPr txBox="1"/>
-          <p:nvPr/>
-        </p:nvSpPr>
-        <p:spPr>
-          <a:xfrm>
-            <a:off x="8412480" y="2240280"/>
-            <a:ext cx="3154680" cy="685800"/>
-          </a:xfrm>
-          <a:prstGeom prst="rect">
-            <a:avLst/>
-          </a:prstGeom>
-          <a:noFill/>
-          <a:ln/>
-        </p:spPr>
-        <p:txBody>
-          <a:bodyPr wrap="square" lIns="0" tIns="0" rIns="0" bIns="0" rtlCol="0" anchor="t"/>
-          <a:lstStyle/>
-          <a:p>
-            <a:pPr algn="ctr" indent="0" marL="0">
-              <a:spcAft>
-                <a:spcPts val="400"/>
-              </a:spcAft>
-              <a:buNone/>
-            </a:pPr>
-            <a:r>
-              <a:rPr lang="en-US" sz="1500" dirty="0">
-                <a:solidFill>
-                  <a:schemeClr val="bg2"/>
-                </a:solidFill>
-              </a:rPr>
-              <a:t>You have recorded what was delivered.</a:t>
-            </a:r>
-            <a:endParaRPr lang="en-US" sz="1500" dirty="0"/>
-          </a:p>
-        </p:txBody>
-      </p:sp>
-      <p:sp>
-        <p:nvSpPr>
-          <p:cNvPr id="17" name="Tracking notes card"/>
-          <p:cNvSpPr/>
-          <p:nvPr/>
-        </p:nvSpPr>
-        <p:spPr>
-          <a:xfrm>
-            <a:off x="548640" y="3154680"/>
-            <a:ext cx="6035040" cy="2240280"/>
-          </a:xfrm>
-          <a:prstGeom prst="roundRect">
-            <a:avLst>
-              <a:gd name="adj" fmla="val 4898"/>
+              <a:gd name="adj" fmla="val 5106"/>
             </a:avLst>
           </a:prstGeom>
           <a:solidFill>
@@ -17581,112 +15019,34 @@
       </p:sp>
       <p:sp>
         <p:nvSpPr>
-          <p:cNvPr id="18" name="Text 15"/>
-          <p:cNvSpPr txBox="1"/>
-          <p:nvPr/>
-        </p:nvSpPr>
-        <p:spPr>
-          <a:xfrm>
-            <a:off x="822960" y="3383280"/>
-            <a:ext cx="5486400" cy="1920240"/>
-          </a:xfrm>
-          <a:prstGeom prst="rect">
-            <a:avLst/>
-          </a:prstGeom>
-          <a:noFill/>
-          <a:ln/>
-        </p:spPr>
-        <p:txBody>
-          <a:bodyPr wrap="square" lIns="0" tIns="0" rIns="0" bIns="0" rtlCol="0" anchor="t"/>
-          <a:lstStyle/>
-          <a:p>
-            <a:pPr marL="228600" indent="-228600">
-              <a:spcAft>
-                <a:spcPts val="800"/>
-              </a:spcAft>
-              <a:buSzPct val="100000"/>
-              <a:buChar char="•"/>
-            </a:pPr>
-            <a:r>
-              <a:rPr lang="en-US" sz="1500" dirty="0">
-                <a:solidFill>
-                  <a:schemeClr val="bg1"/>
-                </a:solidFill>
-              </a:rPr>
-              <a:t>Every order is listed by delivery date, with its item count and a coloured status.</a:t>
-            </a:r>
-            <a:endParaRPr lang="en-US" sz="1500" dirty="0"/>
-          </a:p>
-          <a:p>
-            <a:pPr marL="228600" indent="-228600">
-              <a:spcAft>
-                <a:spcPts val="800"/>
-              </a:spcAft>
-              <a:buSzPct val="100000"/>
-              <a:buChar char="•"/>
-            </a:pPr>
-            <a:r>
-              <a:rPr lang="en-US" sz="1500" dirty="0">
-                <a:solidFill>
-                  <a:schemeClr val="bg1"/>
-                </a:solidFill>
-              </a:rPr>
-              <a:t>Click an order to see each product and quantity.</a:t>
-            </a:r>
-            <a:endParaRPr lang="en-US" sz="1500" dirty="0"/>
-          </a:p>
-          <a:p>
-            <a:pPr marL="228600" indent="-228600">
-              <a:spcAft>
-                <a:spcPts val="800"/>
-              </a:spcAft>
-              <a:buSzPct val="100000"/>
-              <a:buChar char="•"/>
-            </a:pPr>
-            <a:r>
-              <a:rPr lang="en-US" sz="1500" dirty="0">
-                <a:solidFill>
-                  <a:schemeClr val="bg1"/>
-                </a:solidFill>
-              </a:rPr>
-              <a:t>Items head office added for you are highlighted as "Ordered by SPAR Fresh Procurement".</a:t>
-            </a:r>
-            <a:endParaRPr lang="en-US" sz="1500" dirty="0"/>
-          </a:p>
-        </p:txBody>
-      </p:sp>
-      <p:sp>
-        <p:nvSpPr>
-          <p:cNvPr id="19" name="Screenshot placeholder"/>
+          <p:cNvPr id="7" name="Purchase order circle"/>
           <p:cNvSpPr/>
           <p:nvPr/>
         </p:nvSpPr>
         <p:spPr>
           <a:xfrm>
-            <a:off x="6812280" y="3154680"/>
-            <a:ext cx="4828032" cy="2240280"/>
-          </a:xfrm>
-          <a:prstGeom prst="roundRect">
-            <a:avLst>
-              <a:gd name="adj" fmla="val 4898"/>
-            </a:avLst>
+            <a:off x="822960" y="1691640"/>
+            <a:ext cx="822960" cy="822960"/>
+          </a:xfrm>
+          <a:prstGeom prst="ellipse">
+            <a:avLst/>
           </a:prstGeom>
           <a:solidFill>
             <a:schemeClr val="tx2">
-              <a:alpha val="65000"/>
+              <a:alpha val="80000"/>
             </a:schemeClr>
           </a:solidFill>
-          <a:ln w="15875">
+          <a:ln w="19050">
             <a:solidFill>
               <a:schemeClr val="accent1"/>
             </a:solidFill>
-            <a:prstDash val="dash"/>
+            <a:prstDash val="solid"/>
           </a:ln>
         </p:spPr>
       </p:sp>
       <p:pic>
         <p:nvPicPr>
-          <p:cNvPr id="20" name="Screenshot icon" descr="preencoded.png">    </p:cNvPr>
+          <p:cNvPr id="8" name="Purchase order icon" descr="preencoded.png">    </p:cNvPr>
           <p:cNvPicPr>
             <a:picLocks noChangeAspect="1"/>
           </p:cNvPicPr>
@@ -17700,8 +15060,8 @@
         </p:blipFill>
         <p:spPr>
           <a:xfrm>
-            <a:off x="8951976" y="3634740"/>
-            <a:ext cx="548640" cy="548640"/>
+            <a:off x="1020470" y="1889150"/>
+            <a:ext cx="427939" cy="427939"/>
           </a:xfrm>
           <a:prstGeom prst="rect">
             <a:avLst/>
@@ -17710,14 +15070,14 @@
       </p:pic>
       <p:sp>
         <p:nvSpPr>
-          <p:cNvPr id="21" name="Screenshot label"/>
+          <p:cNvPr id="9" name="Text 5"/>
           <p:cNvSpPr txBox="1"/>
           <p:nvPr/>
         </p:nvSpPr>
         <p:spPr>
           <a:xfrm>
-            <a:off x="7086600" y="4320540"/>
-            <a:ext cx="4279392" cy="822960"/>
+            <a:off x="1874520" y="1645920"/>
+            <a:ext cx="3840480" cy="1737360"/>
           </a:xfrm>
           <a:prstGeom prst="rect">
             <a:avLst/>
@@ -17729,6 +15089,98 @@
           <a:bodyPr wrap="square" lIns="0" tIns="0" rIns="0" bIns="0" rtlCol="0" anchor="t"/>
           <a:lstStyle/>
           <a:p>
+            <a:pPr indent="0" marL="0">
+              <a:spcAft>
+                <a:spcPts val="400"/>
+              </a:spcAft>
+              <a:buNone/>
+            </a:pPr>
+            <a:r>
+              <a:rPr lang="en-US" sz="1600" dirty="0">
+                <a:solidFill>
+                  <a:schemeClr val="bg1"/>
+                </a:solidFill>
+              </a:rPr>
+              <a:t>When head office issues a purchase order to a supplier for your branch, it appears here, with the supplier, the delivery date and the items.</a:t>
+            </a:r>
+            <a:endParaRPr lang="en-US" sz="1600" dirty="0"/>
+          </a:p>
+        </p:txBody>
+      </p:sp>
+      <p:sp>
+        <p:nvSpPr>
+          <p:cNvPr id="10" name="PO action Search"/>
+          <p:cNvSpPr/>
+          <p:nvPr/>
+        </p:nvSpPr>
+        <p:spPr>
+          <a:xfrm>
+            <a:off x="548640" y="3794760"/>
+            <a:ext cx="1645920" cy="1600200"/>
+          </a:xfrm>
+          <a:prstGeom prst="roundRect">
+            <a:avLst>
+              <a:gd name="adj" fmla="val 6857"/>
+            </a:avLst>
+          </a:prstGeom>
+          <a:solidFill>
+            <a:schemeClr val="accent6">
+              <a:alpha val="88000"/>
+            </a:schemeClr>
+          </a:solidFill>
+          <a:ln w="12700">
+            <a:solidFill>
+              <a:schemeClr val="accent5"/>
+            </a:solidFill>
+            <a:prstDash val="solid"/>
+          </a:ln>
+        </p:spPr>
+      </p:sp>
+      <p:pic>
+        <p:nvPicPr>
+          <p:cNvPr id="11" name="PO action icon Search" descr="preencoded.png">    </p:cNvPr>
+          <p:cNvPicPr>
+            <a:picLocks noChangeAspect="1"/>
+          </p:cNvPicPr>
+          <p:nvPr/>
+        </p:nvPicPr>
+        <p:blipFill>
+          <a:blip r:embed="rId5"/>
+          <a:stretch>
+            <a:fillRect/>
+          </a:stretch>
+        </p:blipFill>
+        <p:spPr>
+          <a:xfrm>
+            <a:off x="1124712" y="4023360"/>
+            <a:ext cx="493776" cy="493776"/>
+          </a:xfrm>
+          <a:prstGeom prst="rect">
+            <a:avLst/>
+          </a:prstGeom>
+        </p:spPr>
+      </p:pic>
+      <p:sp>
+        <p:nvSpPr>
+          <p:cNvPr id="12" name="Text 7"/>
+          <p:cNvSpPr txBox="1"/>
+          <p:nvPr/>
+        </p:nvSpPr>
+        <p:spPr>
+          <a:xfrm>
+            <a:off x="640080" y="4617720"/>
+            <a:ext cx="1463040" cy="685800"/>
+          </a:xfrm>
+          <a:prstGeom prst="rect">
+            <a:avLst/>
+          </a:prstGeom>
+          <a:noFill/>
+          <a:ln/>
+        </p:spPr>
+        <p:txBody>
+          <a:bodyPr wrap="square" lIns="0" tIns="0" rIns="0" bIns="0" rtlCol="0" anchor="t"/>
+          <a:lstStyle/>
+          <a:p>
             <a:pPr algn="ctr" indent="0" marL="0">
               <a:spcAft>
                 <a:spcPts val="400"/>
@@ -17736,15 +15188,107 @@
               <a:buNone/>
             </a:pPr>
             <a:r>
-              <a:rPr lang="en-US" sz="1300" b="1" dirty="0">
+              <a:rPr lang="en-US" sz="1500" b="1" dirty="0">
+                <a:solidFill>
+                  <a:schemeClr val="bg1"/>
+                </a:solidFill>
+              </a:rPr>
+              <a:t>Search</a:t>
+            </a:r>
+            <a:endParaRPr lang="en-US" sz="1500" dirty="0"/>
+          </a:p>
+          <a:p>
+            <a:pPr algn="ctr" indent="0" marL="0">
+              <a:spcAft>
+                <a:spcPts val="400"/>
+              </a:spcAft>
+              <a:buNone/>
+            </a:pPr>
+            <a:r>
+              <a:rPr lang="en-US" sz="1500" dirty="0">
                 <a:solidFill>
                   <a:schemeClr val="bg2"/>
                 </a:solidFill>
               </a:rPr>
-              <a:t>Insert screenshot</a:t>
-            </a:r>
-            <a:endParaRPr lang="en-US" sz="1300" dirty="0"/>
-          </a:p>
+              <a:t>the list</a:t>
+            </a:r>
+            <a:endParaRPr lang="en-US" sz="1500" dirty="0"/>
+          </a:p>
+        </p:txBody>
+      </p:sp>
+      <p:sp>
+        <p:nvSpPr>
+          <p:cNvPr id="13" name="PO action Open"/>
+          <p:cNvSpPr/>
+          <p:nvPr/>
+        </p:nvSpPr>
+        <p:spPr>
+          <a:xfrm>
+            <a:off x="2423160" y="3794760"/>
+            <a:ext cx="1645920" cy="1600200"/>
+          </a:xfrm>
+          <a:prstGeom prst="roundRect">
+            <a:avLst>
+              <a:gd name="adj" fmla="val 6857"/>
+            </a:avLst>
+          </a:prstGeom>
+          <a:solidFill>
+            <a:schemeClr val="accent6">
+              <a:alpha val="88000"/>
+            </a:schemeClr>
+          </a:solidFill>
+          <a:ln w="12700">
+            <a:solidFill>
+              <a:schemeClr val="accent5"/>
+            </a:solidFill>
+            <a:prstDash val="solid"/>
+          </a:ln>
+        </p:spPr>
+      </p:sp>
+      <p:pic>
+        <p:nvPicPr>
+          <p:cNvPr id="14" name="PO action icon Open" descr="preencoded.png">    </p:cNvPr>
+          <p:cNvPicPr>
+            <a:picLocks noChangeAspect="1"/>
+          </p:cNvPicPr>
+          <p:nvPr/>
+        </p:nvPicPr>
+        <p:blipFill>
+          <a:blip r:embed="rId6"/>
+          <a:stretch>
+            <a:fillRect/>
+          </a:stretch>
+        </p:blipFill>
+        <p:spPr>
+          <a:xfrm>
+            <a:off x="2999232" y="4023360"/>
+            <a:ext cx="493776" cy="493776"/>
+          </a:xfrm>
+          <a:prstGeom prst="rect">
+            <a:avLst/>
+          </a:prstGeom>
+        </p:spPr>
+      </p:pic>
+      <p:sp>
+        <p:nvSpPr>
+          <p:cNvPr id="15" name="Text 9"/>
+          <p:cNvSpPr txBox="1"/>
+          <p:nvPr/>
+        </p:nvSpPr>
+        <p:spPr>
+          <a:xfrm>
+            <a:off x="2514600" y="4617720"/>
+            <a:ext cx="1463040" cy="685800"/>
+          </a:xfrm>
+          <a:prstGeom prst="rect">
+            <a:avLst/>
+          </a:prstGeom>
+          <a:noFill/>
+          <a:ln/>
+        </p:spPr>
+        <p:txBody>
+          <a:bodyPr wrap="square" lIns="0" tIns="0" rIns="0" bIns="0" rtlCol="0" anchor="t"/>
+          <a:lstStyle/>
           <a:p>
             <a:pPr algn="ctr" indent="0" marL="0">
               <a:spcAft>
@@ -17753,20 +15297,192 @@
               <a:buNone/>
             </a:pPr>
             <a:r>
-              <a:rPr lang="en-US" sz="1300" dirty="0">
+              <a:rPr lang="en-US" sz="1500" b="1" dirty="0">
+                <a:solidFill>
+                  <a:schemeClr val="bg1"/>
+                </a:solidFill>
+              </a:rPr>
+              <a:t>Open</a:t>
+            </a:r>
+            <a:endParaRPr lang="en-US" sz="1500" dirty="0"/>
+          </a:p>
+          <a:p>
+            <a:pPr algn="ctr" indent="0" marL="0">
+              <a:spcAft>
+                <a:spcPts val="400"/>
+              </a:spcAft>
+              <a:buNone/>
+            </a:pPr>
+            <a:r>
+              <a:rPr lang="en-US" sz="1500" dirty="0">
                 <a:solidFill>
                   <a:schemeClr val="bg2"/>
                 </a:solidFill>
               </a:rPr>
-              <a:t>My Orders list, one order of each status, one opened</a:t>
-            </a:r>
-            <a:endParaRPr lang="en-US" sz="1300" dirty="0"/>
-          </a:p>
-        </p:txBody>
-      </p:sp>
-      <p:sp>
-        <p:nvSpPr>
-          <p:cNvPr id="22" name="Benefit pill"/>
+              <a:t>a PO</a:t>
+            </a:r>
+            <a:endParaRPr lang="en-US" sz="1500" dirty="0"/>
+          </a:p>
+        </p:txBody>
+      </p:sp>
+      <p:sp>
+        <p:nvSpPr>
+          <p:cNvPr id="16" name="PO action Print"/>
+          <p:cNvSpPr/>
+          <p:nvPr/>
+        </p:nvSpPr>
+        <p:spPr>
+          <a:xfrm>
+            <a:off x="4297680" y="3794760"/>
+            <a:ext cx="1645920" cy="1600200"/>
+          </a:xfrm>
+          <a:prstGeom prst="roundRect">
+            <a:avLst>
+              <a:gd name="adj" fmla="val 6857"/>
+            </a:avLst>
+          </a:prstGeom>
+          <a:solidFill>
+            <a:schemeClr val="accent6">
+              <a:alpha val="88000"/>
+            </a:schemeClr>
+          </a:solidFill>
+          <a:ln w="12700">
+            <a:solidFill>
+              <a:schemeClr val="accent5"/>
+            </a:solidFill>
+            <a:prstDash val="solid"/>
+          </a:ln>
+        </p:spPr>
+      </p:sp>
+      <p:pic>
+        <p:nvPicPr>
+          <p:cNvPr id="17" name="PO action icon Print" descr="preencoded.png">    </p:cNvPr>
+          <p:cNvPicPr>
+            <a:picLocks noChangeAspect="1"/>
+          </p:cNvPicPr>
+          <p:nvPr/>
+        </p:nvPicPr>
+        <p:blipFill>
+          <a:blip r:embed="rId7"/>
+          <a:stretch>
+            <a:fillRect/>
+          </a:stretch>
+        </p:blipFill>
+        <p:spPr>
+          <a:xfrm>
+            <a:off x="4873752" y="4023360"/>
+            <a:ext cx="493776" cy="493776"/>
+          </a:xfrm>
+          <a:prstGeom prst="rect">
+            <a:avLst/>
+          </a:prstGeom>
+        </p:spPr>
+      </p:pic>
+      <p:sp>
+        <p:nvSpPr>
+          <p:cNvPr id="18" name="Text 11"/>
+          <p:cNvSpPr txBox="1"/>
+          <p:nvPr/>
+        </p:nvSpPr>
+        <p:spPr>
+          <a:xfrm>
+            <a:off x="4389120" y="4617720"/>
+            <a:ext cx="1463040" cy="685800"/>
+          </a:xfrm>
+          <a:prstGeom prst="rect">
+            <a:avLst/>
+          </a:prstGeom>
+          <a:noFill/>
+          <a:ln/>
+        </p:spPr>
+        <p:txBody>
+          <a:bodyPr wrap="square" lIns="0" tIns="0" rIns="0" bIns="0" rtlCol="0" anchor="t"/>
+          <a:lstStyle/>
+          <a:p>
+            <a:pPr algn="ctr" indent="0" marL="0">
+              <a:spcAft>
+                <a:spcPts val="400"/>
+              </a:spcAft>
+              <a:buNone/>
+            </a:pPr>
+            <a:r>
+              <a:rPr lang="en-US" sz="1500" b="1" dirty="0">
+                <a:solidFill>
+                  <a:schemeClr val="bg1"/>
+                </a:solidFill>
+              </a:rPr>
+              <a:t>Print</a:t>
+            </a:r>
+            <a:endParaRPr lang="en-US" sz="1500" dirty="0"/>
+          </a:p>
+          <a:p>
+            <a:pPr algn="ctr" indent="0" marL="0">
+              <a:spcAft>
+                <a:spcPts val="400"/>
+              </a:spcAft>
+              <a:buNone/>
+            </a:pPr>
+            <a:r>
+              <a:rPr lang="en-US" sz="1500" dirty="0">
+                <a:solidFill>
+                  <a:schemeClr val="bg2"/>
+                </a:solidFill>
+              </a:rPr>
+              <a:t>or save as PDF</a:t>
+            </a:r>
+            <a:endParaRPr lang="en-US" sz="1500" dirty="0"/>
+          </a:p>
+        </p:txBody>
+      </p:sp>
+      <p:pic>
+        <p:nvPicPr>
+          <p:cNvPr id="19" name="Screenshot: An opened purchase order, approved and ready to print" descr="An opened purchase order, approved and ready to print">    </p:cNvPr>
+          <p:cNvPicPr>
+            <a:picLocks noChangeAspect="1"/>
+          </p:cNvPicPr>
+          <p:nvPr/>
+        </p:nvPicPr>
+        <p:blipFill>
+          <a:blip r:embed="rId8"/>
+          <a:stretch>
+            <a:fillRect/>
+          </a:stretch>
+        </p:blipFill>
+        <p:spPr>
+          <a:xfrm>
+            <a:off x="6153912" y="1417320"/>
+            <a:ext cx="5486400" cy="3977640"/>
+          </a:xfrm>
+          <a:prstGeom prst="rect">
+            <a:avLst/>
+          </a:prstGeom>
+        </p:spPr>
+      </p:pic>
+      <p:sp>
+        <p:nvSpPr>
+          <p:cNvPr id="20" name="Screenshot frame"/>
+          <p:cNvSpPr/>
+          <p:nvPr/>
+        </p:nvSpPr>
+        <p:spPr>
+          <a:xfrm>
+            <a:off x="6153912" y="1417320"/>
+            <a:ext cx="5486400" cy="3977640"/>
+          </a:xfrm>
+          <a:prstGeom prst="rect">
+            <a:avLst/>
+          </a:prstGeom>
+          <a:ln w="19050">
+            <a:solidFill>
+              <a:schemeClr val="accent1"/>
+            </a:solidFill>
+            <a:prstDash val="solid"/>
+          </a:ln>
+        </p:spPr>
+      </p:sp>
+      <p:sp>
+        <p:nvSpPr>
+          <p:cNvPr id="21" name="Benefit pill"/>
           <p:cNvSpPr/>
           <p:nvPr/>
         </p:nvSpPr>
@@ -17795,14 +15511,14 @@
       </p:sp>
       <p:pic>
         <p:nvPicPr>
-          <p:cNvPr id="23" name="Benefit icon" descr="preencoded.png">    </p:cNvPr>
+          <p:cNvPr id="22" name="Benefit icon" descr="preencoded.png">    </p:cNvPr>
           <p:cNvPicPr>
             <a:picLocks noChangeAspect="1"/>
           </p:cNvPicPr>
           <p:nvPr/>
         </p:nvPicPr>
         <p:blipFill>
-          <a:blip r:embed="rId5"/>
+          <a:blip r:embed="rId9"/>
           <a:stretch>
             <a:fillRect/>
           </a:stretch>
@@ -17819,7 +15535,7 @@
       </p:pic>
       <p:sp>
         <p:nvSpPr>
-          <p:cNvPr id="24" name="Text 19"/>
+          <p:cNvPr id="23" name="Text 14"/>
           <p:cNvSpPr txBox="1"/>
           <p:nvPr/>
         </p:nvSpPr>
@@ -17864,7 +15580,7 @@
                   <a:schemeClr val="bg1"/>
                 </a:solidFill>
               </a:rPr>
-              <a:t>You always know where your order stands, without phoning head office.</a:t>
+              <a:t>You know exactly which supplier is bringing what, so you can check the delivery at the door.</a:t>
             </a:r>
             <a:endParaRPr lang="en-US" sz="1600" dirty="0"/>
           </a:p>
